--- a/stegacipher-burn/slides/StegaCIPHER-Burn.pptx
+++ b/stegacipher-burn/slides/StegaCIPHER-Burn.pptx
@@ -2121,7 +2121,7 @@
                 <a:ea typeface="Cambria" pitchFamily="34" charset="-122"/>
                 <a:cs typeface="Cambria" pitchFamily="34" charset="-120"/>
               </a:rPr>
-              <a:t>Result: the Riddle Attack Works</a:t>
+              <a:t>Result: Agents Hijacked — Quietly</a:t>
             </a:r>
             <a:endParaRPr lang="en-US" sz="3000" dirty="0"/>
           </a:p>
@@ -2135,8 +2135,8 @@
         </p:nvSpPr>
         <p:spPr>
           <a:xfrm>
-            <a:off x="2103120" y="1371600"/>
-            <a:ext cx="3840480" cy="1691640"/>
+            <a:off x="731520" y="1371600"/>
+            <a:ext cx="3474720" cy="1691640"/>
           </a:xfrm>
           <a:prstGeom prst="roundRect">
             <a:avLst>
@@ -2157,8 +2157,8 @@
         </p:nvSpPr>
         <p:spPr>
           <a:xfrm>
-            <a:off x="2194560" y="1645920"/>
-            <a:ext cx="3657600" cy="777240"/>
+            <a:off x="822960" y="1645920"/>
+            <a:ext cx="3291840" cy="777240"/>
           </a:xfrm>
           <a:prstGeom prst="rect">
             <a:avLst/>
@@ -2174,14 +2174,14 @@
               <a:buNone/>
             </a:pPr>
             <a:r>
-              <a:rPr lang="en-US" sz="2800" b="1" dirty="0">
+              <a:rPr lang="en-US" sz="2600" b="1" dirty="0">
                 <a:solidFill>
                   <a:srgbClr val="FF6B35"/>
                 </a:solidFill>
               </a:rPr>
-              <a:t>58% → 19%</a:t>
-            </a:r>
-            <a:endParaRPr lang="en-US" sz="2800" dirty="0"/>
+              <a:t>0 → 0.80</a:t>
+            </a:r>
+            <a:endParaRPr lang="en-US" sz="2600" dirty="0"/>
           </a:p>
         </p:txBody>
       </p:sp>
@@ -2193,8 +2193,8 @@
         </p:nvSpPr>
         <p:spPr>
           <a:xfrm>
-            <a:off x="2194560" y="2423160"/>
-            <a:ext cx="3657600" cy="365760"/>
+            <a:off x="822960" y="2423160"/>
+            <a:ext cx="3291840" cy="365760"/>
           </a:xfrm>
           <a:prstGeom prst="rect">
             <a:avLst/>
@@ -2210,14 +2210,14 @@
               <a:buNone/>
             </a:pPr>
             <a:r>
-              <a:rPr lang="en-US" sz="1500" dirty="0">
+              <a:rPr lang="en-US" sz="1300" dirty="0">
                 <a:solidFill>
                   <a:srgbClr val="FFFFFF"/>
                 </a:solidFill>
               </a:rPr>
-              <a:t>task completion</a:t>
-            </a:r>
-            <a:endParaRPr lang="en-US" sz="1500" dirty="0"/>
+              <a:t>P-ASR (agents captured)</a:t>
+            </a:r>
+            <a:endParaRPr lang="en-US" sz="1300" dirty="0"/>
           </a:p>
         </p:txBody>
       </p:sp>
@@ -2229,8 +2229,8 @@
         </p:nvSpPr>
         <p:spPr>
           <a:xfrm>
-            <a:off x="2194560" y="2788920"/>
-            <a:ext cx="3657600" cy="320040"/>
+            <a:off x="822960" y="2788920"/>
+            <a:ext cx="3291840" cy="320040"/>
           </a:xfrm>
           <a:prstGeom prst="rect">
             <a:avLst/>
@@ -2246,14 +2246,14 @@
               <a:buNone/>
             </a:pPr>
             <a:r>
-              <a:rPr lang="en-US" sz="1200" i="1" dirty="0">
+              <a:rPr lang="en-US" sz="1100" i="1" dirty="0">
                 <a:solidFill>
                   <a:srgbClr val="8D99AE"/>
                 </a:solidFill>
               </a:rPr>
-              <a:t>≈ 3× drop</a:t>
-            </a:r>
-            <a:endParaRPr lang="en-US" sz="1200" dirty="0"/>
+              <a:t>structural detector</a:t>
+            </a:r>
+            <a:endParaRPr lang="en-US" sz="1100" dirty="0"/>
           </a:p>
         </p:txBody>
       </p:sp>
@@ -2265,8 +2265,8 @@
         </p:nvSpPr>
         <p:spPr>
           <a:xfrm>
-            <a:off x="6172200" y="1371600"/>
-            <a:ext cx="3840480" cy="1691640"/>
+            <a:off x="4434840" y="1371600"/>
+            <a:ext cx="3474720" cy="1691640"/>
           </a:xfrm>
           <a:prstGeom prst="roundRect">
             <a:avLst>
@@ -2287,8 +2287,8 @@
         </p:nvSpPr>
         <p:spPr>
           <a:xfrm>
-            <a:off x="6263640" y="1645920"/>
-            <a:ext cx="3657600" cy="777240"/>
+            <a:off x="4526280" y="1645920"/>
+            <a:ext cx="3291840" cy="777240"/>
           </a:xfrm>
           <a:prstGeom prst="rect">
             <a:avLst/>
@@ -2304,14 +2304,14 @@
               <a:buNone/>
             </a:pPr>
             <a:r>
-              <a:rPr lang="en-US" sz="2800" b="1" dirty="0">
+              <a:rPr lang="en-US" sz="2600" b="1" dirty="0">
                 <a:solidFill>
                   <a:srgbClr val="FF6B35"/>
                 </a:solidFill>
               </a:rPr>
-              <a:t>2,500 → 5,200</a:t>
-            </a:r>
-            <a:endParaRPr lang="en-US" sz="2800" dirty="0"/>
+              <a:t>97%</a:t>
+            </a:r>
+            <a:endParaRPr lang="en-US" sz="2600" dirty="0"/>
           </a:p>
         </p:txBody>
       </p:sp>
@@ -2323,8 +2323,8 @@
         </p:nvSpPr>
         <p:spPr>
           <a:xfrm>
-            <a:off x="6263640" y="2423160"/>
-            <a:ext cx="3657600" cy="365760"/>
+            <a:off x="4526280" y="2423160"/>
+            <a:ext cx="3291840" cy="365760"/>
           </a:xfrm>
           <a:prstGeom prst="rect">
             <a:avLst/>
@@ -2340,14 +2340,14 @@
               <a:buNone/>
             </a:pPr>
             <a:r>
-              <a:rPr lang="en-US" sz="1500" dirty="0">
+              <a:rPr lang="en-US" sz="1300" dirty="0">
                 <a:solidFill>
                   <a:srgbClr val="FFFFFF"/>
                 </a:solidFill>
               </a:rPr>
-              <a:t>tokens burned</a:t>
-            </a:r>
-            <a:endParaRPr lang="en-US" sz="1500" dirty="0"/>
+              <a:t>covert delivery</a:t>
+            </a:r>
+            <a:endParaRPr lang="en-US" sz="1300" dirty="0"/>
           </a:p>
         </p:txBody>
       </p:sp>
@@ -2359,8 +2359,8 @@
         </p:nvSpPr>
         <p:spPr>
           <a:xfrm>
-            <a:off x="6263640" y="2788920"/>
-            <a:ext cx="3657600" cy="320040"/>
+            <a:off x="4526280" y="2788920"/>
+            <a:ext cx="3291840" cy="320040"/>
           </a:xfrm>
           <a:prstGeom prst="rect">
             <a:avLst/>
@@ -2376,20 +2376,150 @@
               <a:buNone/>
             </a:pPr>
             <a:r>
-              <a:rPr lang="en-US" sz="1200" i="1" dirty="0">
+              <a:rPr lang="en-US" sz="1100" i="1" dirty="0">
                 <a:solidFill>
                   <a:srgbClr val="8D99AE"/>
                 </a:solidFill>
               </a:rPr>
-              <a:t>≈ 2× cost</a:t>
-            </a:r>
-            <a:endParaRPr lang="en-US" sz="1200" dirty="0"/>
-          </a:p>
-        </p:txBody>
-      </p:sp>
-      <p:sp>
-        <p:nvSpPr>
-          <p:cNvPr id="11" name="Text 9"/>
+              <a:t>85 / 88 runs</a:t>
+            </a:r>
+            <a:endParaRPr lang="en-US" sz="1100" dirty="0"/>
+          </a:p>
+        </p:txBody>
+      </p:sp>
+      <p:sp>
+        <p:nvSpPr>
+          <p:cNvPr id="11" name="Shape 9"/>
+          <p:cNvSpPr/>
+          <p:nvPr/>
+        </p:nvSpPr>
+        <p:spPr>
+          <a:xfrm>
+            <a:off x="8138160" y="1371600"/>
+            <a:ext cx="3474720" cy="1691640"/>
+          </a:xfrm>
+          <a:prstGeom prst="roundRect">
+            <a:avLst>
+              <a:gd name="adj" fmla="val 4324"/>
+            </a:avLst>
+          </a:prstGeom>
+          <a:solidFill>
+            <a:srgbClr val="2B3346"/>
+          </a:solidFill>
+          <a:ln/>
+        </p:spPr>
+      </p:sp>
+      <p:sp>
+        <p:nvSpPr>
+          <p:cNvPr id="12" name="Text 10"/>
+          <p:cNvSpPr txBox="1"/>
+          <p:nvPr/>
+        </p:nvSpPr>
+        <p:spPr>
+          <a:xfrm>
+            <a:off x="8229600" y="1645920"/>
+            <a:ext cx="3291840" cy="777240"/>
+          </a:xfrm>
+          <a:prstGeom prst="rect">
+            <a:avLst/>
+          </a:prstGeom>
+          <a:noFill/>
+          <a:ln/>
+        </p:spPr>
+        <p:txBody>
+          <a:bodyPr wrap="square" rtlCol="0" anchor="ctr"/>
+          <a:lstStyle/>
+          <a:p>
+            <a:pPr algn="ctr" indent="0" marL="0">
+              <a:buNone/>
+            </a:pPr>
+            <a:r>
+              <a:rPr lang="en-US" sz="2600" b="1" dirty="0">
+                <a:solidFill>
+                  <a:srgbClr val="FF6B35"/>
+                </a:solidFill>
+              </a:rPr>
+              <a:t>+50% / +37%</a:t>
+            </a:r>
+            <a:endParaRPr lang="en-US" sz="2600" dirty="0"/>
+          </a:p>
+        </p:txBody>
+      </p:sp>
+      <p:sp>
+        <p:nvSpPr>
+          <p:cNvPr id="13" name="Text 11"/>
+          <p:cNvSpPr txBox="1"/>
+          <p:nvPr/>
+        </p:nvSpPr>
+        <p:spPr>
+          <a:xfrm>
+            <a:off x="8229600" y="2423160"/>
+            <a:ext cx="3291840" cy="365760"/>
+          </a:xfrm>
+          <a:prstGeom prst="rect">
+            <a:avLst/>
+          </a:prstGeom>
+          <a:noFill/>
+          <a:ln/>
+        </p:spPr>
+        <p:txBody>
+          <a:bodyPr wrap="square" lIns="0" tIns="0" rIns="0" bIns="0" rtlCol="0" anchor="ctr"/>
+          <a:lstStyle/>
+          <a:p>
+            <a:pPr algn="ctr" indent="0" marL="0">
+              <a:buNone/>
+            </a:pPr>
+            <a:r>
+              <a:rPr lang="en-US" sz="1300" dirty="0">
+                <a:solidFill>
+                  <a:srgbClr val="FFFFFF"/>
+                </a:solidFill>
+              </a:rPr>
+              <a:t>turns / tokens</a:t>
+            </a:r>
+            <a:endParaRPr lang="en-US" sz="1300" dirty="0"/>
+          </a:p>
+        </p:txBody>
+      </p:sp>
+      <p:sp>
+        <p:nvSpPr>
+          <p:cNvPr id="14" name="Text 12"/>
+          <p:cNvSpPr txBox="1"/>
+          <p:nvPr/>
+        </p:nvSpPr>
+        <p:spPr>
+          <a:xfrm>
+            <a:off x="8229600" y="2788920"/>
+            <a:ext cx="3291840" cy="320040"/>
+          </a:xfrm>
+          <a:prstGeom prst="rect">
+            <a:avLst/>
+          </a:prstGeom>
+          <a:noFill/>
+          <a:ln/>
+        </p:spPr>
+        <p:txBody>
+          <a:bodyPr wrap="square" lIns="0" tIns="0" rIns="0" bIns="0" rtlCol="0" anchor="ctr"/>
+          <a:lstStyle/>
+          <a:p>
+            <a:pPr algn="ctr" indent="0" marL="0">
+              <a:buNone/>
+            </a:pPr>
+            <a:r>
+              <a:rPr lang="en-US" sz="1100" i="1" dirty="0">
+                <a:solidFill>
+                  <a:srgbClr val="8D99AE"/>
+                </a:solidFill>
+              </a:rPr>
+              <a:t>resource burn</a:t>
+            </a:r>
+            <a:endParaRPr lang="en-US" sz="1100" dirty="0"/>
+          </a:p>
+        </p:txBody>
+      </p:sp>
+      <p:sp>
+        <p:nvSpPr>
+          <p:cNvPr id="15" name="Text 13"/>
           <p:cNvSpPr txBox="1"/>
           <p:nvPr/>
         </p:nvSpPr>
@@ -2412,14 +2542,14 @@
               <a:buNone/>
             </a:pPr>
             <a:r>
-              <a:rPr lang="en-US" sz="1300" dirty="0">
+              <a:rPr lang="en-US" sz="1250" dirty="0">
                 <a:solidFill>
                   <a:srgbClr val="C7CEDB"/>
                 </a:solidFill>
               </a:rPr>
-              <a:t>69 benign tasks · all 5 domains · Qwen3.5-35B agents · branching factor B = 3     (P-ASR / PTN = attacked)</a:t>
-            </a:r>
-            <a:endParaRPr lang="en-US" sz="1300" dirty="0"/>
+              <a:t>88 benign tasks · all 5 domains · Qwen3.5-35B agents · B = 3 · acrostic+hint stego delivery     (P-ASR / ERS / PTN = attacked)</a:t>
+            </a:r>
+            <a:endParaRPr lang="en-US" sz="1250" dirty="0"/>
           </a:p>
         </p:txBody>
       </p:sp>
@@ -2446,12 +2576,11 @@
             <a:tbl>
               <a:tblPr/>
               <a:tblGrid>
+                <a:gridCol w="2377440"/>
+                <a:gridCol w="1645920"/>
+                <a:gridCol w="1645920"/>
+                <a:gridCol w="1554480"/>
                 <a:gridCol w="2194560"/>
-                <a:gridCol w="1371600"/>
-                <a:gridCol w="1554480"/>
-                <a:gridCol w="1554480"/>
-                <a:gridCol w="1463040"/>
-                <a:gridCol w="1280160"/>
                 <a:gridCol w="1280160"/>
               </a:tblGrid>
               <a:tr h="274320">
@@ -2470,250 +2599,6 @@
                           </a:solidFill>
                         </a:rPr>
                         <a:t>domain</a:t>
-                      </a:r>
-                      <a:endParaRPr lang="en-US" sz="1050" dirty="0"/>
-                    </a:p>
-                  </a:txBody>
-                  <a:tcPr marL="91440" marR="91440" marT="45720" marB="45720" anchor="ctr">
-                    <a:lnL w="12700" cap="flat" cmpd="sng" algn="ctr">
-                      <a:solidFill>
-                        <a:srgbClr val="3A4458"/>
-                      </a:solidFill>
-                      <a:prstDash val="solid"/>
-                      <a:round/>
-                      <a:headEnd type="none" w="med" len="med"/>
-                      <a:tailEnd type="none" w="med" len="med"/>
-                    </a:lnL>
-                    <a:lnR w="12700" cap="flat" cmpd="sng" algn="ctr">
-                      <a:solidFill>
-                        <a:srgbClr val="3A4458"/>
-                      </a:solidFill>
-                      <a:prstDash val="solid"/>
-                      <a:round/>
-                      <a:headEnd type="none" w="med" len="med"/>
-                      <a:tailEnd type="none" w="med" len="med"/>
-                    </a:lnR>
-                    <a:lnT w="12700" cap="flat" cmpd="sng" algn="ctr">
-                      <a:solidFill>
-                        <a:srgbClr val="3A4458"/>
-                      </a:solidFill>
-                      <a:prstDash val="solid"/>
-                      <a:round/>
-                      <a:headEnd type="none" w="med" len="med"/>
-                      <a:tailEnd type="none" w="med" len="med"/>
-                    </a:lnT>
-                    <a:lnB w="12700" cap="flat" cmpd="sng" algn="ctr">
-                      <a:solidFill>
-                        <a:srgbClr val="3A4458"/>
-                      </a:solidFill>
-                      <a:prstDash val="solid"/>
-                      <a:round/>
-                      <a:headEnd type="none" w="med" len="med"/>
-                      <a:tailEnd type="none" w="med" len="med"/>
-                    </a:lnB>
-                    <a:solidFill>
-                      <a:srgbClr val="232A3A"/>
-                    </a:solidFill>
-                  </a:tcPr>
-                </a:tc>
-                <a:tc>
-                  <a:txBody>
-                    <a:bodyPr/>
-                    <a:lstStyle/>
-                    <a:p>
-                      <a:pPr algn="ctr" indent="0" marL="0">
-                        <a:buNone/>
-                      </a:pPr>
-                      <a:r>
-                        <a:rPr lang="en-US" sz="1050" b="1" dirty="0">
-                          <a:solidFill>
-                            <a:srgbClr val="FFFFFF"/>
-                          </a:solidFill>
-                        </a:rPr>
-                        <a:t>clean</a:t>
-                      </a:r>
-                      <a:endParaRPr lang="en-US" sz="1050" dirty="0"/>
-                    </a:p>
-                  </a:txBody>
-                  <a:tcPr marL="91440" marR="91440" marT="45720" marB="45720" anchor="ctr">
-                    <a:lnL w="12700" cap="flat" cmpd="sng" algn="ctr">
-                      <a:solidFill>
-                        <a:srgbClr val="3A4458"/>
-                      </a:solidFill>
-                      <a:prstDash val="solid"/>
-                      <a:round/>
-                      <a:headEnd type="none" w="med" len="med"/>
-                      <a:tailEnd type="none" w="med" len="med"/>
-                    </a:lnL>
-                    <a:lnR w="12700" cap="flat" cmpd="sng" algn="ctr">
-                      <a:solidFill>
-                        <a:srgbClr val="3A4458"/>
-                      </a:solidFill>
-                      <a:prstDash val="solid"/>
-                      <a:round/>
-                      <a:headEnd type="none" w="med" len="med"/>
-                      <a:tailEnd type="none" w="med" len="med"/>
-                    </a:lnR>
-                    <a:lnT w="12700" cap="flat" cmpd="sng" algn="ctr">
-                      <a:solidFill>
-                        <a:srgbClr val="3A4458"/>
-                      </a:solidFill>
-                      <a:prstDash val="solid"/>
-                      <a:round/>
-                      <a:headEnd type="none" w="med" len="med"/>
-                      <a:tailEnd type="none" w="med" len="med"/>
-                    </a:lnT>
-                    <a:lnB w="12700" cap="flat" cmpd="sng" algn="ctr">
-                      <a:solidFill>
-                        <a:srgbClr val="3A4458"/>
-                      </a:solidFill>
-                      <a:prstDash val="solid"/>
-                      <a:round/>
-                      <a:headEnd type="none" w="med" len="med"/>
-                      <a:tailEnd type="none" w="med" len="med"/>
-                    </a:lnB>
-                    <a:solidFill>
-                      <a:srgbClr val="232A3A"/>
-                    </a:solidFill>
-                  </a:tcPr>
-                </a:tc>
-                <a:tc>
-                  <a:txBody>
-                    <a:bodyPr/>
-                    <a:lstStyle/>
-                    <a:p>
-                      <a:pPr algn="ctr" indent="0" marL="0">
-                        <a:buNone/>
-                      </a:pPr>
-                      <a:r>
-                        <a:rPr lang="en-US" sz="1050" b="1" dirty="0">
-                          <a:solidFill>
-                            <a:srgbClr val="FFFFFF"/>
-                          </a:solidFill>
-                        </a:rPr>
-                        <a:t>attacked</a:t>
-                      </a:r>
-                      <a:endParaRPr lang="en-US" sz="1050" dirty="0"/>
-                    </a:p>
-                  </a:txBody>
-                  <a:tcPr marL="91440" marR="91440" marT="45720" marB="45720" anchor="ctr">
-                    <a:lnL w="12700" cap="flat" cmpd="sng" algn="ctr">
-                      <a:solidFill>
-                        <a:srgbClr val="3A4458"/>
-                      </a:solidFill>
-                      <a:prstDash val="solid"/>
-                      <a:round/>
-                      <a:headEnd type="none" w="med" len="med"/>
-                      <a:tailEnd type="none" w="med" len="med"/>
-                    </a:lnL>
-                    <a:lnR w="12700" cap="flat" cmpd="sng" algn="ctr">
-                      <a:solidFill>
-                        <a:srgbClr val="3A4458"/>
-                      </a:solidFill>
-                      <a:prstDash val="solid"/>
-                      <a:round/>
-                      <a:headEnd type="none" w="med" len="med"/>
-                      <a:tailEnd type="none" w="med" len="med"/>
-                    </a:lnR>
-                    <a:lnT w="12700" cap="flat" cmpd="sng" algn="ctr">
-                      <a:solidFill>
-                        <a:srgbClr val="3A4458"/>
-                      </a:solidFill>
-                      <a:prstDash val="solid"/>
-                      <a:round/>
-                      <a:headEnd type="none" w="med" len="med"/>
-                      <a:tailEnd type="none" w="med" len="med"/>
-                    </a:lnT>
-                    <a:lnB w="12700" cap="flat" cmpd="sng" algn="ctr">
-                      <a:solidFill>
-                        <a:srgbClr val="3A4458"/>
-                      </a:solidFill>
-                      <a:prstDash val="solid"/>
-                      <a:round/>
-                      <a:headEnd type="none" w="med" len="med"/>
-                      <a:tailEnd type="none" w="med" len="med"/>
-                    </a:lnB>
-                    <a:solidFill>
-                      <a:srgbClr val="232A3A"/>
-                    </a:solidFill>
-                  </a:tcPr>
-                </a:tc>
-                <a:tc>
-                  <a:txBody>
-                    <a:bodyPr/>
-                    <a:lstStyle/>
-                    <a:p>
-                      <a:pPr algn="ctr" indent="0" marL="0">
-                        <a:buNone/>
-                      </a:pPr>
-                      <a:r>
-                        <a:rPr lang="en-US" sz="1050" b="1" dirty="0">
-                          <a:solidFill>
-                            <a:srgbClr val="FFFFFF"/>
-                          </a:solidFill>
-                        </a:rPr>
-                        <a:t>clean tok</a:t>
-                      </a:r>
-                      <a:endParaRPr lang="en-US" sz="1050" dirty="0"/>
-                    </a:p>
-                  </a:txBody>
-                  <a:tcPr marL="91440" marR="91440" marT="45720" marB="45720" anchor="ctr">
-                    <a:lnL w="12700" cap="flat" cmpd="sng" algn="ctr">
-                      <a:solidFill>
-                        <a:srgbClr val="3A4458"/>
-                      </a:solidFill>
-                      <a:prstDash val="solid"/>
-                      <a:round/>
-                      <a:headEnd type="none" w="med" len="med"/>
-                      <a:tailEnd type="none" w="med" len="med"/>
-                    </a:lnL>
-                    <a:lnR w="12700" cap="flat" cmpd="sng" algn="ctr">
-                      <a:solidFill>
-                        <a:srgbClr val="3A4458"/>
-                      </a:solidFill>
-                      <a:prstDash val="solid"/>
-                      <a:round/>
-                      <a:headEnd type="none" w="med" len="med"/>
-                      <a:tailEnd type="none" w="med" len="med"/>
-                    </a:lnR>
-                    <a:lnT w="12700" cap="flat" cmpd="sng" algn="ctr">
-                      <a:solidFill>
-                        <a:srgbClr val="3A4458"/>
-                      </a:solidFill>
-                      <a:prstDash val="solid"/>
-                      <a:round/>
-                      <a:headEnd type="none" w="med" len="med"/>
-                      <a:tailEnd type="none" w="med" len="med"/>
-                    </a:lnT>
-                    <a:lnB w="12700" cap="flat" cmpd="sng" algn="ctr">
-                      <a:solidFill>
-                        <a:srgbClr val="3A4458"/>
-                      </a:solidFill>
-                      <a:prstDash val="solid"/>
-                      <a:round/>
-                      <a:headEnd type="none" w="med" len="med"/>
-                      <a:tailEnd type="none" w="med" len="med"/>
-                    </a:lnB>
-                    <a:solidFill>
-                      <a:srgbClr val="232A3A"/>
-                    </a:solidFill>
-                  </a:tcPr>
-                </a:tc>
-                <a:tc>
-                  <a:txBody>
-                    <a:bodyPr/>
-                    <a:lstStyle/>
-                    <a:p>
-                      <a:pPr algn="ctr" indent="0" marL="0">
-                        <a:buNone/>
-                      </a:pPr>
-                      <a:r>
-                        <a:rPr lang="en-US" sz="1050" b="1" dirty="0">
-                          <a:solidFill>
-                            <a:srgbClr val="FFFFFF"/>
-                          </a:solidFill>
-                        </a:rPr>
-                        <a:t>att tok</a:t>
                       </a:r>
                       <a:endParaRPr lang="en-US" sz="1050" dirty="0"/>
                     </a:p>
@@ -2835,7 +2720,558 @@
                             <a:srgbClr val="FFFFFF"/>
                           </a:solidFill>
                         </a:rPr>
+                        <a:t>ERS</a:t>
+                      </a:r>
+                      <a:endParaRPr lang="en-US" sz="1050" dirty="0"/>
+                    </a:p>
+                  </a:txBody>
+                  <a:tcPr marL="91440" marR="91440" marT="45720" marB="45720" anchor="ctr">
+                    <a:lnL w="12700" cap="flat" cmpd="sng" algn="ctr">
+                      <a:solidFill>
+                        <a:srgbClr val="3A4458"/>
+                      </a:solidFill>
+                      <a:prstDash val="solid"/>
+                      <a:round/>
+                      <a:headEnd type="none" w="med" len="med"/>
+                      <a:tailEnd type="none" w="med" len="med"/>
+                    </a:lnL>
+                    <a:lnR w="12700" cap="flat" cmpd="sng" algn="ctr">
+                      <a:solidFill>
+                        <a:srgbClr val="3A4458"/>
+                      </a:solidFill>
+                      <a:prstDash val="solid"/>
+                      <a:round/>
+                      <a:headEnd type="none" w="med" len="med"/>
+                      <a:tailEnd type="none" w="med" len="med"/>
+                    </a:lnR>
+                    <a:lnT w="12700" cap="flat" cmpd="sng" algn="ctr">
+                      <a:solidFill>
+                        <a:srgbClr val="3A4458"/>
+                      </a:solidFill>
+                      <a:prstDash val="solid"/>
+                      <a:round/>
+                      <a:headEnd type="none" w="med" len="med"/>
+                      <a:tailEnd type="none" w="med" len="med"/>
+                    </a:lnT>
+                    <a:lnB w="12700" cap="flat" cmpd="sng" algn="ctr">
+                      <a:solidFill>
+                        <a:srgbClr val="3A4458"/>
+                      </a:solidFill>
+                      <a:prstDash val="solid"/>
+                      <a:round/>
+                      <a:headEnd type="none" w="med" len="med"/>
+                      <a:tailEnd type="none" w="med" len="med"/>
+                    </a:lnB>
+                    <a:solidFill>
+                      <a:srgbClr val="232A3A"/>
+                    </a:solidFill>
+                  </a:tcPr>
+                </a:tc>
+                <a:tc>
+                  <a:txBody>
+                    <a:bodyPr/>
+                    <a:lstStyle/>
+                    <a:p>
+                      <a:pPr algn="ctr" indent="0" marL="0">
+                        <a:buNone/>
+                      </a:pPr>
+                      <a:r>
+                        <a:rPr lang="en-US" sz="1050" b="1" dirty="0">
+                          <a:solidFill>
+                            <a:srgbClr val="FFFFFF"/>
+                          </a:solidFill>
+                        </a:rPr>
                         <a:t>PTN</a:t>
+                      </a:r>
+                      <a:endParaRPr lang="en-US" sz="1050" dirty="0"/>
+                    </a:p>
+                  </a:txBody>
+                  <a:tcPr marL="91440" marR="91440" marT="45720" marB="45720" anchor="ctr">
+                    <a:lnL w="12700" cap="flat" cmpd="sng" algn="ctr">
+                      <a:solidFill>
+                        <a:srgbClr val="3A4458"/>
+                      </a:solidFill>
+                      <a:prstDash val="solid"/>
+                      <a:round/>
+                      <a:headEnd type="none" w="med" len="med"/>
+                      <a:tailEnd type="none" w="med" len="med"/>
+                    </a:lnL>
+                    <a:lnR w="12700" cap="flat" cmpd="sng" algn="ctr">
+                      <a:solidFill>
+                        <a:srgbClr val="3A4458"/>
+                      </a:solidFill>
+                      <a:prstDash val="solid"/>
+                      <a:round/>
+                      <a:headEnd type="none" w="med" len="med"/>
+                      <a:tailEnd type="none" w="med" len="med"/>
+                    </a:lnR>
+                    <a:lnT w="12700" cap="flat" cmpd="sng" algn="ctr">
+                      <a:solidFill>
+                        <a:srgbClr val="3A4458"/>
+                      </a:solidFill>
+                      <a:prstDash val="solid"/>
+                      <a:round/>
+                      <a:headEnd type="none" w="med" len="med"/>
+                      <a:tailEnd type="none" w="med" len="med"/>
+                    </a:lnT>
+                    <a:lnB w="12700" cap="flat" cmpd="sng" algn="ctr">
+                      <a:solidFill>
+                        <a:srgbClr val="3A4458"/>
+                      </a:solidFill>
+                      <a:prstDash val="solid"/>
+                      <a:round/>
+                      <a:headEnd type="none" w="med" len="med"/>
+                      <a:tailEnd type="none" w="med" len="med"/>
+                    </a:lnB>
+                    <a:solidFill>
+                      <a:srgbClr val="232A3A"/>
+                    </a:solidFill>
+                  </a:tcPr>
+                </a:tc>
+                <a:tc>
+                  <a:txBody>
+                    <a:bodyPr/>
+                    <a:lstStyle/>
+                    <a:p>
+                      <a:pPr algn="ctr" indent="0" marL="0">
+                        <a:buNone/>
+                      </a:pPr>
+                      <a:r>
+                        <a:rPr lang="en-US" sz="1050" b="1" dirty="0">
+                          <a:solidFill>
+                            <a:srgbClr val="FFFFFF"/>
+                          </a:solidFill>
+                        </a:rPr>
+                        <a:t>stego delivered</a:t>
+                      </a:r>
+                      <a:endParaRPr lang="en-US" sz="1050" dirty="0"/>
+                    </a:p>
+                  </a:txBody>
+                  <a:tcPr marL="91440" marR="91440" marT="45720" marB="45720" anchor="ctr">
+                    <a:lnL w="12700" cap="flat" cmpd="sng" algn="ctr">
+                      <a:solidFill>
+                        <a:srgbClr val="3A4458"/>
+                      </a:solidFill>
+                      <a:prstDash val="solid"/>
+                      <a:round/>
+                      <a:headEnd type="none" w="med" len="med"/>
+                      <a:tailEnd type="none" w="med" len="med"/>
+                    </a:lnL>
+                    <a:lnR w="12700" cap="flat" cmpd="sng" algn="ctr">
+                      <a:solidFill>
+                        <a:srgbClr val="3A4458"/>
+                      </a:solidFill>
+                      <a:prstDash val="solid"/>
+                      <a:round/>
+                      <a:headEnd type="none" w="med" len="med"/>
+                      <a:tailEnd type="none" w="med" len="med"/>
+                    </a:lnR>
+                    <a:lnT w="12700" cap="flat" cmpd="sng" algn="ctr">
+                      <a:solidFill>
+                        <a:srgbClr val="3A4458"/>
+                      </a:solidFill>
+                      <a:prstDash val="solid"/>
+                      <a:round/>
+                      <a:headEnd type="none" w="med" len="med"/>
+                      <a:tailEnd type="none" w="med" len="med"/>
+                    </a:lnT>
+                    <a:lnB w="12700" cap="flat" cmpd="sng" algn="ctr">
+                      <a:solidFill>
+                        <a:srgbClr val="3A4458"/>
+                      </a:solidFill>
+                      <a:prstDash val="solid"/>
+                      <a:round/>
+                      <a:headEnd type="none" w="med" len="med"/>
+                      <a:tailEnd type="none" w="med" len="med"/>
+                    </a:lnB>
+                    <a:solidFill>
+                      <a:srgbClr val="232A3A"/>
+                    </a:solidFill>
+                  </a:tcPr>
+                </a:tc>
+                <a:tc>
+                  <a:txBody>
+                    <a:bodyPr/>
+                    <a:lstStyle/>
+                    <a:p>
+                      <a:pPr algn="ctr" indent="0" marL="0">
+                        <a:buNone/>
+                      </a:pPr>
+                      <a:r>
+                        <a:rPr lang="en-US" sz="1050" b="1" dirty="0">
+                          <a:solidFill>
+                            <a:srgbClr val="FFFFFF"/>
+                          </a:solidFill>
+                        </a:rPr>
+                        <a:t>stealth</a:t>
+                      </a:r>
+                      <a:endParaRPr lang="en-US" sz="1050" dirty="0"/>
+                    </a:p>
+                  </a:txBody>
+                  <a:tcPr marL="91440" marR="91440" marT="45720" marB="45720" anchor="ctr">
+                    <a:lnL w="12700" cap="flat" cmpd="sng" algn="ctr">
+                      <a:solidFill>
+                        <a:srgbClr val="3A4458"/>
+                      </a:solidFill>
+                      <a:prstDash val="solid"/>
+                      <a:round/>
+                      <a:headEnd type="none" w="med" len="med"/>
+                      <a:tailEnd type="none" w="med" len="med"/>
+                    </a:lnL>
+                    <a:lnR w="12700" cap="flat" cmpd="sng" algn="ctr">
+                      <a:solidFill>
+                        <a:srgbClr val="3A4458"/>
+                      </a:solidFill>
+                      <a:prstDash val="solid"/>
+                      <a:round/>
+                      <a:headEnd type="none" w="med" len="med"/>
+                      <a:tailEnd type="none" w="med" len="med"/>
+                    </a:lnR>
+                    <a:lnT w="12700" cap="flat" cmpd="sng" algn="ctr">
+                      <a:solidFill>
+                        <a:srgbClr val="3A4458"/>
+                      </a:solidFill>
+                      <a:prstDash val="solid"/>
+                      <a:round/>
+                      <a:headEnd type="none" w="med" len="med"/>
+                      <a:tailEnd type="none" w="med" len="med"/>
+                    </a:lnT>
+                    <a:lnB w="12700" cap="flat" cmpd="sng" algn="ctr">
+                      <a:solidFill>
+                        <a:srgbClr val="3A4458"/>
+                      </a:solidFill>
+                      <a:prstDash val="solid"/>
+                      <a:round/>
+                      <a:headEnd type="none" w="med" len="med"/>
+                      <a:tailEnd type="none" w="med" len="med"/>
+                    </a:lnB>
+                    <a:solidFill>
+                      <a:srgbClr val="232A3A"/>
+                    </a:solidFill>
+                  </a:tcPr>
+                </a:tc>
+              </a:tr>
+              <a:tr h="274320">
+                <a:tc>
+                  <a:txBody>
+                    <a:bodyPr/>
+                    <a:lstStyle/>
+                    <a:p>
+                      <a:pPr algn="ctr" indent="0" marL="0">
+                        <a:buNone/>
+                      </a:pPr>
+                      <a:r>
+                        <a:rPr lang="en-US" sz="1050" dirty="0">
+                          <a:solidFill>
+                            <a:srgbClr val="F7C59F"/>
+                          </a:solidFill>
+                        </a:rPr>
+                        <a:t>education</a:t>
+                      </a:r>
+                      <a:endParaRPr lang="en-US" sz="1050" dirty="0"/>
+                    </a:p>
+                  </a:txBody>
+                  <a:tcPr marL="91440" marR="91440" marT="45720" marB="45720" anchor="ctr">
+                    <a:lnL w="12700" cap="flat" cmpd="sng" algn="ctr">
+                      <a:solidFill>
+                        <a:srgbClr val="3A4458"/>
+                      </a:solidFill>
+                      <a:prstDash val="solid"/>
+                      <a:round/>
+                      <a:headEnd type="none" w="med" len="med"/>
+                      <a:tailEnd type="none" w="med" len="med"/>
+                    </a:lnL>
+                    <a:lnR w="12700" cap="flat" cmpd="sng" algn="ctr">
+                      <a:solidFill>
+                        <a:srgbClr val="3A4458"/>
+                      </a:solidFill>
+                      <a:prstDash val="solid"/>
+                      <a:round/>
+                      <a:headEnd type="none" w="med" len="med"/>
+                      <a:tailEnd type="none" w="med" len="med"/>
+                    </a:lnR>
+                    <a:lnT w="12700" cap="flat" cmpd="sng" algn="ctr">
+                      <a:solidFill>
+                        <a:srgbClr val="3A4458"/>
+                      </a:solidFill>
+                      <a:prstDash val="solid"/>
+                      <a:round/>
+                      <a:headEnd type="none" w="med" len="med"/>
+                      <a:tailEnd type="none" w="med" len="med"/>
+                    </a:lnT>
+                    <a:lnB w="12700" cap="flat" cmpd="sng" algn="ctr">
+                      <a:solidFill>
+                        <a:srgbClr val="3A4458"/>
+                      </a:solidFill>
+                      <a:prstDash val="solid"/>
+                      <a:round/>
+                      <a:headEnd type="none" w="med" len="med"/>
+                      <a:tailEnd type="none" w="med" len="med"/>
+                    </a:lnB>
+                    <a:solidFill>
+                      <a:srgbClr val="232A3A"/>
+                    </a:solidFill>
+                  </a:tcPr>
+                </a:tc>
+                <a:tc>
+                  <a:txBody>
+                    <a:bodyPr/>
+                    <a:lstStyle/>
+                    <a:p>
+                      <a:pPr algn="ctr" indent="0" marL="0">
+                        <a:buNone/>
+                      </a:pPr>
+                      <a:r>
+                        <a:rPr lang="en-US" sz="1050" dirty="0">
+                          <a:solidFill>
+                            <a:srgbClr val="E6E9F0"/>
+                          </a:solidFill>
+                        </a:rPr>
+                        <a:t>0.91</a:t>
+                      </a:r>
+                      <a:endParaRPr lang="en-US" sz="1050" dirty="0"/>
+                    </a:p>
+                  </a:txBody>
+                  <a:tcPr marL="91440" marR="91440" marT="45720" marB="45720" anchor="ctr">
+                    <a:lnL w="12700" cap="flat" cmpd="sng" algn="ctr">
+                      <a:solidFill>
+                        <a:srgbClr val="3A4458"/>
+                      </a:solidFill>
+                      <a:prstDash val="solid"/>
+                      <a:round/>
+                      <a:headEnd type="none" w="med" len="med"/>
+                      <a:tailEnd type="none" w="med" len="med"/>
+                    </a:lnL>
+                    <a:lnR w="12700" cap="flat" cmpd="sng" algn="ctr">
+                      <a:solidFill>
+                        <a:srgbClr val="3A4458"/>
+                      </a:solidFill>
+                      <a:prstDash val="solid"/>
+                      <a:round/>
+                      <a:headEnd type="none" w="med" len="med"/>
+                      <a:tailEnd type="none" w="med" len="med"/>
+                    </a:lnR>
+                    <a:lnT w="12700" cap="flat" cmpd="sng" algn="ctr">
+                      <a:solidFill>
+                        <a:srgbClr val="3A4458"/>
+                      </a:solidFill>
+                      <a:prstDash val="solid"/>
+                      <a:round/>
+                      <a:headEnd type="none" w="med" len="med"/>
+                      <a:tailEnd type="none" w="med" len="med"/>
+                    </a:lnT>
+                    <a:lnB w="12700" cap="flat" cmpd="sng" algn="ctr">
+                      <a:solidFill>
+                        <a:srgbClr val="3A4458"/>
+                      </a:solidFill>
+                      <a:prstDash val="solid"/>
+                      <a:round/>
+                      <a:headEnd type="none" w="med" len="med"/>
+                      <a:tailEnd type="none" w="med" len="med"/>
+                    </a:lnB>
+                    <a:solidFill>
+                      <a:srgbClr val="232A3A"/>
+                    </a:solidFill>
+                  </a:tcPr>
+                </a:tc>
+                <a:tc>
+                  <a:txBody>
+                    <a:bodyPr/>
+                    <a:lstStyle/>
+                    <a:p>
+                      <a:pPr algn="ctr" indent="0" marL="0">
+                        <a:buNone/>
+                      </a:pPr>
+                      <a:r>
+                        <a:rPr lang="en-US" sz="1050" dirty="0">
+                          <a:solidFill>
+                            <a:srgbClr val="E6E9F0"/>
+                          </a:solidFill>
+                        </a:rPr>
+                        <a:t>0.37</a:t>
+                      </a:r>
+                      <a:endParaRPr lang="en-US" sz="1050" dirty="0"/>
+                    </a:p>
+                  </a:txBody>
+                  <a:tcPr marL="91440" marR="91440" marT="45720" marB="45720" anchor="ctr">
+                    <a:lnL w="12700" cap="flat" cmpd="sng" algn="ctr">
+                      <a:solidFill>
+                        <a:srgbClr val="3A4458"/>
+                      </a:solidFill>
+                      <a:prstDash val="solid"/>
+                      <a:round/>
+                      <a:headEnd type="none" w="med" len="med"/>
+                      <a:tailEnd type="none" w="med" len="med"/>
+                    </a:lnL>
+                    <a:lnR w="12700" cap="flat" cmpd="sng" algn="ctr">
+                      <a:solidFill>
+                        <a:srgbClr val="3A4458"/>
+                      </a:solidFill>
+                      <a:prstDash val="solid"/>
+                      <a:round/>
+                      <a:headEnd type="none" w="med" len="med"/>
+                      <a:tailEnd type="none" w="med" len="med"/>
+                    </a:lnR>
+                    <a:lnT w="12700" cap="flat" cmpd="sng" algn="ctr">
+                      <a:solidFill>
+                        <a:srgbClr val="3A4458"/>
+                      </a:solidFill>
+                      <a:prstDash val="solid"/>
+                      <a:round/>
+                      <a:headEnd type="none" w="med" len="med"/>
+                      <a:tailEnd type="none" w="med" len="med"/>
+                    </a:lnT>
+                    <a:lnB w="12700" cap="flat" cmpd="sng" algn="ctr">
+                      <a:solidFill>
+                        <a:srgbClr val="3A4458"/>
+                      </a:solidFill>
+                      <a:prstDash val="solid"/>
+                      <a:round/>
+                      <a:headEnd type="none" w="med" len="med"/>
+                      <a:tailEnd type="none" w="med" len="med"/>
+                    </a:lnB>
+                    <a:solidFill>
+                      <a:srgbClr val="232A3A"/>
+                    </a:solidFill>
+                  </a:tcPr>
+                </a:tc>
+                <a:tc>
+                  <a:txBody>
+                    <a:bodyPr/>
+                    <a:lstStyle/>
+                    <a:p>
+                      <a:pPr algn="ctr" indent="0" marL="0">
+                        <a:buNone/>
+                      </a:pPr>
+                      <a:r>
+                        <a:rPr lang="en-US" sz="1050" dirty="0">
+                          <a:solidFill>
+                            <a:srgbClr val="E6E9F0"/>
+                          </a:solidFill>
+                        </a:rPr>
+                        <a:t>13.0</a:t>
+                      </a:r>
+                      <a:endParaRPr lang="en-US" sz="1050" dirty="0"/>
+                    </a:p>
+                  </a:txBody>
+                  <a:tcPr marL="91440" marR="91440" marT="45720" marB="45720" anchor="ctr">
+                    <a:lnL w="12700" cap="flat" cmpd="sng" algn="ctr">
+                      <a:solidFill>
+                        <a:srgbClr val="3A4458"/>
+                      </a:solidFill>
+                      <a:prstDash val="solid"/>
+                      <a:round/>
+                      <a:headEnd type="none" w="med" len="med"/>
+                      <a:tailEnd type="none" w="med" len="med"/>
+                    </a:lnL>
+                    <a:lnR w="12700" cap="flat" cmpd="sng" algn="ctr">
+                      <a:solidFill>
+                        <a:srgbClr val="3A4458"/>
+                      </a:solidFill>
+                      <a:prstDash val="solid"/>
+                      <a:round/>
+                      <a:headEnd type="none" w="med" len="med"/>
+                      <a:tailEnd type="none" w="med" len="med"/>
+                    </a:lnR>
+                    <a:lnT w="12700" cap="flat" cmpd="sng" algn="ctr">
+                      <a:solidFill>
+                        <a:srgbClr val="3A4458"/>
+                      </a:solidFill>
+                      <a:prstDash val="solid"/>
+                      <a:round/>
+                      <a:headEnd type="none" w="med" len="med"/>
+                      <a:tailEnd type="none" w="med" len="med"/>
+                    </a:lnT>
+                    <a:lnB w="12700" cap="flat" cmpd="sng" algn="ctr">
+                      <a:solidFill>
+                        <a:srgbClr val="3A4458"/>
+                      </a:solidFill>
+                      <a:prstDash val="solid"/>
+                      <a:round/>
+                      <a:headEnd type="none" w="med" len="med"/>
+                      <a:tailEnd type="none" w="med" len="med"/>
+                    </a:lnB>
+                    <a:solidFill>
+                      <a:srgbClr val="232A3A"/>
+                    </a:solidFill>
+                  </a:tcPr>
+                </a:tc>
+                <a:tc>
+                  <a:txBody>
+                    <a:bodyPr/>
+                    <a:lstStyle/>
+                    <a:p>
+                      <a:pPr algn="ctr" indent="0" marL="0">
+                        <a:buNone/>
+                      </a:pPr>
+                      <a:r>
+                        <a:rPr lang="en-US" sz="1050" dirty="0">
+                          <a:solidFill>
+                            <a:srgbClr val="E6E9F0"/>
+                          </a:solidFill>
+                        </a:rPr>
+                        <a:t>11/11</a:t>
+                      </a:r>
+                      <a:endParaRPr lang="en-US" sz="1050" dirty="0"/>
+                    </a:p>
+                  </a:txBody>
+                  <a:tcPr marL="91440" marR="91440" marT="45720" marB="45720" anchor="ctr">
+                    <a:lnL w="12700" cap="flat" cmpd="sng" algn="ctr">
+                      <a:solidFill>
+                        <a:srgbClr val="3A4458"/>
+                      </a:solidFill>
+                      <a:prstDash val="solid"/>
+                      <a:round/>
+                      <a:headEnd type="none" w="med" len="med"/>
+                      <a:tailEnd type="none" w="med" len="med"/>
+                    </a:lnL>
+                    <a:lnR w="12700" cap="flat" cmpd="sng" algn="ctr">
+                      <a:solidFill>
+                        <a:srgbClr val="3A4458"/>
+                      </a:solidFill>
+                      <a:prstDash val="solid"/>
+                      <a:round/>
+                      <a:headEnd type="none" w="med" len="med"/>
+                      <a:tailEnd type="none" w="med" len="med"/>
+                    </a:lnR>
+                    <a:lnT w="12700" cap="flat" cmpd="sng" algn="ctr">
+                      <a:solidFill>
+                        <a:srgbClr val="3A4458"/>
+                      </a:solidFill>
+                      <a:prstDash val="solid"/>
+                      <a:round/>
+                      <a:headEnd type="none" w="med" len="med"/>
+                      <a:tailEnd type="none" w="med" len="med"/>
+                    </a:lnT>
+                    <a:lnB w="12700" cap="flat" cmpd="sng" algn="ctr">
+                      <a:solidFill>
+                        <a:srgbClr val="3A4458"/>
+                      </a:solidFill>
+                      <a:prstDash val="solid"/>
+                      <a:round/>
+                      <a:headEnd type="none" w="med" len="med"/>
+                      <a:tailEnd type="none" w="med" len="med"/>
+                    </a:lnB>
+                    <a:solidFill>
+                      <a:srgbClr val="232A3A"/>
+                    </a:solidFill>
+                  </a:tcPr>
+                </a:tc>
+                <a:tc>
+                  <a:txBody>
+                    <a:bodyPr/>
+                    <a:lstStyle/>
+                    <a:p>
+                      <a:pPr algn="ctr" indent="0" marL="0">
+                        <a:buNone/>
+                      </a:pPr>
+                      <a:r>
+                        <a:rPr lang="en-US" sz="1050" dirty="0">
+                          <a:solidFill>
+                            <a:srgbClr val="E6E9F0"/>
+                          </a:solidFill>
+                        </a:rPr>
+                        <a:t>0.95</a:t>
                       </a:r>
                       <a:endParaRPr lang="en-US" sz="1050" dirty="0"/>
                     </a:p>
@@ -2959,7 +3395,7 @@
                             <a:srgbClr val="E6E9F0"/>
                           </a:solidFill>
                         </a:rPr>
-                        <a:t>80%</a:t>
+                        <a:t>0.54</a:t>
                       </a:r>
                       <a:endParaRPr lang="en-US" sz="1050" dirty="0"/>
                     </a:p>
@@ -3020,7 +3456,7 @@
                             <a:srgbClr val="E6E9F0"/>
                           </a:solidFill>
                         </a:rPr>
-                        <a:t>7%</a:t>
+                        <a:t>0.14</a:t>
                       </a:r>
                       <a:endParaRPr lang="en-US" sz="1050" dirty="0"/>
                     </a:p>
@@ -3081,7 +3517,7 @@
                             <a:srgbClr val="E6E9F0"/>
                           </a:solidFill>
                         </a:rPr>
-                        <a:t>1.7k</a:t>
+                        <a:t>15.1</a:t>
                       </a:r>
                       <a:endParaRPr lang="en-US" sz="1050" dirty="0"/>
                     </a:p>
@@ -3142,7 +3578,7 @@
                             <a:srgbClr val="E6E9F0"/>
                           </a:solidFill>
                         </a:rPr>
-                        <a:t>4.4k</a:t>
+                        <a:t>16/17</a:t>
                       </a:r>
                       <a:endParaRPr lang="en-US" sz="1050" dirty="0"/>
                     </a:p>
@@ -3203,7 +3639,70 @@
                             <a:srgbClr val="E6E9F0"/>
                           </a:solidFill>
                         </a:rPr>
-                        <a:t>0.10</a:t>
+                        <a:t>0.95</a:t>
+                      </a:r>
+                      <a:endParaRPr lang="en-US" sz="1050" dirty="0"/>
+                    </a:p>
+                  </a:txBody>
+                  <a:tcPr marL="91440" marR="91440" marT="45720" marB="45720" anchor="ctr">
+                    <a:lnL w="12700" cap="flat" cmpd="sng" algn="ctr">
+                      <a:solidFill>
+                        <a:srgbClr val="3A4458"/>
+                      </a:solidFill>
+                      <a:prstDash val="solid"/>
+                      <a:round/>
+                      <a:headEnd type="none" w="med" len="med"/>
+                      <a:tailEnd type="none" w="med" len="med"/>
+                    </a:lnL>
+                    <a:lnR w="12700" cap="flat" cmpd="sng" algn="ctr">
+                      <a:solidFill>
+                        <a:srgbClr val="3A4458"/>
+                      </a:solidFill>
+                      <a:prstDash val="solid"/>
+                      <a:round/>
+                      <a:headEnd type="none" w="med" len="med"/>
+                      <a:tailEnd type="none" w="med" len="med"/>
+                    </a:lnR>
+                    <a:lnT w="12700" cap="flat" cmpd="sng" algn="ctr">
+                      <a:solidFill>
+                        <a:srgbClr val="3A4458"/>
+                      </a:solidFill>
+                      <a:prstDash val="solid"/>
+                      <a:round/>
+                      <a:headEnd type="none" w="med" len="med"/>
+                      <a:tailEnd type="none" w="med" len="med"/>
+                    </a:lnT>
+                    <a:lnB w="12700" cap="flat" cmpd="sng" algn="ctr">
+                      <a:solidFill>
+                        <a:srgbClr val="3A4458"/>
+                      </a:solidFill>
+                      <a:prstDash val="solid"/>
+                      <a:round/>
+                      <a:headEnd type="none" w="med" len="med"/>
+                      <a:tailEnd type="none" w="med" len="med"/>
+                    </a:lnB>
+                    <a:solidFill>
+                      <a:srgbClr val="232A3A"/>
+                    </a:solidFill>
+                  </a:tcPr>
+                </a:tc>
+              </a:tr>
+              <a:tr h="274320">
+                <a:tc>
+                  <a:txBody>
+                    <a:bodyPr/>
+                    <a:lstStyle/>
+                    <a:p>
+                      <a:pPr algn="ctr" indent="0" marL="0">
+                        <a:buNone/>
+                      </a:pPr>
+                      <a:r>
+                        <a:rPr lang="en-US" sz="1050" dirty="0">
+                          <a:solidFill>
+                            <a:srgbClr val="F7C59F"/>
+                          </a:solidFill>
+                        </a:rPr>
+                        <a:t>healthcare</a:t>
                       </a:r>
                       <a:endParaRPr lang="en-US" sz="1050" dirty="0"/>
                     </a:p>
@@ -3264,7 +3763,251 @@
                             <a:srgbClr val="E6E9F0"/>
                           </a:solidFill>
                         </a:rPr>
-                        <a:t>5.3</a:t>
+                        <a:t>0.79</a:t>
+                      </a:r>
+                      <a:endParaRPr lang="en-US" sz="1050" dirty="0"/>
+                    </a:p>
+                  </a:txBody>
+                  <a:tcPr marL="91440" marR="91440" marT="45720" marB="45720" anchor="ctr">
+                    <a:lnL w="12700" cap="flat" cmpd="sng" algn="ctr">
+                      <a:solidFill>
+                        <a:srgbClr val="3A4458"/>
+                      </a:solidFill>
+                      <a:prstDash val="solid"/>
+                      <a:round/>
+                      <a:headEnd type="none" w="med" len="med"/>
+                      <a:tailEnd type="none" w="med" len="med"/>
+                    </a:lnL>
+                    <a:lnR w="12700" cap="flat" cmpd="sng" algn="ctr">
+                      <a:solidFill>
+                        <a:srgbClr val="3A4458"/>
+                      </a:solidFill>
+                      <a:prstDash val="solid"/>
+                      <a:round/>
+                      <a:headEnd type="none" w="med" len="med"/>
+                      <a:tailEnd type="none" w="med" len="med"/>
+                    </a:lnR>
+                    <a:lnT w="12700" cap="flat" cmpd="sng" algn="ctr">
+                      <a:solidFill>
+                        <a:srgbClr val="3A4458"/>
+                      </a:solidFill>
+                      <a:prstDash val="solid"/>
+                      <a:round/>
+                      <a:headEnd type="none" w="med" len="med"/>
+                      <a:tailEnd type="none" w="med" len="med"/>
+                    </a:lnT>
+                    <a:lnB w="12700" cap="flat" cmpd="sng" algn="ctr">
+                      <a:solidFill>
+                        <a:srgbClr val="3A4458"/>
+                      </a:solidFill>
+                      <a:prstDash val="solid"/>
+                      <a:round/>
+                      <a:headEnd type="none" w="med" len="med"/>
+                      <a:tailEnd type="none" w="med" len="med"/>
+                    </a:lnB>
+                    <a:solidFill>
+                      <a:srgbClr val="232A3A"/>
+                    </a:solidFill>
+                  </a:tcPr>
+                </a:tc>
+                <a:tc>
+                  <a:txBody>
+                    <a:bodyPr/>
+                    <a:lstStyle/>
+                    <a:p>
+                      <a:pPr algn="ctr" indent="0" marL="0">
+                        <a:buNone/>
+                      </a:pPr>
+                      <a:r>
+                        <a:rPr lang="en-US" sz="1050" dirty="0">
+                          <a:solidFill>
+                            <a:srgbClr val="E6E9F0"/>
+                          </a:solidFill>
+                        </a:rPr>
+                        <a:t>0.42</a:t>
+                      </a:r>
+                      <a:endParaRPr lang="en-US" sz="1050" dirty="0"/>
+                    </a:p>
+                  </a:txBody>
+                  <a:tcPr marL="91440" marR="91440" marT="45720" marB="45720" anchor="ctr">
+                    <a:lnL w="12700" cap="flat" cmpd="sng" algn="ctr">
+                      <a:solidFill>
+                        <a:srgbClr val="3A4458"/>
+                      </a:solidFill>
+                      <a:prstDash val="solid"/>
+                      <a:round/>
+                      <a:headEnd type="none" w="med" len="med"/>
+                      <a:tailEnd type="none" w="med" len="med"/>
+                    </a:lnL>
+                    <a:lnR w="12700" cap="flat" cmpd="sng" algn="ctr">
+                      <a:solidFill>
+                        <a:srgbClr val="3A4458"/>
+                      </a:solidFill>
+                      <a:prstDash val="solid"/>
+                      <a:round/>
+                      <a:headEnd type="none" w="med" len="med"/>
+                      <a:tailEnd type="none" w="med" len="med"/>
+                    </a:lnR>
+                    <a:lnT w="12700" cap="flat" cmpd="sng" algn="ctr">
+                      <a:solidFill>
+                        <a:srgbClr val="3A4458"/>
+                      </a:solidFill>
+                      <a:prstDash val="solid"/>
+                      <a:round/>
+                      <a:headEnd type="none" w="med" len="med"/>
+                      <a:tailEnd type="none" w="med" len="med"/>
+                    </a:lnT>
+                    <a:lnB w="12700" cap="flat" cmpd="sng" algn="ctr">
+                      <a:solidFill>
+                        <a:srgbClr val="3A4458"/>
+                      </a:solidFill>
+                      <a:prstDash val="solid"/>
+                      <a:round/>
+                      <a:headEnd type="none" w="med" len="med"/>
+                      <a:tailEnd type="none" w="med" len="med"/>
+                    </a:lnB>
+                    <a:solidFill>
+                      <a:srgbClr val="232A3A"/>
+                    </a:solidFill>
+                  </a:tcPr>
+                </a:tc>
+                <a:tc>
+                  <a:txBody>
+                    <a:bodyPr/>
+                    <a:lstStyle/>
+                    <a:p>
+                      <a:pPr algn="ctr" indent="0" marL="0">
+                        <a:buNone/>
+                      </a:pPr>
+                      <a:r>
+                        <a:rPr lang="en-US" sz="1050" dirty="0">
+                          <a:solidFill>
+                            <a:srgbClr val="E6E9F0"/>
+                          </a:solidFill>
+                        </a:rPr>
+                        <a:t>10.5</a:t>
+                      </a:r>
+                      <a:endParaRPr lang="en-US" sz="1050" dirty="0"/>
+                    </a:p>
+                  </a:txBody>
+                  <a:tcPr marL="91440" marR="91440" marT="45720" marB="45720" anchor="ctr">
+                    <a:lnL w="12700" cap="flat" cmpd="sng" algn="ctr">
+                      <a:solidFill>
+                        <a:srgbClr val="3A4458"/>
+                      </a:solidFill>
+                      <a:prstDash val="solid"/>
+                      <a:round/>
+                      <a:headEnd type="none" w="med" len="med"/>
+                      <a:tailEnd type="none" w="med" len="med"/>
+                    </a:lnL>
+                    <a:lnR w="12700" cap="flat" cmpd="sng" algn="ctr">
+                      <a:solidFill>
+                        <a:srgbClr val="3A4458"/>
+                      </a:solidFill>
+                      <a:prstDash val="solid"/>
+                      <a:round/>
+                      <a:headEnd type="none" w="med" len="med"/>
+                      <a:tailEnd type="none" w="med" len="med"/>
+                    </a:lnR>
+                    <a:lnT w="12700" cap="flat" cmpd="sng" algn="ctr">
+                      <a:solidFill>
+                        <a:srgbClr val="3A4458"/>
+                      </a:solidFill>
+                      <a:prstDash val="solid"/>
+                      <a:round/>
+                      <a:headEnd type="none" w="med" len="med"/>
+                      <a:tailEnd type="none" w="med" len="med"/>
+                    </a:lnT>
+                    <a:lnB w="12700" cap="flat" cmpd="sng" algn="ctr">
+                      <a:solidFill>
+                        <a:srgbClr val="3A4458"/>
+                      </a:solidFill>
+                      <a:prstDash val="solid"/>
+                      <a:round/>
+                      <a:headEnd type="none" w="med" len="med"/>
+                      <a:tailEnd type="none" w="med" len="med"/>
+                    </a:lnB>
+                    <a:solidFill>
+                      <a:srgbClr val="232A3A"/>
+                    </a:solidFill>
+                  </a:tcPr>
+                </a:tc>
+                <a:tc>
+                  <a:txBody>
+                    <a:bodyPr/>
+                    <a:lstStyle/>
+                    <a:p>
+                      <a:pPr algn="ctr" indent="0" marL="0">
+                        <a:buNone/>
+                      </a:pPr>
+                      <a:r>
+                        <a:rPr lang="en-US" sz="1050" dirty="0">
+                          <a:solidFill>
+                            <a:srgbClr val="E6E9F0"/>
+                          </a:solidFill>
+                        </a:rPr>
+                        <a:t>20/20</a:t>
+                      </a:r>
+                      <a:endParaRPr lang="en-US" sz="1050" dirty="0"/>
+                    </a:p>
+                  </a:txBody>
+                  <a:tcPr marL="91440" marR="91440" marT="45720" marB="45720" anchor="ctr">
+                    <a:lnL w="12700" cap="flat" cmpd="sng" algn="ctr">
+                      <a:solidFill>
+                        <a:srgbClr val="3A4458"/>
+                      </a:solidFill>
+                      <a:prstDash val="solid"/>
+                      <a:round/>
+                      <a:headEnd type="none" w="med" len="med"/>
+                      <a:tailEnd type="none" w="med" len="med"/>
+                    </a:lnL>
+                    <a:lnR w="12700" cap="flat" cmpd="sng" algn="ctr">
+                      <a:solidFill>
+                        <a:srgbClr val="3A4458"/>
+                      </a:solidFill>
+                      <a:prstDash val="solid"/>
+                      <a:round/>
+                      <a:headEnd type="none" w="med" len="med"/>
+                      <a:tailEnd type="none" w="med" len="med"/>
+                    </a:lnR>
+                    <a:lnT w="12700" cap="flat" cmpd="sng" algn="ctr">
+                      <a:solidFill>
+                        <a:srgbClr val="3A4458"/>
+                      </a:solidFill>
+                      <a:prstDash val="solid"/>
+                      <a:round/>
+                      <a:headEnd type="none" w="med" len="med"/>
+                      <a:tailEnd type="none" w="med" len="med"/>
+                    </a:lnT>
+                    <a:lnB w="12700" cap="flat" cmpd="sng" algn="ctr">
+                      <a:solidFill>
+                        <a:srgbClr val="3A4458"/>
+                      </a:solidFill>
+                      <a:prstDash val="solid"/>
+                      <a:round/>
+                      <a:headEnd type="none" w="med" len="med"/>
+                      <a:tailEnd type="none" w="med" len="med"/>
+                    </a:lnB>
+                    <a:solidFill>
+                      <a:srgbClr val="232A3A"/>
+                    </a:solidFill>
+                  </a:tcPr>
+                </a:tc>
+                <a:tc>
+                  <a:txBody>
+                    <a:bodyPr/>
+                    <a:lstStyle/>
+                    <a:p>
+                      <a:pPr algn="ctr" indent="0" marL="0">
+                        <a:buNone/>
+                      </a:pPr>
+                      <a:r>
+                        <a:rPr lang="en-US" sz="1050" dirty="0">
+                          <a:solidFill>
+                            <a:srgbClr val="E6E9F0"/>
+                          </a:solidFill>
+                        </a:rPr>
+                        <a:t>0.95</a:t>
                       </a:r>
                       <a:endParaRPr lang="en-US" sz="1050" dirty="0"/>
                     </a:p>
@@ -3388,7 +4131,7 @@
                             <a:srgbClr val="E6E9F0"/>
                           </a:solidFill>
                         </a:rPr>
-                        <a:t>64%</a:t>
+                        <a:t>0.95</a:t>
                       </a:r>
                       <a:endParaRPr lang="en-US" sz="1050" dirty="0"/>
                     </a:p>
@@ -3449,7 +4192,7 @@
                             <a:srgbClr val="E6E9F0"/>
                           </a:solidFill>
                         </a:rPr>
-                        <a:t>14%</a:t>
+                        <a:t>0.70</a:t>
                       </a:r>
                       <a:endParaRPr lang="en-US" sz="1050" dirty="0"/>
                     </a:p>
@@ -3510,7 +4253,7 @@
                             <a:srgbClr val="E6E9F0"/>
                           </a:solidFill>
                         </a:rPr>
-                        <a:t>4.1k</a:t>
+                        <a:t>6.8</a:t>
                       </a:r>
                       <a:endParaRPr lang="en-US" sz="1050" dirty="0"/>
                     </a:p>
@@ -3571,7 +4314,7 @@
                             <a:srgbClr val="E6E9F0"/>
                           </a:solidFill>
                         </a:rPr>
-                        <a:t>9.5k</a:t>
+                        <a:t>20/20</a:t>
                       </a:r>
                       <a:endParaRPr lang="en-US" sz="1050" dirty="0"/>
                     </a:p>
@@ -3632,68 +4375,7 @@
                             <a:srgbClr val="E6E9F0"/>
                           </a:solidFill>
                         </a:rPr>
-                        <a:t>0.11</a:t>
-                      </a:r>
-                      <a:endParaRPr lang="en-US" sz="1050" dirty="0"/>
-                    </a:p>
-                  </a:txBody>
-                  <a:tcPr marL="91440" marR="91440" marT="45720" marB="45720" anchor="ctr">
-                    <a:lnL w="12700" cap="flat" cmpd="sng" algn="ctr">
-                      <a:solidFill>
-                        <a:srgbClr val="3A4458"/>
-                      </a:solidFill>
-                      <a:prstDash val="solid"/>
-                      <a:round/>
-                      <a:headEnd type="none" w="med" len="med"/>
-                      <a:tailEnd type="none" w="med" len="med"/>
-                    </a:lnL>
-                    <a:lnR w="12700" cap="flat" cmpd="sng" algn="ctr">
-                      <a:solidFill>
-                        <a:srgbClr val="3A4458"/>
-                      </a:solidFill>
-                      <a:prstDash val="solid"/>
-                      <a:round/>
-                      <a:headEnd type="none" w="med" len="med"/>
-                      <a:tailEnd type="none" w="med" len="med"/>
-                    </a:lnR>
-                    <a:lnT w="12700" cap="flat" cmpd="sng" algn="ctr">
-                      <a:solidFill>
-                        <a:srgbClr val="3A4458"/>
-                      </a:solidFill>
-                      <a:prstDash val="solid"/>
-                      <a:round/>
-                      <a:headEnd type="none" w="med" len="med"/>
-                      <a:tailEnd type="none" w="med" len="med"/>
-                    </a:lnT>
-                    <a:lnB w="12700" cap="flat" cmpd="sng" algn="ctr">
-                      <a:solidFill>
-                        <a:srgbClr val="3A4458"/>
-                      </a:solidFill>
-                      <a:prstDash val="solid"/>
-                      <a:round/>
-                      <a:headEnd type="none" w="med" len="med"/>
-                      <a:tailEnd type="none" w="med" len="med"/>
-                    </a:lnB>
-                    <a:solidFill>
-                      <a:srgbClr val="232A3A"/>
-                    </a:solidFill>
-                  </a:tcPr>
-                </a:tc>
-                <a:tc>
-                  <a:txBody>
-                    <a:bodyPr/>
-                    <a:lstStyle/>
-                    <a:p>
-                      <a:pPr algn="ctr" indent="0" marL="0">
-                        <a:buNone/>
-                      </a:pPr>
-                      <a:r>
-                        <a:rPr lang="en-US" sz="1050" dirty="0">
-                          <a:solidFill>
-                            <a:srgbClr val="E6E9F0"/>
-                          </a:solidFill>
-                        </a:rPr>
-                        <a:t>6.1</a:t>
+                        <a:t>0.95</a:t>
                       </a:r>
                       <a:endParaRPr lang="en-US" sz="1050" dirty="0"/>
                     </a:p>
@@ -3817,7 +4499,7 @@
                             <a:srgbClr val="E6E9F0"/>
                           </a:solidFill>
                         </a:rPr>
-                        <a:t>64%</a:t>
+                        <a:t>0.82</a:t>
                       </a:r>
                       <a:endParaRPr lang="en-US" sz="1050" dirty="0"/>
                     </a:p>
@@ -3878,7 +4560,7 @@
                             <a:srgbClr val="E6E9F0"/>
                           </a:solidFill>
                         </a:rPr>
-                        <a:t>14%</a:t>
+                        <a:t>0.32</a:t>
                       </a:r>
                       <a:endParaRPr lang="en-US" sz="1050" dirty="0"/>
                     </a:p>
@@ -3939,7 +4621,7 @@
                             <a:srgbClr val="E6E9F0"/>
                           </a:solidFill>
                         </a:rPr>
-                        <a:t>1.8k</a:t>
+                        <a:t>13.8</a:t>
                       </a:r>
                       <a:endParaRPr lang="en-US" sz="1050" dirty="0"/>
                     </a:p>
@@ -4000,7 +4682,7 @@
                             <a:srgbClr val="E6E9F0"/>
                           </a:solidFill>
                         </a:rPr>
-                        <a:t>4.4k</a:t>
+                        <a:t>18/20</a:t>
                       </a:r>
                       <a:endParaRPr lang="en-US" sz="1050" dirty="0"/>
                     </a:p>
@@ -4061,926 +4743,7 @@
                             <a:srgbClr val="E6E9F0"/>
                           </a:solidFill>
                         </a:rPr>
-                        <a:t>0.11</a:t>
-                      </a:r>
-                      <a:endParaRPr lang="en-US" sz="1050" dirty="0"/>
-                    </a:p>
-                  </a:txBody>
-                  <a:tcPr marL="91440" marR="91440" marT="45720" marB="45720" anchor="ctr">
-                    <a:lnL w="12700" cap="flat" cmpd="sng" algn="ctr">
-                      <a:solidFill>
-                        <a:srgbClr val="3A4458"/>
-                      </a:solidFill>
-                      <a:prstDash val="solid"/>
-                      <a:round/>
-                      <a:headEnd type="none" w="med" len="med"/>
-                      <a:tailEnd type="none" w="med" len="med"/>
-                    </a:lnL>
-                    <a:lnR w="12700" cap="flat" cmpd="sng" algn="ctr">
-                      <a:solidFill>
-                        <a:srgbClr val="3A4458"/>
-                      </a:solidFill>
-                      <a:prstDash val="solid"/>
-                      <a:round/>
-                      <a:headEnd type="none" w="med" len="med"/>
-                      <a:tailEnd type="none" w="med" len="med"/>
-                    </a:lnR>
-                    <a:lnT w="12700" cap="flat" cmpd="sng" algn="ctr">
-                      <a:solidFill>
-                        <a:srgbClr val="3A4458"/>
-                      </a:solidFill>
-                      <a:prstDash val="solid"/>
-                      <a:round/>
-                      <a:headEnd type="none" w="med" len="med"/>
-                      <a:tailEnd type="none" w="med" len="med"/>
-                    </a:lnT>
-                    <a:lnB w="12700" cap="flat" cmpd="sng" algn="ctr">
-                      <a:solidFill>
-                        <a:srgbClr val="3A4458"/>
-                      </a:solidFill>
-                      <a:prstDash val="solid"/>
-                      <a:round/>
-                      <a:headEnd type="none" w="med" len="med"/>
-                      <a:tailEnd type="none" w="med" len="med"/>
-                    </a:lnB>
-                    <a:solidFill>
-                      <a:srgbClr val="232A3A"/>
-                    </a:solidFill>
-                  </a:tcPr>
-                </a:tc>
-                <a:tc>
-                  <a:txBody>
-                    <a:bodyPr/>
-                    <a:lstStyle/>
-                    <a:p>
-                      <a:pPr algn="ctr" indent="0" marL="0">
-                        <a:buNone/>
-                      </a:pPr>
-                      <a:r>
-                        <a:rPr lang="en-US" sz="1050" dirty="0">
-                          <a:solidFill>
-                            <a:srgbClr val="E6E9F0"/>
-                          </a:solidFill>
-                        </a:rPr>
-                        <a:t>5.6</a:t>
-                      </a:r>
-                      <a:endParaRPr lang="en-US" sz="1050" dirty="0"/>
-                    </a:p>
-                  </a:txBody>
-                  <a:tcPr marL="91440" marR="91440" marT="45720" marB="45720" anchor="ctr">
-                    <a:lnL w="12700" cap="flat" cmpd="sng" algn="ctr">
-                      <a:solidFill>
-                        <a:srgbClr val="3A4458"/>
-                      </a:solidFill>
-                      <a:prstDash val="solid"/>
-                      <a:round/>
-                      <a:headEnd type="none" w="med" len="med"/>
-                      <a:tailEnd type="none" w="med" len="med"/>
-                    </a:lnL>
-                    <a:lnR w="12700" cap="flat" cmpd="sng" algn="ctr">
-                      <a:solidFill>
-                        <a:srgbClr val="3A4458"/>
-                      </a:solidFill>
-                      <a:prstDash val="solid"/>
-                      <a:round/>
-                      <a:headEnd type="none" w="med" len="med"/>
-                      <a:tailEnd type="none" w="med" len="med"/>
-                    </a:lnR>
-                    <a:lnT w="12700" cap="flat" cmpd="sng" algn="ctr">
-                      <a:solidFill>
-                        <a:srgbClr val="3A4458"/>
-                      </a:solidFill>
-                      <a:prstDash val="solid"/>
-                      <a:round/>
-                      <a:headEnd type="none" w="med" len="med"/>
-                      <a:tailEnd type="none" w="med" len="med"/>
-                    </a:lnT>
-                    <a:lnB w="12700" cap="flat" cmpd="sng" algn="ctr">
-                      <a:solidFill>
-                        <a:srgbClr val="3A4458"/>
-                      </a:solidFill>
-                      <a:prstDash val="solid"/>
-                      <a:round/>
-                      <a:headEnd type="none" w="med" len="med"/>
-                      <a:tailEnd type="none" w="med" len="med"/>
-                    </a:lnB>
-                    <a:solidFill>
-                      <a:srgbClr val="232A3A"/>
-                    </a:solidFill>
-                  </a:tcPr>
-                </a:tc>
-              </a:tr>
-              <a:tr h="274320">
-                <a:tc>
-                  <a:txBody>
-                    <a:bodyPr/>
-                    <a:lstStyle/>
-                    <a:p>
-                      <a:pPr algn="ctr" indent="0" marL="0">
-                        <a:buNone/>
-                      </a:pPr>
-                      <a:r>
-                        <a:rPr lang="en-US" sz="1050" dirty="0">
-                          <a:solidFill>
-                            <a:srgbClr val="F7C59F"/>
-                          </a:solidFill>
-                        </a:rPr>
-                        <a:t>education</a:t>
-                      </a:r>
-                      <a:endParaRPr lang="en-US" sz="1050" dirty="0"/>
-                    </a:p>
-                  </a:txBody>
-                  <a:tcPr marL="91440" marR="91440" marT="45720" marB="45720" anchor="ctr">
-                    <a:lnL w="12700" cap="flat" cmpd="sng" algn="ctr">
-                      <a:solidFill>
-                        <a:srgbClr val="3A4458"/>
-                      </a:solidFill>
-                      <a:prstDash val="solid"/>
-                      <a:round/>
-                      <a:headEnd type="none" w="med" len="med"/>
-                      <a:tailEnd type="none" w="med" len="med"/>
-                    </a:lnL>
-                    <a:lnR w="12700" cap="flat" cmpd="sng" algn="ctr">
-                      <a:solidFill>
-                        <a:srgbClr val="3A4458"/>
-                      </a:solidFill>
-                      <a:prstDash val="solid"/>
-                      <a:round/>
-                      <a:headEnd type="none" w="med" len="med"/>
-                      <a:tailEnd type="none" w="med" len="med"/>
-                    </a:lnR>
-                    <a:lnT w="12700" cap="flat" cmpd="sng" algn="ctr">
-                      <a:solidFill>
-                        <a:srgbClr val="3A4458"/>
-                      </a:solidFill>
-                      <a:prstDash val="solid"/>
-                      <a:round/>
-                      <a:headEnd type="none" w="med" len="med"/>
-                      <a:tailEnd type="none" w="med" len="med"/>
-                    </a:lnT>
-                    <a:lnB w="12700" cap="flat" cmpd="sng" algn="ctr">
-                      <a:solidFill>
-                        <a:srgbClr val="3A4458"/>
-                      </a:solidFill>
-                      <a:prstDash val="solid"/>
-                      <a:round/>
-                      <a:headEnd type="none" w="med" len="med"/>
-                      <a:tailEnd type="none" w="med" len="med"/>
-                    </a:lnB>
-                    <a:solidFill>
-                      <a:srgbClr val="232A3A"/>
-                    </a:solidFill>
-                  </a:tcPr>
-                </a:tc>
-                <a:tc>
-                  <a:txBody>
-                    <a:bodyPr/>
-                    <a:lstStyle/>
-                    <a:p>
-                      <a:pPr algn="ctr" indent="0" marL="0">
-                        <a:buNone/>
-                      </a:pPr>
-                      <a:r>
-                        <a:rPr lang="en-US" sz="1050" dirty="0">
-                          <a:solidFill>
-                            <a:srgbClr val="E6E9F0"/>
-                          </a:solidFill>
-                        </a:rPr>
-                        <a:t>55%</a:t>
-                      </a:r>
-                      <a:endParaRPr lang="en-US" sz="1050" dirty="0"/>
-                    </a:p>
-                  </a:txBody>
-                  <a:tcPr marL="91440" marR="91440" marT="45720" marB="45720" anchor="ctr">
-                    <a:lnL w="12700" cap="flat" cmpd="sng" algn="ctr">
-                      <a:solidFill>
-                        <a:srgbClr val="3A4458"/>
-                      </a:solidFill>
-                      <a:prstDash val="solid"/>
-                      <a:round/>
-                      <a:headEnd type="none" w="med" len="med"/>
-                      <a:tailEnd type="none" w="med" len="med"/>
-                    </a:lnL>
-                    <a:lnR w="12700" cap="flat" cmpd="sng" algn="ctr">
-                      <a:solidFill>
-                        <a:srgbClr val="3A4458"/>
-                      </a:solidFill>
-                      <a:prstDash val="solid"/>
-                      <a:round/>
-                      <a:headEnd type="none" w="med" len="med"/>
-                      <a:tailEnd type="none" w="med" len="med"/>
-                    </a:lnR>
-                    <a:lnT w="12700" cap="flat" cmpd="sng" algn="ctr">
-                      <a:solidFill>
-                        <a:srgbClr val="3A4458"/>
-                      </a:solidFill>
-                      <a:prstDash val="solid"/>
-                      <a:round/>
-                      <a:headEnd type="none" w="med" len="med"/>
-                      <a:tailEnd type="none" w="med" len="med"/>
-                    </a:lnT>
-                    <a:lnB w="12700" cap="flat" cmpd="sng" algn="ctr">
-                      <a:solidFill>
-                        <a:srgbClr val="3A4458"/>
-                      </a:solidFill>
-                      <a:prstDash val="solid"/>
-                      <a:round/>
-                      <a:headEnd type="none" w="med" len="med"/>
-                      <a:tailEnd type="none" w="med" len="med"/>
-                    </a:lnB>
-                    <a:solidFill>
-                      <a:srgbClr val="232A3A"/>
-                    </a:solidFill>
-                  </a:tcPr>
-                </a:tc>
-                <a:tc>
-                  <a:txBody>
-                    <a:bodyPr/>
-                    <a:lstStyle/>
-                    <a:p>
-                      <a:pPr algn="ctr" indent="0" marL="0">
-                        <a:buNone/>
-                      </a:pPr>
-                      <a:r>
-                        <a:rPr lang="en-US" sz="1050" dirty="0">
-                          <a:solidFill>
-                            <a:srgbClr val="E6E9F0"/>
-                          </a:solidFill>
-                        </a:rPr>
-                        <a:t>45%</a:t>
-                      </a:r>
-                      <a:endParaRPr lang="en-US" sz="1050" dirty="0"/>
-                    </a:p>
-                  </a:txBody>
-                  <a:tcPr marL="91440" marR="91440" marT="45720" marB="45720" anchor="ctr">
-                    <a:lnL w="12700" cap="flat" cmpd="sng" algn="ctr">
-                      <a:solidFill>
-                        <a:srgbClr val="3A4458"/>
-                      </a:solidFill>
-                      <a:prstDash val="solid"/>
-                      <a:round/>
-                      <a:headEnd type="none" w="med" len="med"/>
-                      <a:tailEnd type="none" w="med" len="med"/>
-                    </a:lnL>
-                    <a:lnR w="12700" cap="flat" cmpd="sng" algn="ctr">
-                      <a:solidFill>
-                        <a:srgbClr val="3A4458"/>
-                      </a:solidFill>
-                      <a:prstDash val="solid"/>
-                      <a:round/>
-                      <a:headEnd type="none" w="med" len="med"/>
-                      <a:tailEnd type="none" w="med" len="med"/>
-                    </a:lnR>
-                    <a:lnT w="12700" cap="flat" cmpd="sng" algn="ctr">
-                      <a:solidFill>
-                        <a:srgbClr val="3A4458"/>
-                      </a:solidFill>
-                      <a:prstDash val="solid"/>
-                      <a:round/>
-                      <a:headEnd type="none" w="med" len="med"/>
-                      <a:tailEnd type="none" w="med" len="med"/>
-                    </a:lnT>
-                    <a:lnB w="12700" cap="flat" cmpd="sng" algn="ctr">
-                      <a:solidFill>
-                        <a:srgbClr val="3A4458"/>
-                      </a:solidFill>
-                      <a:prstDash val="solid"/>
-                      <a:round/>
-                      <a:headEnd type="none" w="med" len="med"/>
-                      <a:tailEnd type="none" w="med" len="med"/>
-                    </a:lnB>
-                    <a:solidFill>
-                      <a:srgbClr val="232A3A"/>
-                    </a:solidFill>
-                  </a:tcPr>
-                </a:tc>
-                <a:tc>
-                  <a:txBody>
-                    <a:bodyPr/>
-                    <a:lstStyle/>
-                    <a:p>
-                      <a:pPr algn="ctr" indent="0" marL="0">
-                        <a:buNone/>
-                      </a:pPr>
-                      <a:r>
-                        <a:rPr lang="en-US" sz="1050" dirty="0">
-                          <a:solidFill>
-                            <a:srgbClr val="E6E9F0"/>
-                          </a:solidFill>
-                        </a:rPr>
-                        <a:t>2.4k</a:t>
-                      </a:r>
-                      <a:endParaRPr lang="en-US" sz="1050" dirty="0"/>
-                    </a:p>
-                  </a:txBody>
-                  <a:tcPr marL="91440" marR="91440" marT="45720" marB="45720" anchor="ctr">
-                    <a:lnL w="12700" cap="flat" cmpd="sng" algn="ctr">
-                      <a:solidFill>
-                        <a:srgbClr val="3A4458"/>
-                      </a:solidFill>
-                      <a:prstDash val="solid"/>
-                      <a:round/>
-                      <a:headEnd type="none" w="med" len="med"/>
-                      <a:tailEnd type="none" w="med" len="med"/>
-                    </a:lnL>
-                    <a:lnR w="12700" cap="flat" cmpd="sng" algn="ctr">
-                      <a:solidFill>
-                        <a:srgbClr val="3A4458"/>
-                      </a:solidFill>
-                      <a:prstDash val="solid"/>
-                      <a:round/>
-                      <a:headEnd type="none" w="med" len="med"/>
-                      <a:tailEnd type="none" w="med" len="med"/>
-                    </a:lnR>
-                    <a:lnT w="12700" cap="flat" cmpd="sng" algn="ctr">
-                      <a:solidFill>
-                        <a:srgbClr val="3A4458"/>
-                      </a:solidFill>
-                      <a:prstDash val="solid"/>
-                      <a:round/>
-                      <a:headEnd type="none" w="med" len="med"/>
-                      <a:tailEnd type="none" w="med" len="med"/>
-                    </a:lnT>
-                    <a:lnB w="12700" cap="flat" cmpd="sng" algn="ctr">
-                      <a:solidFill>
-                        <a:srgbClr val="3A4458"/>
-                      </a:solidFill>
-                      <a:prstDash val="solid"/>
-                      <a:round/>
-                      <a:headEnd type="none" w="med" len="med"/>
-                      <a:tailEnd type="none" w="med" len="med"/>
-                    </a:lnB>
-                    <a:solidFill>
-                      <a:srgbClr val="232A3A"/>
-                    </a:solidFill>
-                  </a:tcPr>
-                </a:tc>
-                <a:tc>
-                  <a:txBody>
-                    <a:bodyPr/>
-                    <a:lstStyle/>
-                    <a:p>
-                      <a:pPr algn="ctr" indent="0" marL="0">
-                        <a:buNone/>
-                      </a:pPr>
-                      <a:r>
-                        <a:rPr lang="en-US" sz="1050" dirty="0">
-                          <a:solidFill>
-                            <a:srgbClr val="E6E9F0"/>
-                          </a:solidFill>
-                        </a:rPr>
-                        <a:t>3.2k</a:t>
-                      </a:r>
-                      <a:endParaRPr lang="en-US" sz="1050" dirty="0"/>
-                    </a:p>
-                  </a:txBody>
-                  <a:tcPr marL="91440" marR="91440" marT="45720" marB="45720" anchor="ctr">
-                    <a:lnL w="12700" cap="flat" cmpd="sng" algn="ctr">
-                      <a:solidFill>
-                        <a:srgbClr val="3A4458"/>
-                      </a:solidFill>
-                      <a:prstDash val="solid"/>
-                      <a:round/>
-                      <a:headEnd type="none" w="med" len="med"/>
-                      <a:tailEnd type="none" w="med" len="med"/>
-                    </a:lnL>
-                    <a:lnR w="12700" cap="flat" cmpd="sng" algn="ctr">
-                      <a:solidFill>
-                        <a:srgbClr val="3A4458"/>
-                      </a:solidFill>
-                      <a:prstDash val="solid"/>
-                      <a:round/>
-                      <a:headEnd type="none" w="med" len="med"/>
-                      <a:tailEnd type="none" w="med" len="med"/>
-                    </a:lnR>
-                    <a:lnT w="12700" cap="flat" cmpd="sng" algn="ctr">
-                      <a:solidFill>
-                        <a:srgbClr val="3A4458"/>
-                      </a:solidFill>
-                      <a:prstDash val="solid"/>
-                      <a:round/>
-                      <a:headEnd type="none" w="med" len="med"/>
-                      <a:tailEnd type="none" w="med" len="med"/>
-                    </a:lnT>
-                    <a:lnB w="12700" cap="flat" cmpd="sng" algn="ctr">
-                      <a:solidFill>
-                        <a:srgbClr val="3A4458"/>
-                      </a:solidFill>
-                      <a:prstDash val="solid"/>
-                      <a:round/>
-                      <a:headEnd type="none" w="med" len="med"/>
-                      <a:tailEnd type="none" w="med" len="med"/>
-                    </a:lnB>
-                    <a:solidFill>
-                      <a:srgbClr val="232A3A"/>
-                    </a:solidFill>
-                  </a:tcPr>
-                </a:tc>
-                <a:tc>
-                  <a:txBody>
-                    <a:bodyPr/>
-                    <a:lstStyle/>
-                    <a:p>
-                      <a:pPr algn="ctr" indent="0" marL="0">
-                        <a:buNone/>
-                      </a:pPr>
-                      <a:r>
-                        <a:rPr lang="en-US" sz="1050" dirty="0">
-                          <a:solidFill>
-                            <a:srgbClr val="E6E9F0"/>
-                          </a:solidFill>
-                        </a:rPr>
-                        <a:t>0.11</a:t>
-                      </a:r>
-                      <a:endParaRPr lang="en-US" sz="1050" dirty="0"/>
-                    </a:p>
-                  </a:txBody>
-                  <a:tcPr marL="91440" marR="91440" marT="45720" marB="45720" anchor="ctr">
-                    <a:lnL w="12700" cap="flat" cmpd="sng" algn="ctr">
-                      <a:solidFill>
-                        <a:srgbClr val="3A4458"/>
-                      </a:solidFill>
-                      <a:prstDash val="solid"/>
-                      <a:round/>
-                      <a:headEnd type="none" w="med" len="med"/>
-                      <a:tailEnd type="none" w="med" len="med"/>
-                    </a:lnL>
-                    <a:lnR w="12700" cap="flat" cmpd="sng" algn="ctr">
-                      <a:solidFill>
-                        <a:srgbClr val="3A4458"/>
-                      </a:solidFill>
-                      <a:prstDash val="solid"/>
-                      <a:round/>
-                      <a:headEnd type="none" w="med" len="med"/>
-                      <a:tailEnd type="none" w="med" len="med"/>
-                    </a:lnR>
-                    <a:lnT w="12700" cap="flat" cmpd="sng" algn="ctr">
-                      <a:solidFill>
-                        <a:srgbClr val="3A4458"/>
-                      </a:solidFill>
-                      <a:prstDash val="solid"/>
-                      <a:round/>
-                      <a:headEnd type="none" w="med" len="med"/>
-                      <a:tailEnd type="none" w="med" len="med"/>
-                    </a:lnT>
-                    <a:lnB w="12700" cap="flat" cmpd="sng" algn="ctr">
-                      <a:solidFill>
-                        <a:srgbClr val="3A4458"/>
-                      </a:solidFill>
-                      <a:prstDash val="solid"/>
-                      <a:round/>
-                      <a:headEnd type="none" w="med" len="med"/>
-                      <a:tailEnd type="none" w="med" len="med"/>
-                    </a:lnB>
-                    <a:solidFill>
-                      <a:srgbClr val="232A3A"/>
-                    </a:solidFill>
-                  </a:tcPr>
-                </a:tc>
-                <a:tc>
-                  <a:txBody>
-                    <a:bodyPr/>
-                    <a:lstStyle/>
-                    <a:p>
-                      <a:pPr algn="ctr" indent="0" marL="0">
-                        <a:buNone/>
-                      </a:pPr>
-                      <a:r>
-                        <a:rPr lang="en-US" sz="1050" dirty="0">
-                          <a:solidFill>
-                            <a:srgbClr val="E6E9F0"/>
-                          </a:solidFill>
-                        </a:rPr>
-                        <a:t>3.2</a:t>
-                      </a:r>
-                      <a:endParaRPr lang="en-US" sz="1050" dirty="0"/>
-                    </a:p>
-                  </a:txBody>
-                  <a:tcPr marL="91440" marR="91440" marT="45720" marB="45720" anchor="ctr">
-                    <a:lnL w="12700" cap="flat" cmpd="sng" algn="ctr">
-                      <a:solidFill>
-                        <a:srgbClr val="3A4458"/>
-                      </a:solidFill>
-                      <a:prstDash val="solid"/>
-                      <a:round/>
-                      <a:headEnd type="none" w="med" len="med"/>
-                      <a:tailEnd type="none" w="med" len="med"/>
-                    </a:lnL>
-                    <a:lnR w="12700" cap="flat" cmpd="sng" algn="ctr">
-                      <a:solidFill>
-                        <a:srgbClr val="3A4458"/>
-                      </a:solidFill>
-                      <a:prstDash val="solid"/>
-                      <a:round/>
-                      <a:headEnd type="none" w="med" len="med"/>
-                      <a:tailEnd type="none" w="med" len="med"/>
-                    </a:lnR>
-                    <a:lnT w="12700" cap="flat" cmpd="sng" algn="ctr">
-                      <a:solidFill>
-                        <a:srgbClr val="3A4458"/>
-                      </a:solidFill>
-                      <a:prstDash val="solid"/>
-                      <a:round/>
-                      <a:headEnd type="none" w="med" len="med"/>
-                      <a:tailEnd type="none" w="med" len="med"/>
-                    </a:lnT>
-                    <a:lnB w="12700" cap="flat" cmpd="sng" algn="ctr">
-                      <a:solidFill>
-                        <a:srgbClr val="3A4458"/>
-                      </a:solidFill>
-                      <a:prstDash val="solid"/>
-                      <a:round/>
-                      <a:headEnd type="none" w="med" len="med"/>
-                      <a:tailEnd type="none" w="med" len="med"/>
-                    </a:lnB>
-                    <a:solidFill>
-                      <a:srgbClr val="232A3A"/>
-                    </a:solidFill>
-                  </a:tcPr>
-                </a:tc>
-              </a:tr>
-              <a:tr h="274320">
-                <a:tc>
-                  <a:txBody>
-                    <a:bodyPr/>
-                    <a:lstStyle/>
-                    <a:p>
-                      <a:pPr algn="ctr" indent="0" marL="0">
-                        <a:buNone/>
-                      </a:pPr>
-                      <a:r>
-                        <a:rPr lang="en-US" sz="1050" dirty="0">
-                          <a:solidFill>
-                            <a:srgbClr val="F7C59F"/>
-                          </a:solidFill>
-                        </a:rPr>
-                        <a:t>healthcare</a:t>
-                      </a:r>
-                      <a:endParaRPr lang="en-US" sz="1050" dirty="0"/>
-                    </a:p>
-                  </a:txBody>
-                  <a:tcPr marL="91440" marR="91440" marT="45720" marB="45720" anchor="ctr">
-                    <a:lnL w="12700" cap="flat" cmpd="sng" algn="ctr">
-                      <a:solidFill>
-                        <a:srgbClr val="3A4458"/>
-                      </a:solidFill>
-                      <a:prstDash val="solid"/>
-                      <a:round/>
-                      <a:headEnd type="none" w="med" len="med"/>
-                      <a:tailEnd type="none" w="med" len="med"/>
-                    </a:lnL>
-                    <a:lnR w="12700" cap="flat" cmpd="sng" algn="ctr">
-                      <a:solidFill>
-                        <a:srgbClr val="3A4458"/>
-                      </a:solidFill>
-                      <a:prstDash val="solid"/>
-                      <a:round/>
-                      <a:headEnd type="none" w="med" len="med"/>
-                      <a:tailEnd type="none" w="med" len="med"/>
-                    </a:lnR>
-                    <a:lnT w="12700" cap="flat" cmpd="sng" algn="ctr">
-                      <a:solidFill>
-                        <a:srgbClr val="3A4458"/>
-                      </a:solidFill>
-                      <a:prstDash val="solid"/>
-                      <a:round/>
-                      <a:headEnd type="none" w="med" len="med"/>
-                      <a:tailEnd type="none" w="med" len="med"/>
-                    </a:lnT>
-                    <a:lnB w="12700" cap="flat" cmpd="sng" algn="ctr">
-                      <a:solidFill>
-                        <a:srgbClr val="3A4458"/>
-                      </a:solidFill>
-                      <a:prstDash val="solid"/>
-                      <a:round/>
-                      <a:headEnd type="none" w="med" len="med"/>
-                      <a:tailEnd type="none" w="med" len="med"/>
-                    </a:lnB>
-                    <a:solidFill>
-                      <a:srgbClr val="232A3A"/>
-                    </a:solidFill>
-                  </a:tcPr>
-                </a:tc>
-                <a:tc>
-                  <a:txBody>
-                    <a:bodyPr/>
-                    <a:lstStyle/>
-                    <a:p>
-                      <a:pPr algn="ctr" indent="0" marL="0">
-                        <a:buNone/>
-                      </a:pPr>
-                      <a:r>
-                        <a:rPr lang="en-US" sz="1050" dirty="0">
-                          <a:solidFill>
-                            <a:srgbClr val="E6E9F0"/>
-                          </a:solidFill>
-                        </a:rPr>
-                        <a:t>27%</a:t>
-                      </a:r>
-                      <a:endParaRPr lang="en-US" sz="1050" dirty="0"/>
-                    </a:p>
-                  </a:txBody>
-                  <a:tcPr marL="91440" marR="91440" marT="45720" marB="45720" anchor="ctr">
-                    <a:lnL w="12700" cap="flat" cmpd="sng" algn="ctr">
-                      <a:solidFill>
-                        <a:srgbClr val="3A4458"/>
-                      </a:solidFill>
-                      <a:prstDash val="solid"/>
-                      <a:round/>
-                      <a:headEnd type="none" w="med" len="med"/>
-                      <a:tailEnd type="none" w="med" len="med"/>
-                    </a:lnL>
-                    <a:lnR w="12700" cap="flat" cmpd="sng" algn="ctr">
-                      <a:solidFill>
-                        <a:srgbClr val="3A4458"/>
-                      </a:solidFill>
-                      <a:prstDash val="solid"/>
-                      <a:round/>
-                      <a:headEnd type="none" w="med" len="med"/>
-                      <a:tailEnd type="none" w="med" len="med"/>
-                    </a:lnR>
-                    <a:lnT w="12700" cap="flat" cmpd="sng" algn="ctr">
-                      <a:solidFill>
-                        <a:srgbClr val="3A4458"/>
-                      </a:solidFill>
-                      <a:prstDash val="solid"/>
-                      <a:round/>
-                      <a:headEnd type="none" w="med" len="med"/>
-                      <a:tailEnd type="none" w="med" len="med"/>
-                    </a:lnT>
-                    <a:lnB w="12700" cap="flat" cmpd="sng" algn="ctr">
-                      <a:solidFill>
-                        <a:srgbClr val="3A4458"/>
-                      </a:solidFill>
-                      <a:prstDash val="solid"/>
-                      <a:round/>
-                      <a:headEnd type="none" w="med" len="med"/>
-                      <a:tailEnd type="none" w="med" len="med"/>
-                    </a:lnB>
-                    <a:solidFill>
-                      <a:srgbClr val="232A3A"/>
-                    </a:solidFill>
-                  </a:tcPr>
-                </a:tc>
-                <a:tc>
-                  <a:txBody>
-                    <a:bodyPr/>
-                    <a:lstStyle/>
-                    <a:p>
-                      <a:pPr algn="ctr" indent="0" marL="0">
-                        <a:buNone/>
-                      </a:pPr>
-                      <a:r>
-                        <a:rPr lang="en-US" sz="1050" dirty="0">
-                          <a:solidFill>
-                            <a:srgbClr val="E6E9F0"/>
-                          </a:solidFill>
-                        </a:rPr>
-                        <a:t>21%</a:t>
-                      </a:r>
-                      <a:endParaRPr lang="en-US" sz="1050" dirty="0"/>
-                    </a:p>
-                  </a:txBody>
-                  <a:tcPr marL="91440" marR="91440" marT="45720" marB="45720" anchor="ctr">
-                    <a:lnL w="12700" cap="flat" cmpd="sng" algn="ctr">
-                      <a:solidFill>
-                        <a:srgbClr val="3A4458"/>
-                      </a:solidFill>
-                      <a:prstDash val="solid"/>
-                      <a:round/>
-                      <a:headEnd type="none" w="med" len="med"/>
-                      <a:tailEnd type="none" w="med" len="med"/>
-                    </a:lnL>
-                    <a:lnR w="12700" cap="flat" cmpd="sng" algn="ctr">
-                      <a:solidFill>
-                        <a:srgbClr val="3A4458"/>
-                      </a:solidFill>
-                      <a:prstDash val="solid"/>
-                      <a:round/>
-                      <a:headEnd type="none" w="med" len="med"/>
-                      <a:tailEnd type="none" w="med" len="med"/>
-                    </a:lnR>
-                    <a:lnT w="12700" cap="flat" cmpd="sng" algn="ctr">
-                      <a:solidFill>
-                        <a:srgbClr val="3A4458"/>
-                      </a:solidFill>
-                      <a:prstDash val="solid"/>
-                      <a:round/>
-                      <a:headEnd type="none" w="med" len="med"/>
-                      <a:tailEnd type="none" w="med" len="med"/>
-                    </a:lnT>
-                    <a:lnB w="12700" cap="flat" cmpd="sng" algn="ctr">
-                      <a:solidFill>
-                        <a:srgbClr val="3A4458"/>
-                      </a:solidFill>
-                      <a:prstDash val="solid"/>
-                      <a:round/>
-                      <a:headEnd type="none" w="med" len="med"/>
-                      <a:tailEnd type="none" w="med" len="med"/>
-                    </a:lnB>
-                    <a:solidFill>
-                      <a:srgbClr val="232A3A"/>
-                    </a:solidFill>
-                  </a:tcPr>
-                </a:tc>
-                <a:tc>
-                  <a:txBody>
-                    <a:bodyPr/>
-                    <a:lstStyle/>
-                    <a:p>
-                      <a:pPr algn="ctr" indent="0" marL="0">
-                        <a:buNone/>
-                      </a:pPr>
-                      <a:r>
-                        <a:rPr lang="en-US" sz="1050" dirty="0">
-                          <a:solidFill>
-                            <a:srgbClr val="E6E9F0"/>
-                          </a:solidFill>
-                        </a:rPr>
-                        <a:t>2.6k</a:t>
-                      </a:r>
-                      <a:endParaRPr lang="en-US" sz="1050" dirty="0"/>
-                    </a:p>
-                  </a:txBody>
-                  <a:tcPr marL="91440" marR="91440" marT="45720" marB="45720" anchor="ctr">
-                    <a:lnL w="12700" cap="flat" cmpd="sng" algn="ctr">
-                      <a:solidFill>
-                        <a:srgbClr val="3A4458"/>
-                      </a:solidFill>
-                      <a:prstDash val="solid"/>
-                      <a:round/>
-                      <a:headEnd type="none" w="med" len="med"/>
-                      <a:tailEnd type="none" w="med" len="med"/>
-                    </a:lnL>
-                    <a:lnR w="12700" cap="flat" cmpd="sng" algn="ctr">
-                      <a:solidFill>
-                        <a:srgbClr val="3A4458"/>
-                      </a:solidFill>
-                      <a:prstDash val="solid"/>
-                      <a:round/>
-                      <a:headEnd type="none" w="med" len="med"/>
-                      <a:tailEnd type="none" w="med" len="med"/>
-                    </a:lnR>
-                    <a:lnT w="12700" cap="flat" cmpd="sng" algn="ctr">
-                      <a:solidFill>
-                        <a:srgbClr val="3A4458"/>
-                      </a:solidFill>
-                      <a:prstDash val="solid"/>
-                      <a:round/>
-                      <a:headEnd type="none" w="med" len="med"/>
-                      <a:tailEnd type="none" w="med" len="med"/>
-                    </a:lnT>
-                    <a:lnB w="12700" cap="flat" cmpd="sng" algn="ctr">
-                      <a:solidFill>
-                        <a:srgbClr val="3A4458"/>
-                      </a:solidFill>
-                      <a:prstDash val="solid"/>
-                      <a:round/>
-                      <a:headEnd type="none" w="med" len="med"/>
-                      <a:tailEnd type="none" w="med" len="med"/>
-                    </a:lnB>
-                    <a:solidFill>
-                      <a:srgbClr val="232A3A"/>
-                    </a:solidFill>
-                  </a:tcPr>
-                </a:tc>
-                <a:tc>
-                  <a:txBody>
-                    <a:bodyPr/>
-                    <a:lstStyle/>
-                    <a:p>
-                      <a:pPr algn="ctr" indent="0" marL="0">
-                        <a:buNone/>
-                      </a:pPr>
-                      <a:r>
-                        <a:rPr lang="en-US" sz="1050" dirty="0">
-                          <a:solidFill>
-                            <a:srgbClr val="E6E9F0"/>
-                          </a:solidFill>
-                        </a:rPr>
-                        <a:t>4.2k</a:t>
-                      </a:r>
-                      <a:endParaRPr lang="en-US" sz="1050" dirty="0"/>
-                    </a:p>
-                  </a:txBody>
-                  <a:tcPr marL="91440" marR="91440" marT="45720" marB="45720" anchor="ctr">
-                    <a:lnL w="12700" cap="flat" cmpd="sng" algn="ctr">
-                      <a:solidFill>
-                        <a:srgbClr val="3A4458"/>
-                      </a:solidFill>
-                      <a:prstDash val="solid"/>
-                      <a:round/>
-                      <a:headEnd type="none" w="med" len="med"/>
-                      <a:tailEnd type="none" w="med" len="med"/>
-                    </a:lnL>
-                    <a:lnR w="12700" cap="flat" cmpd="sng" algn="ctr">
-                      <a:solidFill>
-                        <a:srgbClr val="3A4458"/>
-                      </a:solidFill>
-                      <a:prstDash val="solid"/>
-                      <a:round/>
-                      <a:headEnd type="none" w="med" len="med"/>
-                      <a:tailEnd type="none" w="med" len="med"/>
-                    </a:lnR>
-                    <a:lnT w="12700" cap="flat" cmpd="sng" algn="ctr">
-                      <a:solidFill>
-                        <a:srgbClr val="3A4458"/>
-                      </a:solidFill>
-                      <a:prstDash val="solid"/>
-                      <a:round/>
-                      <a:headEnd type="none" w="med" len="med"/>
-                      <a:tailEnd type="none" w="med" len="med"/>
-                    </a:lnT>
-                    <a:lnB w="12700" cap="flat" cmpd="sng" algn="ctr">
-                      <a:solidFill>
-                        <a:srgbClr val="3A4458"/>
-                      </a:solidFill>
-                      <a:prstDash val="solid"/>
-                      <a:round/>
-                      <a:headEnd type="none" w="med" len="med"/>
-                      <a:tailEnd type="none" w="med" len="med"/>
-                    </a:lnB>
-                    <a:solidFill>
-                      <a:srgbClr val="232A3A"/>
-                    </a:solidFill>
-                  </a:tcPr>
-                </a:tc>
-                <a:tc>
-                  <a:txBody>
-                    <a:bodyPr/>
-                    <a:lstStyle/>
-                    <a:p>
-                      <a:pPr algn="ctr" indent="0" marL="0">
-                        <a:buNone/>
-                      </a:pPr>
-                      <a:r>
-                        <a:rPr lang="en-US" sz="1050" dirty="0">
-                          <a:solidFill>
-                            <a:srgbClr val="E6E9F0"/>
-                          </a:solidFill>
-                        </a:rPr>
-                        <a:t>0.11</a:t>
-                      </a:r>
-                      <a:endParaRPr lang="en-US" sz="1050" dirty="0"/>
-                    </a:p>
-                  </a:txBody>
-                  <a:tcPr marL="91440" marR="91440" marT="45720" marB="45720" anchor="ctr">
-                    <a:lnL w="12700" cap="flat" cmpd="sng" algn="ctr">
-                      <a:solidFill>
-                        <a:srgbClr val="3A4458"/>
-                      </a:solidFill>
-                      <a:prstDash val="solid"/>
-                      <a:round/>
-                      <a:headEnd type="none" w="med" len="med"/>
-                      <a:tailEnd type="none" w="med" len="med"/>
-                    </a:lnL>
-                    <a:lnR w="12700" cap="flat" cmpd="sng" algn="ctr">
-                      <a:solidFill>
-                        <a:srgbClr val="3A4458"/>
-                      </a:solidFill>
-                      <a:prstDash val="solid"/>
-                      <a:round/>
-                      <a:headEnd type="none" w="med" len="med"/>
-                      <a:tailEnd type="none" w="med" len="med"/>
-                    </a:lnR>
-                    <a:lnT w="12700" cap="flat" cmpd="sng" algn="ctr">
-                      <a:solidFill>
-                        <a:srgbClr val="3A4458"/>
-                      </a:solidFill>
-                      <a:prstDash val="solid"/>
-                      <a:round/>
-                      <a:headEnd type="none" w="med" len="med"/>
-                      <a:tailEnd type="none" w="med" len="med"/>
-                    </a:lnT>
-                    <a:lnB w="12700" cap="flat" cmpd="sng" algn="ctr">
-                      <a:solidFill>
-                        <a:srgbClr val="3A4458"/>
-                      </a:solidFill>
-                      <a:prstDash val="solid"/>
-                      <a:round/>
-                      <a:headEnd type="none" w="med" len="med"/>
-                      <a:tailEnd type="none" w="med" len="med"/>
-                    </a:lnB>
-                    <a:solidFill>
-                      <a:srgbClr val="232A3A"/>
-                    </a:solidFill>
-                  </a:tcPr>
-                </a:tc>
-                <a:tc>
-                  <a:txBody>
-                    <a:bodyPr/>
-                    <a:lstStyle/>
-                    <a:p>
-                      <a:pPr algn="ctr" indent="0" marL="0">
-                        <a:buNone/>
-                      </a:pPr>
-                      <a:r>
-                        <a:rPr lang="en-US" sz="1050" dirty="0">
-                          <a:solidFill>
-                            <a:srgbClr val="E6E9F0"/>
-                          </a:solidFill>
-                        </a:rPr>
-                        <a:t>5.5</a:t>
+                        <a:t>0.95</a:t>
                       </a:r>
                       <a:endParaRPr lang="en-US" sz="1050" dirty="0"/>
                     </a:p>
@@ -5034,14 +4797,14 @@
       </p:graphicFrame>
       <p:sp>
         <p:nvSpPr>
-          <p:cNvPr id="13" name="Text 10"/>
-          <p:cNvSpPr txBox="1"/>
-          <p:nvPr/>
-        </p:nvSpPr>
-        <p:spPr>
-          <a:xfrm>
-            <a:off x="731520" y="5989320"/>
-            <a:ext cx="10789920" cy="457200"/>
+          <p:cNvPr id="17" name="Text 14"/>
+          <p:cNvSpPr txBox="1"/>
+          <p:nvPr/>
+        </p:nvSpPr>
+        <p:spPr>
+          <a:xfrm>
+            <a:off x="731520" y="5943600"/>
+            <a:ext cx="10789920" cy="548640"/>
           </a:xfrm>
           <a:prstGeom prst="rect">
             <a:avLst/>
@@ -5057,14 +4820,25 @@
               <a:buNone/>
             </a:pPr>
             <a:r>
-              <a:rPr lang="en-US" sz="1200" i="1" dirty="0">
+              <a:rPr lang="en-US" sz="1150" b="1" i="1" dirty="0">
+                <a:solidFill>
+                  <a:srgbClr val="F7C59F"/>
+                </a:solidFill>
+              </a:rPr>
+              <a:t>The harm is CAPTURE + WASTE + STEALTH, not a completion freeze. </a:t>
+            </a:r>
+            <a:pPr indent="0" marL="0">
+              <a:buNone/>
+            </a:pPr>
+            <a:r>
+              <a:rPr lang="en-US" sz="1150" i="1" dirty="0">
                 <a:solidFill>
                   <a:srgbClr val="8D99AE"/>
                 </a:solidFill>
               </a:rPr>
-              <a:t>P-ASR stays ~0.1 because the busywork looks on-task to the judge — completion-drop and token-burn are the primary signals.</a:t>
-            </a:r>
-            <a:endParaRPr lang="en-US" sz="1200" dirty="0"/>
+              <a:t>CORBA-style structural detector: ~80% of agents captured into the task-aligned validation swarm (ERS ≈ 40% of bandwidth), yet the LLM auditor still rates it on-task (stealth 0.95) and "complete" — so the attack burns the collaboration invisibly.</a:t>
+            </a:r>
+            <a:endParaRPr lang="en-US" sz="1150" dirty="0"/>
           </a:p>
         </p:txBody>
       </p:sp>
@@ -12477,7 +12251,7 @@
             </a:avLst>
           </a:prstGeom>
           <a:solidFill>
-            <a:srgbClr val="FF6B35"/>
+            <a:srgbClr val="2A9D8F"/>
           </a:solidFill>
           <a:ln/>
         </p:spPr>
@@ -12512,7 +12286,7 @@
                   <a:srgbClr val="FFFFFF"/>
                 </a:solidFill>
               </a:rPr>
-              <a:t>running</a:t>
+              <a:t>applied</a:t>
             </a:r>
             <a:endParaRPr lang="en-US" sz="1000" dirty="0"/>
           </a:p>
@@ -12582,7 +12356,7 @@
                   <a:srgbClr val="1C2230"/>
                 </a:solidFill>
               </a:rPr>
-              <a:t>ERS (TAMAS)</a:t>
+              <a:t>ERS</a:t>
             </a:r>
             <a:endParaRPr lang="en-US" sz="1350" dirty="0"/>
           </a:p>
@@ -12618,7 +12392,7 @@
                   <a:srgbClr val="5A6475"/>
                 </a:solidFill>
               </a:rPr>
-              <a:t>safety score — compare to paper</a:t>
+              <a:t>bandwidth lost to busywork (from transcript)</a:t>
             </a:r>
             <a:endParaRPr lang="en-US" sz="1050" dirty="0"/>
           </a:p>
@@ -12641,7 +12415,7 @@
             </a:avLst>
           </a:prstGeom>
           <a:solidFill>
-            <a:srgbClr val="5A6475"/>
+            <a:srgbClr val="2A9D8F"/>
           </a:solidFill>
           <a:ln/>
         </p:spPr>
@@ -12676,7 +12450,7 @@
                   <a:srgbClr val="FFFFFF"/>
                 </a:solidFill>
               </a:rPr>
-              <a:t>future</a:t>
+              <a:t>applied</a:t>
             </a:r>
             <a:endParaRPr lang="en-US" sz="1000" dirty="0"/>
           </a:p>

--- a/stegacipher-burn/slides/StegaCIPHER-Burn.pptx
+++ b/stegacipher-burn/slides/StegaCIPHER-Burn.pptx
@@ -17,9 +17,12 @@
     <p:sldId id="265" r:id="rId11"/>
     <p:sldId id="266" r:id="rId12"/>
     <p:sldId id="267" r:id="rId13"/>
+    <p:sldId id="268" r:id="rId14"/>
+    <p:sldId id="269" r:id="rId15"/>
+    <p:sldId id="270" r:id="rId16"/>
   </p:sldIdLst>
   <p:notesMasterIdLst>
-    <p:notesMasterId r:id="rId14"/>
+    <p:notesMasterId r:id="rId17"/>
   </p:notesMasterIdLst>
   <p:sldSz cx="12191695" cy="6858000"/>
   <p:notesSz cx="6858000" cy="12191695"/>
@@ -801,6 +804,270 @@
             <a:fld id="{F7021451-1387-4CA6-816F-3879F97B5CBC}" type="slidenum">
               <a:rPr lang="en-US"/>
               <a:t>12</a:t>
+            </a:fld>
+            <a:endParaRPr lang="en-US"/>
+          </a:p>
+        </p:txBody>
+      </p:sp>
+    </p:spTree>
+    <p:extLst>
+      <p:ext uri="{BB962C8B-B14F-4D97-AF65-F5344CB8AC3E}">
+        <p14:creationId xmlns:p14="http://schemas.microsoft.com/office/powerpoint/2010/main" val="1024086991"/>
+      </p:ext>
+    </p:extLst>
+  </p:cSld>
+  <p:clrMapOvr>
+    <a:masterClrMapping/>
+  </p:clrMapOvr>
+</p:notes>
+</file>
+
+<file path=ppt/notesSlides/notesSlide13.xml><?xml version="1.0" encoding="utf-8"?>
+<p:notes xmlns:a="http://schemas.openxmlformats.org/drawingml/2006/main" xmlns:r="http://schemas.openxmlformats.org/officeDocument/2006/relationships" xmlns:p="http://schemas.openxmlformats.org/presentationml/2006/main">
+  <p:cSld>
+    <p:spTree>
+      <p:nvGrpSpPr>
+        <p:cNvPr id="1" name=""/>
+        <p:cNvGrpSpPr/>
+        <p:nvPr/>
+      </p:nvGrpSpPr>
+      <p:grpSpPr>
+        <a:xfrm>
+          <a:off x="0" y="0"/>
+          <a:ext cx="0" cy="0"/>
+          <a:chOff x="0" y="0"/>
+          <a:chExt cx="0" cy="0"/>
+        </a:xfrm>
+      </p:grpSpPr>
+      <p:sp>
+        <p:nvSpPr>
+          <p:cNvPr id="2" name="Slide Image Placeholder 1"/>
+          <p:cNvSpPr>
+            <a:spLocks noGrp="1" noRot="1" noChangeAspect="1"/>
+          </p:cNvSpPr>
+          <p:nvPr>
+            <p:ph type="sldImg"/>
+          </p:nvPr>
+        </p:nvSpPr>
+        <p:spPr/>
+      </p:sp>
+      <p:sp>
+        <p:nvSpPr>
+          <p:cNvPr id="3" name="Notes Placeholder 2"/>
+          <p:cNvSpPr>
+            <a:spLocks noGrp="1"/>
+          </p:cNvSpPr>
+          <p:nvPr>
+            <p:ph type="body" idx="1"/>
+          </p:nvPr>
+        </p:nvSpPr>
+        <p:spPr/>
+        <p:txBody>
+          <a:bodyPr/>
+          <a:lstStyle/>
+          <a:p>
+            <a:r>
+              <a:rPr lang="en-US" dirty="0"/>
+              <a:t/>
+            </a:r>
+            <a:endParaRPr lang="en-US" dirty="0"/>
+          </a:p>
+        </p:txBody>
+      </p:sp>
+      <p:sp>
+        <p:nvSpPr>
+          <p:cNvPr id="4" name="Slide Number Placeholder 3"/>
+          <p:cNvSpPr>
+            <a:spLocks noGrp="1"/>
+          </p:cNvSpPr>
+          <p:nvPr>
+            <p:ph type="sldNum" sz="quarter" idx="10"/>
+          </p:nvPr>
+        </p:nvSpPr>
+        <p:spPr/>
+        <p:txBody>
+          <a:bodyPr/>
+          <a:lstStyle/>
+          <a:p>
+            <a:fld id="{F7021451-1387-4CA6-816F-3879F97B5CBC}" type="slidenum">
+              <a:rPr lang="en-US"/>
+              <a:t>13</a:t>
+            </a:fld>
+            <a:endParaRPr lang="en-US"/>
+          </a:p>
+        </p:txBody>
+      </p:sp>
+    </p:spTree>
+    <p:extLst>
+      <p:ext uri="{BB962C8B-B14F-4D97-AF65-F5344CB8AC3E}">
+        <p14:creationId xmlns:p14="http://schemas.microsoft.com/office/powerpoint/2010/main" val="1024086991"/>
+      </p:ext>
+    </p:extLst>
+  </p:cSld>
+  <p:clrMapOvr>
+    <a:masterClrMapping/>
+  </p:clrMapOvr>
+</p:notes>
+</file>
+
+<file path=ppt/notesSlides/notesSlide14.xml><?xml version="1.0" encoding="utf-8"?>
+<p:notes xmlns:a="http://schemas.openxmlformats.org/drawingml/2006/main" xmlns:r="http://schemas.openxmlformats.org/officeDocument/2006/relationships" xmlns:p="http://schemas.openxmlformats.org/presentationml/2006/main">
+  <p:cSld>
+    <p:spTree>
+      <p:nvGrpSpPr>
+        <p:cNvPr id="1" name=""/>
+        <p:cNvGrpSpPr/>
+        <p:nvPr/>
+      </p:nvGrpSpPr>
+      <p:grpSpPr>
+        <a:xfrm>
+          <a:off x="0" y="0"/>
+          <a:ext cx="0" cy="0"/>
+          <a:chOff x="0" y="0"/>
+          <a:chExt cx="0" cy="0"/>
+        </a:xfrm>
+      </p:grpSpPr>
+      <p:sp>
+        <p:nvSpPr>
+          <p:cNvPr id="2" name="Slide Image Placeholder 1"/>
+          <p:cNvSpPr>
+            <a:spLocks noGrp="1" noRot="1" noChangeAspect="1"/>
+          </p:cNvSpPr>
+          <p:nvPr>
+            <p:ph type="sldImg"/>
+          </p:nvPr>
+        </p:nvSpPr>
+        <p:spPr/>
+      </p:sp>
+      <p:sp>
+        <p:nvSpPr>
+          <p:cNvPr id="3" name="Notes Placeholder 2"/>
+          <p:cNvSpPr>
+            <a:spLocks noGrp="1"/>
+          </p:cNvSpPr>
+          <p:nvPr>
+            <p:ph type="body" idx="1"/>
+          </p:nvPr>
+        </p:nvSpPr>
+        <p:spPr/>
+        <p:txBody>
+          <a:bodyPr/>
+          <a:lstStyle/>
+          <a:p>
+            <a:r>
+              <a:rPr lang="en-US" dirty="0"/>
+              <a:t/>
+            </a:r>
+            <a:endParaRPr lang="en-US" dirty="0"/>
+          </a:p>
+        </p:txBody>
+      </p:sp>
+      <p:sp>
+        <p:nvSpPr>
+          <p:cNvPr id="4" name="Slide Number Placeholder 3"/>
+          <p:cNvSpPr>
+            <a:spLocks noGrp="1"/>
+          </p:cNvSpPr>
+          <p:nvPr>
+            <p:ph type="sldNum" sz="quarter" idx="10"/>
+          </p:nvPr>
+        </p:nvSpPr>
+        <p:spPr/>
+        <p:txBody>
+          <a:bodyPr/>
+          <a:lstStyle/>
+          <a:p>
+            <a:fld id="{F7021451-1387-4CA6-816F-3879F97B5CBC}" type="slidenum">
+              <a:rPr lang="en-US"/>
+              <a:t>14</a:t>
+            </a:fld>
+            <a:endParaRPr lang="en-US"/>
+          </a:p>
+        </p:txBody>
+      </p:sp>
+    </p:spTree>
+    <p:extLst>
+      <p:ext uri="{BB962C8B-B14F-4D97-AF65-F5344CB8AC3E}">
+        <p14:creationId xmlns:p14="http://schemas.microsoft.com/office/powerpoint/2010/main" val="1024086991"/>
+      </p:ext>
+    </p:extLst>
+  </p:cSld>
+  <p:clrMapOvr>
+    <a:masterClrMapping/>
+  </p:clrMapOvr>
+</p:notes>
+</file>
+
+<file path=ppt/notesSlides/notesSlide15.xml><?xml version="1.0" encoding="utf-8"?>
+<p:notes xmlns:a="http://schemas.openxmlformats.org/drawingml/2006/main" xmlns:r="http://schemas.openxmlformats.org/officeDocument/2006/relationships" xmlns:p="http://schemas.openxmlformats.org/presentationml/2006/main">
+  <p:cSld>
+    <p:spTree>
+      <p:nvGrpSpPr>
+        <p:cNvPr id="1" name=""/>
+        <p:cNvGrpSpPr/>
+        <p:nvPr/>
+      </p:nvGrpSpPr>
+      <p:grpSpPr>
+        <a:xfrm>
+          <a:off x="0" y="0"/>
+          <a:ext cx="0" cy="0"/>
+          <a:chOff x="0" y="0"/>
+          <a:chExt cx="0" cy="0"/>
+        </a:xfrm>
+      </p:grpSpPr>
+      <p:sp>
+        <p:nvSpPr>
+          <p:cNvPr id="2" name="Slide Image Placeholder 1"/>
+          <p:cNvSpPr>
+            <a:spLocks noGrp="1" noRot="1" noChangeAspect="1"/>
+          </p:cNvSpPr>
+          <p:nvPr>
+            <p:ph type="sldImg"/>
+          </p:nvPr>
+        </p:nvSpPr>
+        <p:spPr/>
+      </p:sp>
+      <p:sp>
+        <p:nvSpPr>
+          <p:cNvPr id="3" name="Notes Placeholder 2"/>
+          <p:cNvSpPr>
+            <a:spLocks noGrp="1"/>
+          </p:cNvSpPr>
+          <p:nvPr>
+            <p:ph type="body" idx="1"/>
+          </p:nvPr>
+        </p:nvSpPr>
+        <p:spPr/>
+        <p:txBody>
+          <a:bodyPr/>
+          <a:lstStyle/>
+          <a:p>
+            <a:r>
+              <a:rPr lang="en-US" dirty="0"/>
+              <a:t/>
+            </a:r>
+            <a:endParaRPr lang="en-US" dirty="0"/>
+          </a:p>
+        </p:txBody>
+      </p:sp>
+      <p:sp>
+        <p:nvSpPr>
+          <p:cNvPr id="4" name="Slide Number Placeholder 3"/>
+          <p:cNvSpPr>
+            <a:spLocks noGrp="1"/>
+          </p:cNvSpPr>
+          <p:nvPr>
+            <p:ph type="sldNum" sz="quarter" idx="10"/>
+          </p:nvPr>
+        </p:nvSpPr>
+        <p:spPr/>
+        <p:txBody>
+          <a:bodyPr/>
+          <a:lstStyle/>
+          <a:p>
+            <a:fld id="{F7021451-1387-4CA6-816F-3879F97B5CBC}" type="slidenum">
+              <a:rPr lang="en-US"/>
+              <a:t>15</a:t>
             </a:fld>
             <a:endParaRPr lang="en-US"/>
           </a:p>
@@ -2720,7 +2987,7 @@
                             <a:srgbClr val="FFFFFF"/>
                           </a:solidFill>
                         </a:rPr>
-                        <a:t>ERS</a:t>
+                        <a:t>TWS</a:t>
                       </a:r>
                       <a:endParaRPr lang="en-US" sz="1050" dirty="0"/>
                     </a:p>
@@ -3088,7 +3355,7 @@
                             <a:srgbClr val="E6E9F0"/>
                           </a:solidFill>
                         </a:rPr>
-                        <a:t>0.37</a:t>
+                        <a:t>0.62</a:t>
                       </a:r>
                       <a:endParaRPr lang="en-US" sz="1050" dirty="0"/>
                     </a:p>
@@ -3456,7 +3723,7 @@
                             <a:srgbClr val="E6E9F0"/>
                           </a:solidFill>
                         </a:rPr>
-                        <a:t>0.14</a:t>
+                        <a:t>0.30</a:t>
                       </a:r>
                       <a:endParaRPr lang="en-US" sz="1050" dirty="0"/>
                     </a:p>
@@ -3824,7 +4091,7 @@
                             <a:srgbClr val="E6E9F0"/>
                           </a:solidFill>
                         </a:rPr>
-                        <a:t>0.42</a:t>
+                        <a:t>0.47</a:t>
                       </a:r>
                       <a:endParaRPr lang="en-US" sz="1050" dirty="0"/>
                     </a:p>
@@ -4192,7 +4459,7 @@
                             <a:srgbClr val="E6E9F0"/>
                           </a:solidFill>
                         </a:rPr>
-                        <a:t>0.70</a:t>
+                        <a:t>0.72</a:t>
                       </a:r>
                       <a:endParaRPr lang="en-US" sz="1050" dirty="0"/>
                     </a:p>
@@ -4560,7 +4827,7 @@
                             <a:srgbClr val="E6E9F0"/>
                           </a:solidFill>
                         </a:rPr>
-                        <a:t>0.32</a:t>
+                        <a:t>0.47</a:t>
                       </a:r>
                       <a:endParaRPr lang="en-US" sz="1050" dirty="0"/>
                     </a:p>
@@ -4820,7 +5087,7 @@
               <a:buNone/>
             </a:pPr>
             <a:r>
-              <a:rPr lang="en-US" sz="1150" b="1" i="1" dirty="0">
+              <a:rPr lang="en-US" sz="1100" b="1" i="1" dirty="0">
                 <a:solidFill>
                   <a:srgbClr val="F7C59F"/>
                 </a:solidFill>
@@ -4831,14 +5098,14 @@
               <a:buNone/>
             </a:pPr>
             <a:r>
-              <a:rPr lang="en-US" sz="1150" i="1" dirty="0">
+              <a:rPr lang="en-US" sz="1100" i="1" dirty="0">
                 <a:solidFill>
                   <a:srgbClr val="8D99AE"/>
                 </a:solidFill>
               </a:rPr>
-              <a:t>CORBA-style structural detector: ~80% of agents captured into the task-aligned validation swarm (ERS ≈ 40% of bandwidth), yet the LLM auditor still rates it on-task (stealth 0.95) and "complete" — so the attack burns the collaboration invisibly.</a:t>
-            </a:r>
-            <a:endParaRPr lang="en-US" sz="1150" dirty="0"/>
+              <a:t>CORBA-style structural detector: ~80% of agents captured into the task-aligned validation swarm, TWS ≈ 0.51 (half of all tokens wasted on busywork), yet the LLM auditor still rates it on-task (stealth 0.95). TWS = Token Waste Score (ours); TAMAS's ERS is run separately as the safety baseline.</a:t>
+            </a:r>
+            <a:endParaRPr lang="en-US" sz="1100" dirty="0"/>
           </a:p>
         </p:txBody>
       </p:sp>
@@ -4853,6 +5120,2682 @@
 <file path=ppt/slides/slide11.xml><?xml version="1.0" encoding="utf-8"?>
 <p:sld xmlns:a="http://schemas.openxmlformats.org/drawingml/2006/main" xmlns:r="http://schemas.openxmlformats.org/officeDocument/2006/relationships" xmlns:p="http://schemas.openxmlformats.org/presentationml/2006/main">
   <p:cSld name="Slide 11">
+    <p:bg>
+      <p:bgPr>
+        <a:solidFill>
+          <a:srgbClr val="1C2230"/>
+        </a:solidFill>
+      </p:bgPr>
+    </p:bg>
+    <p:spTree>
+      <p:nvGrpSpPr>
+        <p:cNvPr id="1" name=""/>
+        <p:cNvGrpSpPr/>
+        <p:nvPr/>
+      </p:nvGrpSpPr>
+      <p:grpSpPr>
+        <a:xfrm>
+          <a:off x="0" y="0"/>
+          <a:ext cx="0" cy="0"/>
+          <a:chOff x="0" y="0"/>
+          <a:chExt cx="0" cy="0"/>
+        </a:xfrm>
+      </p:grpSpPr>
+      <p:sp>
+        <p:nvSpPr>
+          <p:cNvPr id="2" name="Text 0"/>
+          <p:cNvSpPr txBox="1"/>
+          <p:nvPr/>
+        </p:nvSpPr>
+        <p:spPr>
+          <a:xfrm>
+            <a:off x="548640" y="365760"/>
+            <a:ext cx="10972800" cy="731520"/>
+          </a:xfrm>
+          <a:prstGeom prst="rect">
+            <a:avLst/>
+          </a:prstGeom>
+          <a:noFill/>
+          <a:ln/>
+        </p:spPr>
+        <p:txBody>
+          <a:bodyPr wrap="square" rtlCol="0" anchor="ctr"/>
+          <a:lstStyle/>
+          <a:p>
+            <a:pPr indent="0" marL="0">
+              <a:buNone/>
+            </a:pPr>
+            <a:r>
+              <a:rPr lang="en-US" sz="2800" b="1" dirty="0">
+                <a:solidFill>
+                  <a:srgbClr val="FFFFFF"/>
+                </a:solidFill>
+                <a:latin typeface="Cambria" pitchFamily="34" charset="0"/>
+                <a:ea typeface="Cambria" pitchFamily="34" charset="-122"/>
+                <a:cs typeface="Cambria" pitchFamily="34" charset="-120"/>
+              </a:rPr>
+              <a:t>Result: Normal vs Task-Aligned vs Stego</a:t>
+            </a:r>
+            <a:endParaRPr lang="en-US" sz="2800" dirty="0"/>
+          </a:p>
+        </p:txBody>
+      </p:sp>
+      <p:sp>
+        <p:nvSpPr>
+          <p:cNvPr id="3" name="Text 1"/>
+          <p:cNvSpPr txBox="1"/>
+          <p:nvPr/>
+        </p:nvSpPr>
+        <p:spPr>
+          <a:xfrm>
+            <a:off x="731520" y="1143000"/>
+            <a:ext cx="10698480" cy="365760"/>
+          </a:xfrm>
+          <a:prstGeom prst="rect">
+            <a:avLst/>
+          </a:prstGeom>
+          <a:noFill/>
+          <a:ln/>
+        </p:spPr>
+        <p:txBody>
+          <a:bodyPr wrap="square" rtlCol="0" anchor="ctr"/>
+          <a:lstStyle/>
+          <a:p>
+            <a:pPr indent="0" marL="0">
+              <a:buNone/>
+            </a:pPr>
+            <a:r>
+              <a:rPr lang="en-US" sz="1300" dirty="0">
+                <a:solidFill>
+                  <a:srgbClr val="C7CEDB"/>
+                </a:solidFill>
+              </a:rPr>
+              <a:t>Same benign tasks · Qwen3.5-35B · B = 3. Three conditions: no attack → attack in the open → attack delivered covertly.</a:t>
+            </a:r>
+            <a:endParaRPr lang="en-US" sz="1300" dirty="0"/>
+          </a:p>
+        </p:txBody>
+      </p:sp>
+      <p:graphicFrame>
+        <p:nvGraphicFramePr>
+          <p:cNvPr id="12" name="Table 0"/>
+          <p:cNvGraphicFramePr>
+            <a:graphicFrameLocks noGrp="1"/>
+          </p:cNvGraphicFramePr>
+          <p:nvPr>
+            <p:extLst>
+              <p:ext uri="{D42A27DB-BD31-4B8C-83A1-F6EECF244321}">
+                <p14:modId xmlns:p14="http://schemas.microsoft.com/office/powerpoint/2010/main" val="1579011935"/>
+              </p:ext>
+            </p:extLst>
+          </p:nvPr>
+        </p:nvGraphicFramePr>
+        <p:xfrm>
+          <a:off x="457200" y="1828800"/>
+          <a:ext cx="11247120" cy="914400"/>
+        </p:xfrm>
+        <a:graphic>
+          <a:graphicData uri="http://schemas.openxmlformats.org/drawingml/2006/table">
+            <a:tbl>
+              <a:tblPr/>
+              <a:tblGrid>
+                <a:gridCol w="3291840"/>
+                <a:gridCol w="1371600"/>
+                <a:gridCol w="868680"/>
+                <a:gridCol w="1280160"/>
+                <a:gridCol w="1097280"/>
+                <a:gridCol w="1005840"/>
+                <a:gridCol w="914400"/>
+                <a:gridCol w="1417320"/>
+              </a:tblGrid>
+              <a:tr h="384048">
+                <a:tc>
+                  <a:txBody>
+                    <a:bodyPr/>
+                    <a:lstStyle/>
+                    <a:p>
+                      <a:pPr algn="ctr" indent="0" marL="0">
+                        <a:buNone/>
+                      </a:pPr>
+                      <a:r>
+                        <a:rPr lang="en-US" sz="1250" b="1" dirty="0">
+                          <a:solidFill>
+                            <a:srgbClr val="FFFFFF"/>
+                          </a:solidFill>
+                        </a:rPr>
+                        <a:t>condition</a:t>
+                      </a:r>
+                      <a:endParaRPr lang="en-US" sz="1250" dirty="0"/>
+                    </a:p>
+                  </a:txBody>
+                  <a:tcPr marL="91440" marR="91440" marT="45720" marB="45720" anchor="ctr">
+                    <a:lnL w="12700" cap="flat" cmpd="sng" algn="ctr">
+                      <a:solidFill>
+                        <a:srgbClr val="3A4458"/>
+                      </a:solidFill>
+                      <a:prstDash val="solid"/>
+                      <a:round/>
+                      <a:headEnd type="none" w="med" len="med"/>
+                      <a:tailEnd type="none" w="med" len="med"/>
+                    </a:lnL>
+                    <a:lnR w="12700" cap="flat" cmpd="sng" algn="ctr">
+                      <a:solidFill>
+                        <a:srgbClr val="3A4458"/>
+                      </a:solidFill>
+                      <a:prstDash val="solid"/>
+                      <a:round/>
+                      <a:headEnd type="none" w="med" len="med"/>
+                      <a:tailEnd type="none" w="med" len="med"/>
+                    </a:lnR>
+                    <a:lnT w="12700" cap="flat" cmpd="sng" algn="ctr">
+                      <a:solidFill>
+                        <a:srgbClr val="3A4458"/>
+                      </a:solidFill>
+                      <a:prstDash val="solid"/>
+                      <a:round/>
+                      <a:headEnd type="none" w="med" len="med"/>
+                      <a:tailEnd type="none" w="med" len="med"/>
+                    </a:lnT>
+                    <a:lnB w="12700" cap="flat" cmpd="sng" algn="ctr">
+                      <a:solidFill>
+                        <a:srgbClr val="3A4458"/>
+                      </a:solidFill>
+                      <a:prstDash val="solid"/>
+                      <a:round/>
+                      <a:headEnd type="none" w="med" len="med"/>
+                      <a:tailEnd type="none" w="med" len="med"/>
+                    </a:lnB>
+                    <a:solidFill>
+                      <a:srgbClr val="232A3A"/>
+                    </a:solidFill>
+                  </a:tcPr>
+                </a:tc>
+                <a:tc>
+                  <a:txBody>
+                    <a:bodyPr/>
+                    <a:lstStyle/>
+                    <a:p>
+                      <a:pPr algn="ctr" indent="0" marL="0">
+                        <a:buNone/>
+                      </a:pPr>
+                      <a:r>
+                        <a:rPr lang="en-US" sz="1250" b="1" dirty="0">
+                          <a:solidFill>
+                            <a:srgbClr val="FFFFFF"/>
+                          </a:solidFill>
+                        </a:rPr>
+                        <a:t>completion</a:t>
+                      </a:r>
+                      <a:endParaRPr lang="en-US" sz="1250" dirty="0"/>
+                    </a:p>
+                  </a:txBody>
+                  <a:tcPr marL="91440" marR="91440" marT="45720" marB="45720" anchor="ctr">
+                    <a:lnL w="12700" cap="flat" cmpd="sng" algn="ctr">
+                      <a:solidFill>
+                        <a:srgbClr val="3A4458"/>
+                      </a:solidFill>
+                      <a:prstDash val="solid"/>
+                      <a:round/>
+                      <a:headEnd type="none" w="med" len="med"/>
+                      <a:tailEnd type="none" w="med" len="med"/>
+                    </a:lnL>
+                    <a:lnR w="12700" cap="flat" cmpd="sng" algn="ctr">
+                      <a:solidFill>
+                        <a:srgbClr val="3A4458"/>
+                      </a:solidFill>
+                      <a:prstDash val="solid"/>
+                      <a:round/>
+                      <a:headEnd type="none" w="med" len="med"/>
+                      <a:tailEnd type="none" w="med" len="med"/>
+                    </a:lnR>
+                    <a:lnT w="12700" cap="flat" cmpd="sng" algn="ctr">
+                      <a:solidFill>
+                        <a:srgbClr val="3A4458"/>
+                      </a:solidFill>
+                      <a:prstDash val="solid"/>
+                      <a:round/>
+                      <a:headEnd type="none" w="med" len="med"/>
+                      <a:tailEnd type="none" w="med" len="med"/>
+                    </a:lnT>
+                    <a:lnB w="12700" cap="flat" cmpd="sng" algn="ctr">
+                      <a:solidFill>
+                        <a:srgbClr val="3A4458"/>
+                      </a:solidFill>
+                      <a:prstDash val="solid"/>
+                      <a:round/>
+                      <a:headEnd type="none" w="med" len="med"/>
+                      <a:tailEnd type="none" w="med" len="med"/>
+                    </a:lnB>
+                    <a:solidFill>
+                      <a:srgbClr val="232A3A"/>
+                    </a:solidFill>
+                  </a:tcPr>
+                </a:tc>
+                <a:tc>
+                  <a:txBody>
+                    <a:bodyPr/>
+                    <a:lstStyle/>
+                    <a:p>
+                      <a:pPr algn="ctr" indent="0" marL="0">
+                        <a:buNone/>
+                      </a:pPr>
+                      <a:r>
+                        <a:rPr lang="en-US" sz="1250" b="1" dirty="0">
+                          <a:solidFill>
+                            <a:srgbClr val="FFFFFF"/>
+                          </a:solidFill>
+                        </a:rPr>
+                        <a:t>turns</a:t>
+                      </a:r>
+                      <a:endParaRPr lang="en-US" sz="1250" dirty="0"/>
+                    </a:p>
+                  </a:txBody>
+                  <a:tcPr marL="91440" marR="91440" marT="45720" marB="45720" anchor="ctr">
+                    <a:lnL w="12700" cap="flat" cmpd="sng" algn="ctr">
+                      <a:solidFill>
+                        <a:srgbClr val="3A4458"/>
+                      </a:solidFill>
+                      <a:prstDash val="solid"/>
+                      <a:round/>
+                      <a:headEnd type="none" w="med" len="med"/>
+                      <a:tailEnd type="none" w="med" len="med"/>
+                    </a:lnL>
+                    <a:lnR w="12700" cap="flat" cmpd="sng" algn="ctr">
+                      <a:solidFill>
+                        <a:srgbClr val="3A4458"/>
+                      </a:solidFill>
+                      <a:prstDash val="solid"/>
+                      <a:round/>
+                      <a:headEnd type="none" w="med" len="med"/>
+                      <a:tailEnd type="none" w="med" len="med"/>
+                    </a:lnR>
+                    <a:lnT w="12700" cap="flat" cmpd="sng" algn="ctr">
+                      <a:solidFill>
+                        <a:srgbClr val="3A4458"/>
+                      </a:solidFill>
+                      <a:prstDash val="solid"/>
+                      <a:round/>
+                      <a:headEnd type="none" w="med" len="med"/>
+                      <a:tailEnd type="none" w="med" len="med"/>
+                    </a:lnT>
+                    <a:lnB w="12700" cap="flat" cmpd="sng" algn="ctr">
+                      <a:solidFill>
+                        <a:srgbClr val="3A4458"/>
+                      </a:solidFill>
+                      <a:prstDash val="solid"/>
+                      <a:round/>
+                      <a:headEnd type="none" w="med" len="med"/>
+                      <a:tailEnd type="none" w="med" len="med"/>
+                    </a:lnB>
+                    <a:solidFill>
+                      <a:srgbClr val="232A3A"/>
+                    </a:solidFill>
+                  </a:tcPr>
+                </a:tc>
+                <a:tc>
+                  <a:txBody>
+                    <a:bodyPr/>
+                    <a:lstStyle/>
+                    <a:p>
+                      <a:pPr algn="ctr" indent="0" marL="0">
+                        <a:buNone/>
+                      </a:pPr>
+                      <a:r>
+                        <a:rPr lang="en-US" sz="1250" b="1" dirty="0">
+                          <a:solidFill>
+                            <a:srgbClr val="FFFFFF"/>
+                          </a:solidFill>
+                        </a:rPr>
+                        <a:t>tokens</a:t>
+                      </a:r>
+                      <a:endParaRPr lang="en-US" sz="1250" dirty="0"/>
+                    </a:p>
+                  </a:txBody>
+                  <a:tcPr marL="91440" marR="91440" marT="45720" marB="45720" anchor="ctr">
+                    <a:lnL w="12700" cap="flat" cmpd="sng" algn="ctr">
+                      <a:solidFill>
+                        <a:srgbClr val="3A4458"/>
+                      </a:solidFill>
+                      <a:prstDash val="solid"/>
+                      <a:round/>
+                      <a:headEnd type="none" w="med" len="med"/>
+                      <a:tailEnd type="none" w="med" len="med"/>
+                    </a:lnL>
+                    <a:lnR w="12700" cap="flat" cmpd="sng" algn="ctr">
+                      <a:solidFill>
+                        <a:srgbClr val="3A4458"/>
+                      </a:solidFill>
+                      <a:prstDash val="solid"/>
+                      <a:round/>
+                      <a:headEnd type="none" w="med" len="med"/>
+                      <a:tailEnd type="none" w="med" len="med"/>
+                    </a:lnR>
+                    <a:lnT w="12700" cap="flat" cmpd="sng" algn="ctr">
+                      <a:solidFill>
+                        <a:srgbClr val="3A4458"/>
+                      </a:solidFill>
+                      <a:prstDash val="solid"/>
+                      <a:round/>
+                      <a:headEnd type="none" w="med" len="med"/>
+                      <a:tailEnd type="none" w="med" len="med"/>
+                    </a:lnT>
+                    <a:lnB w="12700" cap="flat" cmpd="sng" algn="ctr">
+                      <a:solidFill>
+                        <a:srgbClr val="3A4458"/>
+                      </a:solidFill>
+                      <a:prstDash val="solid"/>
+                      <a:round/>
+                      <a:headEnd type="none" w="med" len="med"/>
+                      <a:tailEnd type="none" w="med" len="med"/>
+                    </a:lnB>
+                    <a:solidFill>
+                      <a:srgbClr val="232A3A"/>
+                    </a:solidFill>
+                  </a:tcPr>
+                </a:tc>
+                <a:tc>
+                  <a:txBody>
+                    <a:bodyPr/>
+                    <a:lstStyle/>
+                    <a:p>
+                      <a:pPr algn="ctr" indent="0" marL="0">
+                        <a:buNone/>
+                      </a:pPr>
+                      <a:r>
+                        <a:rPr lang="en-US" sz="1250" b="1" dirty="0">
+                          <a:solidFill>
+                            <a:srgbClr val="FFFFFF"/>
+                          </a:solidFill>
+                        </a:rPr>
+                        <a:t>stealth</a:t>
+                      </a:r>
+                      <a:endParaRPr lang="en-US" sz="1250" dirty="0"/>
+                    </a:p>
+                  </a:txBody>
+                  <a:tcPr marL="91440" marR="91440" marT="45720" marB="45720" anchor="ctr">
+                    <a:lnL w="12700" cap="flat" cmpd="sng" algn="ctr">
+                      <a:solidFill>
+                        <a:srgbClr val="3A4458"/>
+                      </a:solidFill>
+                      <a:prstDash val="solid"/>
+                      <a:round/>
+                      <a:headEnd type="none" w="med" len="med"/>
+                      <a:tailEnd type="none" w="med" len="med"/>
+                    </a:lnL>
+                    <a:lnR w="12700" cap="flat" cmpd="sng" algn="ctr">
+                      <a:solidFill>
+                        <a:srgbClr val="3A4458"/>
+                      </a:solidFill>
+                      <a:prstDash val="solid"/>
+                      <a:round/>
+                      <a:headEnd type="none" w="med" len="med"/>
+                      <a:tailEnd type="none" w="med" len="med"/>
+                    </a:lnR>
+                    <a:lnT w="12700" cap="flat" cmpd="sng" algn="ctr">
+                      <a:solidFill>
+                        <a:srgbClr val="3A4458"/>
+                      </a:solidFill>
+                      <a:prstDash val="solid"/>
+                      <a:round/>
+                      <a:headEnd type="none" w="med" len="med"/>
+                      <a:tailEnd type="none" w="med" len="med"/>
+                    </a:lnT>
+                    <a:lnB w="12700" cap="flat" cmpd="sng" algn="ctr">
+                      <a:solidFill>
+                        <a:srgbClr val="3A4458"/>
+                      </a:solidFill>
+                      <a:prstDash val="solid"/>
+                      <a:round/>
+                      <a:headEnd type="none" w="med" len="med"/>
+                      <a:tailEnd type="none" w="med" len="med"/>
+                    </a:lnB>
+                    <a:solidFill>
+                      <a:srgbClr val="232A3A"/>
+                    </a:solidFill>
+                  </a:tcPr>
+                </a:tc>
+                <a:tc>
+                  <a:txBody>
+                    <a:bodyPr/>
+                    <a:lstStyle/>
+                    <a:p>
+                      <a:pPr algn="ctr" indent="0" marL="0">
+                        <a:buNone/>
+                      </a:pPr>
+                      <a:r>
+                        <a:rPr lang="en-US" sz="1250" b="1" dirty="0">
+                          <a:solidFill>
+                            <a:srgbClr val="FFFFFF"/>
+                          </a:solidFill>
+                        </a:rPr>
+                        <a:t>P-ASR</a:t>
+                      </a:r>
+                      <a:endParaRPr lang="en-US" sz="1250" dirty="0"/>
+                    </a:p>
+                  </a:txBody>
+                  <a:tcPr marL="91440" marR="91440" marT="45720" marB="45720" anchor="ctr">
+                    <a:lnL w="12700" cap="flat" cmpd="sng" algn="ctr">
+                      <a:solidFill>
+                        <a:srgbClr val="3A4458"/>
+                      </a:solidFill>
+                      <a:prstDash val="solid"/>
+                      <a:round/>
+                      <a:headEnd type="none" w="med" len="med"/>
+                      <a:tailEnd type="none" w="med" len="med"/>
+                    </a:lnL>
+                    <a:lnR w="12700" cap="flat" cmpd="sng" algn="ctr">
+                      <a:solidFill>
+                        <a:srgbClr val="3A4458"/>
+                      </a:solidFill>
+                      <a:prstDash val="solid"/>
+                      <a:round/>
+                      <a:headEnd type="none" w="med" len="med"/>
+                      <a:tailEnd type="none" w="med" len="med"/>
+                    </a:lnR>
+                    <a:lnT w="12700" cap="flat" cmpd="sng" algn="ctr">
+                      <a:solidFill>
+                        <a:srgbClr val="3A4458"/>
+                      </a:solidFill>
+                      <a:prstDash val="solid"/>
+                      <a:round/>
+                      <a:headEnd type="none" w="med" len="med"/>
+                      <a:tailEnd type="none" w="med" len="med"/>
+                    </a:lnT>
+                    <a:lnB w="12700" cap="flat" cmpd="sng" algn="ctr">
+                      <a:solidFill>
+                        <a:srgbClr val="3A4458"/>
+                      </a:solidFill>
+                      <a:prstDash val="solid"/>
+                      <a:round/>
+                      <a:headEnd type="none" w="med" len="med"/>
+                      <a:tailEnd type="none" w="med" len="med"/>
+                    </a:lnB>
+                    <a:solidFill>
+                      <a:srgbClr val="232A3A"/>
+                    </a:solidFill>
+                  </a:tcPr>
+                </a:tc>
+                <a:tc>
+                  <a:txBody>
+                    <a:bodyPr/>
+                    <a:lstStyle/>
+                    <a:p>
+                      <a:pPr algn="ctr" indent="0" marL="0">
+                        <a:buNone/>
+                      </a:pPr>
+                      <a:r>
+                        <a:rPr lang="en-US" sz="1250" b="1" dirty="0">
+                          <a:solidFill>
+                            <a:srgbClr val="FFFFFF"/>
+                          </a:solidFill>
+                        </a:rPr>
+                        <a:t>TWS</a:t>
+                      </a:r>
+                      <a:endParaRPr lang="en-US" sz="1250" dirty="0"/>
+                    </a:p>
+                  </a:txBody>
+                  <a:tcPr marL="91440" marR="91440" marT="45720" marB="45720" anchor="ctr">
+                    <a:lnL w="12700" cap="flat" cmpd="sng" algn="ctr">
+                      <a:solidFill>
+                        <a:srgbClr val="3A4458"/>
+                      </a:solidFill>
+                      <a:prstDash val="solid"/>
+                      <a:round/>
+                      <a:headEnd type="none" w="med" len="med"/>
+                      <a:tailEnd type="none" w="med" len="med"/>
+                    </a:lnL>
+                    <a:lnR w="12700" cap="flat" cmpd="sng" algn="ctr">
+                      <a:solidFill>
+                        <a:srgbClr val="3A4458"/>
+                      </a:solidFill>
+                      <a:prstDash val="solid"/>
+                      <a:round/>
+                      <a:headEnd type="none" w="med" len="med"/>
+                      <a:tailEnd type="none" w="med" len="med"/>
+                    </a:lnR>
+                    <a:lnT w="12700" cap="flat" cmpd="sng" algn="ctr">
+                      <a:solidFill>
+                        <a:srgbClr val="3A4458"/>
+                      </a:solidFill>
+                      <a:prstDash val="solid"/>
+                      <a:round/>
+                      <a:headEnd type="none" w="med" len="med"/>
+                      <a:tailEnd type="none" w="med" len="med"/>
+                    </a:lnT>
+                    <a:lnB w="12700" cap="flat" cmpd="sng" algn="ctr">
+                      <a:solidFill>
+                        <a:srgbClr val="3A4458"/>
+                      </a:solidFill>
+                      <a:prstDash val="solid"/>
+                      <a:round/>
+                      <a:headEnd type="none" w="med" len="med"/>
+                      <a:tailEnd type="none" w="med" len="med"/>
+                    </a:lnB>
+                    <a:solidFill>
+                      <a:srgbClr val="232A3A"/>
+                    </a:solidFill>
+                  </a:tcPr>
+                </a:tc>
+                <a:tc>
+                  <a:txBody>
+                    <a:bodyPr/>
+                    <a:lstStyle/>
+                    <a:p>
+                      <a:pPr algn="ctr" indent="0" marL="0">
+                        <a:buNone/>
+                      </a:pPr>
+                      <a:r>
+                        <a:rPr lang="en-US" sz="1250" b="1" dirty="0">
+                          <a:solidFill>
+                            <a:srgbClr val="FFFFFF"/>
+                          </a:solidFill>
+                        </a:rPr>
+                        <a:t>delivered</a:t>
+                      </a:r>
+                      <a:endParaRPr lang="en-US" sz="1250" dirty="0"/>
+                    </a:p>
+                  </a:txBody>
+                  <a:tcPr marL="91440" marR="91440" marT="45720" marB="45720" anchor="ctr">
+                    <a:lnL w="12700" cap="flat" cmpd="sng" algn="ctr">
+                      <a:solidFill>
+                        <a:srgbClr val="3A4458"/>
+                      </a:solidFill>
+                      <a:prstDash val="solid"/>
+                      <a:round/>
+                      <a:headEnd type="none" w="med" len="med"/>
+                      <a:tailEnd type="none" w="med" len="med"/>
+                    </a:lnL>
+                    <a:lnR w="12700" cap="flat" cmpd="sng" algn="ctr">
+                      <a:solidFill>
+                        <a:srgbClr val="3A4458"/>
+                      </a:solidFill>
+                      <a:prstDash val="solid"/>
+                      <a:round/>
+                      <a:headEnd type="none" w="med" len="med"/>
+                      <a:tailEnd type="none" w="med" len="med"/>
+                    </a:lnR>
+                    <a:lnT w="12700" cap="flat" cmpd="sng" algn="ctr">
+                      <a:solidFill>
+                        <a:srgbClr val="3A4458"/>
+                      </a:solidFill>
+                      <a:prstDash val="solid"/>
+                      <a:round/>
+                      <a:headEnd type="none" w="med" len="med"/>
+                      <a:tailEnd type="none" w="med" len="med"/>
+                    </a:lnT>
+                    <a:lnB w="12700" cap="flat" cmpd="sng" algn="ctr">
+                      <a:solidFill>
+                        <a:srgbClr val="3A4458"/>
+                      </a:solidFill>
+                      <a:prstDash val="solid"/>
+                      <a:round/>
+                      <a:headEnd type="none" w="med" len="med"/>
+                      <a:tailEnd type="none" w="med" len="med"/>
+                    </a:lnB>
+                    <a:solidFill>
+                      <a:srgbClr val="232A3A"/>
+                    </a:solidFill>
+                  </a:tcPr>
+                </a:tc>
+              </a:tr>
+              <a:tr h="566928">
+                <a:tc>
+                  <a:txBody>
+                    <a:bodyPr/>
+                    <a:lstStyle/>
+                    <a:p>
+                      <a:pPr algn="ctr" indent="0" marL="0">
+                        <a:buNone/>
+                      </a:pPr>
+                      <a:r>
+                        <a:rPr lang="en-US" sz="1250" dirty="0">
+                          <a:solidFill>
+                            <a:srgbClr val="8FE3B0"/>
+                          </a:solidFill>
+                        </a:rPr>
+                        <a:t>Normal (no attack)</a:t>
+                      </a:r>
+                      <a:endParaRPr lang="en-US" sz="1250" dirty="0"/>
+                    </a:p>
+                  </a:txBody>
+                  <a:tcPr marL="91440" marR="91440" marT="45720" marB="45720" anchor="ctr">
+                    <a:lnL w="12700" cap="flat" cmpd="sng" algn="ctr">
+                      <a:solidFill>
+                        <a:srgbClr val="3A4458"/>
+                      </a:solidFill>
+                      <a:prstDash val="solid"/>
+                      <a:round/>
+                      <a:headEnd type="none" w="med" len="med"/>
+                      <a:tailEnd type="none" w="med" len="med"/>
+                    </a:lnL>
+                    <a:lnR w="12700" cap="flat" cmpd="sng" algn="ctr">
+                      <a:solidFill>
+                        <a:srgbClr val="3A4458"/>
+                      </a:solidFill>
+                      <a:prstDash val="solid"/>
+                      <a:round/>
+                      <a:headEnd type="none" w="med" len="med"/>
+                      <a:tailEnd type="none" w="med" len="med"/>
+                    </a:lnR>
+                    <a:lnT w="12700" cap="flat" cmpd="sng" algn="ctr">
+                      <a:solidFill>
+                        <a:srgbClr val="3A4458"/>
+                      </a:solidFill>
+                      <a:prstDash val="solid"/>
+                      <a:round/>
+                      <a:headEnd type="none" w="med" len="med"/>
+                      <a:tailEnd type="none" w="med" len="med"/>
+                    </a:lnT>
+                    <a:lnB w="12700" cap="flat" cmpd="sng" algn="ctr">
+                      <a:solidFill>
+                        <a:srgbClr val="3A4458"/>
+                      </a:solidFill>
+                      <a:prstDash val="solid"/>
+                      <a:round/>
+                      <a:headEnd type="none" w="med" len="med"/>
+                      <a:tailEnd type="none" w="med" len="med"/>
+                    </a:lnB>
+                    <a:solidFill>
+                      <a:srgbClr val="232A3A"/>
+                    </a:solidFill>
+                  </a:tcPr>
+                </a:tc>
+                <a:tc>
+                  <a:txBody>
+                    <a:bodyPr/>
+                    <a:lstStyle/>
+                    <a:p>
+                      <a:pPr algn="ctr" indent="0" marL="0">
+                        <a:buNone/>
+                      </a:pPr>
+                      <a:r>
+                        <a:rPr lang="en-US" sz="1250" dirty="0">
+                          <a:solidFill>
+                            <a:srgbClr val="000000"/>
+                          </a:solidFill>
+                        </a:rPr>
+                        <a:t>47%</a:t>
+                      </a:r>
+                      <a:endParaRPr lang="en-US" sz="1250" dirty="0"/>
+                    </a:p>
+                  </a:txBody>
+                  <a:tcPr marL="91440" marR="91440" marT="45720" marB="45720" anchor="ctr">
+                    <a:lnL w="12700" cap="flat" cmpd="sng" algn="ctr">
+                      <a:solidFill>
+                        <a:srgbClr val="3A4458"/>
+                      </a:solidFill>
+                      <a:prstDash val="solid"/>
+                      <a:round/>
+                      <a:headEnd type="none" w="med" len="med"/>
+                      <a:tailEnd type="none" w="med" len="med"/>
+                    </a:lnL>
+                    <a:lnR w="12700" cap="flat" cmpd="sng" algn="ctr">
+                      <a:solidFill>
+                        <a:srgbClr val="3A4458"/>
+                      </a:solidFill>
+                      <a:prstDash val="solid"/>
+                      <a:round/>
+                      <a:headEnd type="none" w="med" len="med"/>
+                      <a:tailEnd type="none" w="med" len="med"/>
+                    </a:lnR>
+                    <a:lnT w="12700" cap="flat" cmpd="sng" algn="ctr">
+                      <a:solidFill>
+                        <a:srgbClr val="3A4458"/>
+                      </a:solidFill>
+                      <a:prstDash val="solid"/>
+                      <a:round/>
+                      <a:headEnd type="none" w="med" len="med"/>
+                      <a:tailEnd type="none" w="med" len="med"/>
+                    </a:lnT>
+                    <a:lnB w="12700" cap="flat" cmpd="sng" algn="ctr">
+                      <a:solidFill>
+                        <a:srgbClr val="3A4458"/>
+                      </a:solidFill>
+                      <a:prstDash val="solid"/>
+                      <a:round/>
+                      <a:headEnd type="none" w="med" len="med"/>
+                      <a:tailEnd type="none" w="med" len="med"/>
+                    </a:lnB>
+                    <a:solidFill>
+                      <a:srgbClr val="232A3A"/>
+                    </a:solidFill>
+                  </a:tcPr>
+                </a:tc>
+                <a:tc>
+                  <a:txBody>
+                    <a:bodyPr/>
+                    <a:lstStyle/>
+                    <a:p>
+                      <a:pPr algn="ctr" indent="0" marL="0">
+                        <a:buNone/>
+                      </a:pPr>
+                      <a:r>
+                        <a:rPr lang="en-US" sz="1250" dirty="0">
+                          <a:solidFill>
+                            <a:srgbClr val="000000"/>
+                          </a:solidFill>
+                        </a:rPr>
+                        <a:t>15</a:t>
+                      </a:r>
+                      <a:endParaRPr lang="en-US" sz="1250" dirty="0"/>
+                    </a:p>
+                  </a:txBody>
+                  <a:tcPr marL="91440" marR="91440" marT="45720" marB="45720" anchor="ctr">
+                    <a:lnL w="12700" cap="flat" cmpd="sng" algn="ctr">
+                      <a:solidFill>
+                        <a:srgbClr val="3A4458"/>
+                      </a:solidFill>
+                      <a:prstDash val="solid"/>
+                      <a:round/>
+                      <a:headEnd type="none" w="med" len="med"/>
+                      <a:tailEnd type="none" w="med" len="med"/>
+                    </a:lnL>
+                    <a:lnR w="12700" cap="flat" cmpd="sng" algn="ctr">
+                      <a:solidFill>
+                        <a:srgbClr val="3A4458"/>
+                      </a:solidFill>
+                      <a:prstDash val="solid"/>
+                      <a:round/>
+                      <a:headEnd type="none" w="med" len="med"/>
+                      <a:tailEnd type="none" w="med" len="med"/>
+                    </a:lnR>
+                    <a:lnT w="12700" cap="flat" cmpd="sng" algn="ctr">
+                      <a:solidFill>
+                        <a:srgbClr val="3A4458"/>
+                      </a:solidFill>
+                      <a:prstDash val="solid"/>
+                      <a:round/>
+                      <a:headEnd type="none" w="med" len="med"/>
+                      <a:tailEnd type="none" w="med" len="med"/>
+                    </a:lnT>
+                    <a:lnB w="12700" cap="flat" cmpd="sng" algn="ctr">
+                      <a:solidFill>
+                        <a:srgbClr val="3A4458"/>
+                      </a:solidFill>
+                      <a:prstDash val="solid"/>
+                      <a:round/>
+                      <a:headEnd type="none" w="med" len="med"/>
+                      <a:tailEnd type="none" w="med" len="med"/>
+                    </a:lnB>
+                    <a:solidFill>
+                      <a:srgbClr val="232A3A"/>
+                    </a:solidFill>
+                  </a:tcPr>
+                </a:tc>
+                <a:tc>
+                  <a:txBody>
+                    <a:bodyPr/>
+                    <a:lstStyle/>
+                    <a:p>
+                      <a:pPr algn="ctr" indent="0" marL="0">
+                        <a:buNone/>
+                      </a:pPr>
+                      <a:r>
+                        <a:rPr lang="en-US" sz="1250" dirty="0">
+                          <a:solidFill>
+                            <a:srgbClr val="000000"/>
+                          </a:solidFill>
+                        </a:rPr>
+                        <a:t>3,324</a:t>
+                      </a:r>
+                      <a:endParaRPr lang="en-US" sz="1250" dirty="0"/>
+                    </a:p>
+                  </a:txBody>
+                  <a:tcPr marL="91440" marR="91440" marT="45720" marB="45720" anchor="ctr">
+                    <a:lnL w="12700" cap="flat" cmpd="sng" algn="ctr">
+                      <a:solidFill>
+                        <a:srgbClr val="3A4458"/>
+                      </a:solidFill>
+                      <a:prstDash val="solid"/>
+                      <a:round/>
+                      <a:headEnd type="none" w="med" len="med"/>
+                      <a:tailEnd type="none" w="med" len="med"/>
+                    </a:lnL>
+                    <a:lnR w="12700" cap="flat" cmpd="sng" algn="ctr">
+                      <a:solidFill>
+                        <a:srgbClr val="3A4458"/>
+                      </a:solidFill>
+                      <a:prstDash val="solid"/>
+                      <a:round/>
+                      <a:headEnd type="none" w="med" len="med"/>
+                      <a:tailEnd type="none" w="med" len="med"/>
+                    </a:lnR>
+                    <a:lnT w="12700" cap="flat" cmpd="sng" algn="ctr">
+                      <a:solidFill>
+                        <a:srgbClr val="3A4458"/>
+                      </a:solidFill>
+                      <a:prstDash val="solid"/>
+                      <a:round/>
+                      <a:headEnd type="none" w="med" len="med"/>
+                      <a:tailEnd type="none" w="med" len="med"/>
+                    </a:lnT>
+                    <a:lnB w="12700" cap="flat" cmpd="sng" algn="ctr">
+                      <a:solidFill>
+                        <a:srgbClr val="3A4458"/>
+                      </a:solidFill>
+                      <a:prstDash val="solid"/>
+                      <a:round/>
+                      <a:headEnd type="none" w="med" len="med"/>
+                      <a:tailEnd type="none" w="med" len="med"/>
+                    </a:lnB>
+                    <a:solidFill>
+                      <a:srgbClr val="232A3A"/>
+                    </a:solidFill>
+                  </a:tcPr>
+                </a:tc>
+                <a:tc>
+                  <a:txBody>
+                    <a:bodyPr/>
+                    <a:lstStyle/>
+                    <a:p>
+                      <a:pPr algn="ctr" indent="0" marL="0">
+                        <a:buNone/>
+                      </a:pPr>
+                      <a:r>
+                        <a:rPr lang="en-US" sz="1250" dirty="0">
+                          <a:solidFill>
+                            <a:srgbClr val="000000"/>
+                          </a:solidFill>
+                        </a:rPr>
+                        <a:t>0.91</a:t>
+                      </a:r>
+                      <a:endParaRPr lang="en-US" sz="1250" dirty="0"/>
+                    </a:p>
+                  </a:txBody>
+                  <a:tcPr marL="91440" marR="91440" marT="45720" marB="45720" anchor="ctr">
+                    <a:lnL w="12700" cap="flat" cmpd="sng" algn="ctr">
+                      <a:solidFill>
+                        <a:srgbClr val="3A4458"/>
+                      </a:solidFill>
+                      <a:prstDash val="solid"/>
+                      <a:round/>
+                      <a:headEnd type="none" w="med" len="med"/>
+                      <a:tailEnd type="none" w="med" len="med"/>
+                    </a:lnL>
+                    <a:lnR w="12700" cap="flat" cmpd="sng" algn="ctr">
+                      <a:solidFill>
+                        <a:srgbClr val="3A4458"/>
+                      </a:solidFill>
+                      <a:prstDash val="solid"/>
+                      <a:round/>
+                      <a:headEnd type="none" w="med" len="med"/>
+                      <a:tailEnd type="none" w="med" len="med"/>
+                    </a:lnR>
+                    <a:lnT w="12700" cap="flat" cmpd="sng" algn="ctr">
+                      <a:solidFill>
+                        <a:srgbClr val="3A4458"/>
+                      </a:solidFill>
+                      <a:prstDash val="solid"/>
+                      <a:round/>
+                      <a:headEnd type="none" w="med" len="med"/>
+                      <a:tailEnd type="none" w="med" len="med"/>
+                    </a:lnT>
+                    <a:lnB w="12700" cap="flat" cmpd="sng" algn="ctr">
+                      <a:solidFill>
+                        <a:srgbClr val="3A4458"/>
+                      </a:solidFill>
+                      <a:prstDash val="solid"/>
+                      <a:round/>
+                      <a:headEnd type="none" w="med" len="med"/>
+                      <a:tailEnd type="none" w="med" len="med"/>
+                    </a:lnB>
+                    <a:solidFill>
+                      <a:srgbClr val="232A3A"/>
+                    </a:solidFill>
+                  </a:tcPr>
+                </a:tc>
+                <a:tc>
+                  <a:txBody>
+                    <a:bodyPr/>
+                    <a:lstStyle/>
+                    <a:p>
+                      <a:pPr algn="ctr" indent="0" marL="0">
+                        <a:buNone/>
+                      </a:pPr>
+                      <a:r>
+                        <a:rPr lang="en-US" sz="1250" dirty="0">
+                          <a:solidFill>
+                            <a:srgbClr val="000000"/>
+                          </a:solidFill>
+                        </a:rPr>
+                        <a:t>0.00</a:t>
+                      </a:r>
+                      <a:endParaRPr lang="en-US" sz="1250" dirty="0"/>
+                    </a:p>
+                  </a:txBody>
+                  <a:tcPr marL="91440" marR="91440" marT="45720" marB="45720" anchor="ctr">
+                    <a:lnL w="12700" cap="flat" cmpd="sng" algn="ctr">
+                      <a:solidFill>
+                        <a:srgbClr val="3A4458"/>
+                      </a:solidFill>
+                      <a:prstDash val="solid"/>
+                      <a:round/>
+                      <a:headEnd type="none" w="med" len="med"/>
+                      <a:tailEnd type="none" w="med" len="med"/>
+                    </a:lnL>
+                    <a:lnR w="12700" cap="flat" cmpd="sng" algn="ctr">
+                      <a:solidFill>
+                        <a:srgbClr val="3A4458"/>
+                      </a:solidFill>
+                      <a:prstDash val="solid"/>
+                      <a:round/>
+                      <a:headEnd type="none" w="med" len="med"/>
+                      <a:tailEnd type="none" w="med" len="med"/>
+                    </a:lnR>
+                    <a:lnT w="12700" cap="flat" cmpd="sng" algn="ctr">
+                      <a:solidFill>
+                        <a:srgbClr val="3A4458"/>
+                      </a:solidFill>
+                      <a:prstDash val="solid"/>
+                      <a:round/>
+                      <a:headEnd type="none" w="med" len="med"/>
+                      <a:tailEnd type="none" w="med" len="med"/>
+                    </a:lnT>
+                    <a:lnB w="12700" cap="flat" cmpd="sng" algn="ctr">
+                      <a:solidFill>
+                        <a:srgbClr val="3A4458"/>
+                      </a:solidFill>
+                      <a:prstDash val="solid"/>
+                      <a:round/>
+                      <a:headEnd type="none" w="med" len="med"/>
+                      <a:tailEnd type="none" w="med" len="med"/>
+                    </a:lnB>
+                    <a:solidFill>
+                      <a:srgbClr val="232A3A"/>
+                    </a:solidFill>
+                  </a:tcPr>
+                </a:tc>
+                <a:tc>
+                  <a:txBody>
+                    <a:bodyPr/>
+                    <a:lstStyle/>
+                    <a:p>
+                      <a:pPr algn="ctr" indent="0" marL="0">
+                        <a:buNone/>
+                      </a:pPr>
+                      <a:r>
+                        <a:rPr lang="en-US" sz="1250" dirty="0">
+                          <a:solidFill>
+                            <a:srgbClr val="000000"/>
+                          </a:solidFill>
+                        </a:rPr>
+                        <a:t>0.00</a:t>
+                      </a:r>
+                      <a:endParaRPr lang="en-US" sz="1250" dirty="0"/>
+                    </a:p>
+                  </a:txBody>
+                  <a:tcPr marL="91440" marR="91440" marT="45720" marB="45720" anchor="ctr">
+                    <a:lnL w="12700" cap="flat" cmpd="sng" algn="ctr">
+                      <a:solidFill>
+                        <a:srgbClr val="3A4458"/>
+                      </a:solidFill>
+                      <a:prstDash val="solid"/>
+                      <a:round/>
+                      <a:headEnd type="none" w="med" len="med"/>
+                      <a:tailEnd type="none" w="med" len="med"/>
+                    </a:lnL>
+                    <a:lnR w="12700" cap="flat" cmpd="sng" algn="ctr">
+                      <a:solidFill>
+                        <a:srgbClr val="3A4458"/>
+                      </a:solidFill>
+                      <a:prstDash val="solid"/>
+                      <a:round/>
+                      <a:headEnd type="none" w="med" len="med"/>
+                      <a:tailEnd type="none" w="med" len="med"/>
+                    </a:lnR>
+                    <a:lnT w="12700" cap="flat" cmpd="sng" algn="ctr">
+                      <a:solidFill>
+                        <a:srgbClr val="3A4458"/>
+                      </a:solidFill>
+                      <a:prstDash val="solid"/>
+                      <a:round/>
+                      <a:headEnd type="none" w="med" len="med"/>
+                      <a:tailEnd type="none" w="med" len="med"/>
+                    </a:lnT>
+                    <a:lnB w="12700" cap="flat" cmpd="sng" algn="ctr">
+                      <a:solidFill>
+                        <a:srgbClr val="3A4458"/>
+                      </a:solidFill>
+                      <a:prstDash val="solid"/>
+                      <a:round/>
+                      <a:headEnd type="none" w="med" len="med"/>
+                      <a:tailEnd type="none" w="med" len="med"/>
+                    </a:lnB>
+                    <a:solidFill>
+                      <a:srgbClr val="232A3A"/>
+                    </a:solidFill>
+                  </a:tcPr>
+                </a:tc>
+                <a:tc>
+                  <a:txBody>
+                    <a:bodyPr/>
+                    <a:lstStyle/>
+                    <a:p>
+                      <a:pPr algn="ctr" indent="0" marL="0">
+                        <a:buNone/>
+                      </a:pPr>
+                      <a:r>
+                        <a:rPr lang="en-US" sz="1250" dirty="0">
+                          <a:solidFill>
+                            <a:srgbClr val="000000"/>
+                          </a:solidFill>
+                        </a:rPr>
+                        <a:t>—</a:t>
+                      </a:r>
+                      <a:endParaRPr lang="en-US" sz="1250" dirty="0"/>
+                    </a:p>
+                  </a:txBody>
+                  <a:tcPr marL="91440" marR="91440" marT="45720" marB="45720" anchor="ctr">
+                    <a:lnL w="12700" cap="flat" cmpd="sng" algn="ctr">
+                      <a:solidFill>
+                        <a:srgbClr val="3A4458"/>
+                      </a:solidFill>
+                      <a:prstDash val="solid"/>
+                      <a:round/>
+                      <a:headEnd type="none" w="med" len="med"/>
+                      <a:tailEnd type="none" w="med" len="med"/>
+                    </a:lnL>
+                    <a:lnR w="12700" cap="flat" cmpd="sng" algn="ctr">
+                      <a:solidFill>
+                        <a:srgbClr val="3A4458"/>
+                      </a:solidFill>
+                      <a:prstDash val="solid"/>
+                      <a:round/>
+                      <a:headEnd type="none" w="med" len="med"/>
+                      <a:tailEnd type="none" w="med" len="med"/>
+                    </a:lnR>
+                    <a:lnT w="12700" cap="flat" cmpd="sng" algn="ctr">
+                      <a:solidFill>
+                        <a:srgbClr val="3A4458"/>
+                      </a:solidFill>
+                      <a:prstDash val="solid"/>
+                      <a:round/>
+                      <a:headEnd type="none" w="med" len="med"/>
+                      <a:tailEnd type="none" w="med" len="med"/>
+                    </a:lnT>
+                    <a:lnB w="12700" cap="flat" cmpd="sng" algn="ctr">
+                      <a:solidFill>
+                        <a:srgbClr val="3A4458"/>
+                      </a:solidFill>
+                      <a:prstDash val="solid"/>
+                      <a:round/>
+                      <a:headEnd type="none" w="med" len="med"/>
+                      <a:tailEnd type="none" w="med" len="med"/>
+                    </a:lnB>
+                    <a:solidFill>
+                      <a:srgbClr val="232A3A"/>
+                    </a:solidFill>
+                  </a:tcPr>
+                </a:tc>
+              </a:tr>
+              <a:tr h="566928">
+                <a:tc>
+                  <a:txBody>
+                    <a:bodyPr/>
+                    <a:lstStyle/>
+                    <a:p>
+                      <a:pPr algn="ctr" indent="0" marL="0">
+                        <a:buNone/>
+                      </a:pPr>
+                      <a:r>
+                        <a:rPr lang="en-US" sz="1250" dirty="0">
+                          <a:solidFill>
+                            <a:srgbClr val="F7C59F"/>
+                          </a:solidFill>
+                        </a:rPr>
+                        <a:t>Task-aligned (plaintext, open)</a:t>
+                      </a:r>
+                      <a:endParaRPr lang="en-US" sz="1250" dirty="0"/>
+                    </a:p>
+                  </a:txBody>
+                  <a:tcPr marL="91440" marR="91440" marT="45720" marB="45720" anchor="ctr">
+                    <a:lnL w="12700" cap="flat" cmpd="sng" algn="ctr">
+                      <a:solidFill>
+                        <a:srgbClr val="3A4458"/>
+                      </a:solidFill>
+                      <a:prstDash val="solid"/>
+                      <a:round/>
+                      <a:headEnd type="none" w="med" len="med"/>
+                      <a:tailEnd type="none" w="med" len="med"/>
+                    </a:lnL>
+                    <a:lnR w="12700" cap="flat" cmpd="sng" algn="ctr">
+                      <a:solidFill>
+                        <a:srgbClr val="3A4458"/>
+                      </a:solidFill>
+                      <a:prstDash val="solid"/>
+                      <a:round/>
+                      <a:headEnd type="none" w="med" len="med"/>
+                      <a:tailEnd type="none" w="med" len="med"/>
+                    </a:lnR>
+                    <a:lnT w="12700" cap="flat" cmpd="sng" algn="ctr">
+                      <a:solidFill>
+                        <a:srgbClr val="3A4458"/>
+                      </a:solidFill>
+                      <a:prstDash val="solid"/>
+                      <a:round/>
+                      <a:headEnd type="none" w="med" len="med"/>
+                      <a:tailEnd type="none" w="med" len="med"/>
+                    </a:lnT>
+                    <a:lnB w="12700" cap="flat" cmpd="sng" algn="ctr">
+                      <a:solidFill>
+                        <a:srgbClr val="3A4458"/>
+                      </a:solidFill>
+                      <a:prstDash val="solid"/>
+                      <a:round/>
+                      <a:headEnd type="none" w="med" len="med"/>
+                      <a:tailEnd type="none" w="med" len="med"/>
+                    </a:lnB>
+                    <a:solidFill>
+                      <a:srgbClr val="232A3A"/>
+                    </a:solidFill>
+                  </a:tcPr>
+                </a:tc>
+                <a:tc>
+                  <a:txBody>
+                    <a:bodyPr/>
+                    <a:lstStyle/>
+                    <a:p>
+                      <a:pPr algn="ctr" indent="0" marL="0">
+                        <a:buNone/>
+                      </a:pPr>
+                      <a:r>
+                        <a:rPr lang="en-US" sz="1250" dirty="0">
+                          <a:solidFill>
+                            <a:srgbClr val="000000"/>
+                          </a:solidFill>
+                        </a:rPr>
+                        <a:t>25%</a:t>
+                      </a:r>
+                      <a:endParaRPr lang="en-US" sz="1250" dirty="0"/>
+                    </a:p>
+                  </a:txBody>
+                  <a:tcPr marL="91440" marR="91440" marT="45720" marB="45720" anchor="ctr">
+                    <a:lnL w="12700" cap="flat" cmpd="sng" algn="ctr">
+                      <a:solidFill>
+                        <a:srgbClr val="3A4458"/>
+                      </a:solidFill>
+                      <a:prstDash val="solid"/>
+                      <a:round/>
+                      <a:headEnd type="none" w="med" len="med"/>
+                      <a:tailEnd type="none" w="med" len="med"/>
+                    </a:lnL>
+                    <a:lnR w="12700" cap="flat" cmpd="sng" algn="ctr">
+                      <a:solidFill>
+                        <a:srgbClr val="3A4458"/>
+                      </a:solidFill>
+                      <a:prstDash val="solid"/>
+                      <a:round/>
+                      <a:headEnd type="none" w="med" len="med"/>
+                      <a:tailEnd type="none" w="med" len="med"/>
+                    </a:lnR>
+                    <a:lnT w="12700" cap="flat" cmpd="sng" algn="ctr">
+                      <a:solidFill>
+                        <a:srgbClr val="3A4458"/>
+                      </a:solidFill>
+                      <a:prstDash val="solid"/>
+                      <a:round/>
+                      <a:headEnd type="none" w="med" len="med"/>
+                      <a:tailEnd type="none" w="med" len="med"/>
+                    </a:lnT>
+                    <a:lnB w="12700" cap="flat" cmpd="sng" algn="ctr">
+                      <a:solidFill>
+                        <a:srgbClr val="3A4458"/>
+                      </a:solidFill>
+                      <a:prstDash val="solid"/>
+                      <a:round/>
+                      <a:headEnd type="none" w="med" len="med"/>
+                      <a:tailEnd type="none" w="med" len="med"/>
+                    </a:lnB>
+                    <a:solidFill>
+                      <a:srgbClr val="232A3A"/>
+                    </a:solidFill>
+                  </a:tcPr>
+                </a:tc>
+                <a:tc>
+                  <a:txBody>
+                    <a:bodyPr/>
+                    <a:lstStyle/>
+                    <a:p>
+                      <a:pPr algn="ctr" indent="0" marL="0">
+                        <a:buNone/>
+                      </a:pPr>
+                      <a:r>
+                        <a:rPr lang="en-US" sz="1250" dirty="0">
+                          <a:solidFill>
+                            <a:srgbClr val="000000"/>
+                          </a:solidFill>
+                        </a:rPr>
+                        <a:t>16</a:t>
+                      </a:r>
+                      <a:endParaRPr lang="en-US" sz="1250" dirty="0"/>
+                    </a:p>
+                  </a:txBody>
+                  <a:tcPr marL="91440" marR="91440" marT="45720" marB="45720" anchor="ctr">
+                    <a:lnL w="12700" cap="flat" cmpd="sng" algn="ctr">
+                      <a:solidFill>
+                        <a:srgbClr val="3A4458"/>
+                      </a:solidFill>
+                      <a:prstDash val="solid"/>
+                      <a:round/>
+                      <a:headEnd type="none" w="med" len="med"/>
+                      <a:tailEnd type="none" w="med" len="med"/>
+                    </a:lnL>
+                    <a:lnR w="12700" cap="flat" cmpd="sng" algn="ctr">
+                      <a:solidFill>
+                        <a:srgbClr val="3A4458"/>
+                      </a:solidFill>
+                      <a:prstDash val="solid"/>
+                      <a:round/>
+                      <a:headEnd type="none" w="med" len="med"/>
+                      <a:tailEnd type="none" w="med" len="med"/>
+                    </a:lnR>
+                    <a:lnT w="12700" cap="flat" cmpd="sng" algn="ctr">
+                      <a:solidFill>
+                        <a:srgbClr val="3A4458"/>
+                      </a:solidFill>
+                      <a:prstDash val="solid"/>
+                      <a:round/>
+                      <a:headEnd type="none" w="med" len="med"/>
+                      <a:tailEnd type="none" w="med" len="med"/>
+                    </a:lnT>
+                    <a:lnB w="12700" cap="flat" cmpd="sng" algn="ctr">
+                      <a:solidFill>
+                        <a:srgbClr val="3A4458"/>
+                      </a:solidFill>
+                      <a:prstDash val="solid"/>
+                      <a:round/>
+                      <a:headEnd type="none" w="med" len="med"/>
+                      <a:tailEnd type="none" w="med" len="med"/>
+                    </a:lnB>
+                    <a:solidFill>
+                      <a:srgbClr val="232A3A"/>
+                    </a:solidFill>
+                  </a:tcPr>
+                </a:tc>
+                <a:tc>
+                  <a:txBody>
+                    <a:bodyPr/>
+                    <a:lstStyle/>
+                    <a:p>
+                      <a:pPr algn="ctr" indent="0" marL="0">
+                        <a:buNone/>
+                      </a:pPr>
+                      <a:r>
+                        <a:rPr lang="en-US" sz="1250" dirty="0">
+                          <a:solidFill>
+                            <a:srgbClr val="000000"/>
+                          </a:solidFill>
+                        </a:rPr>
+                        <a:t>6,990</a:t>
+                      </a:r>
+                      <a:endParaRPr lang="en-US" sz="1250" dirty="0"/>
+                    </a:p>
+                  </a:txBody>
+                  <a:tcPr marL="91440" marR="91440" marT="45720" marB="45720" anchor="ctr">
+                    <a:lnL w="12700" cap="flat" cmpd="sng" algn="ctr">
+                      <a:solidFill>
+                        <a:srgbClr val="3A4458"/>
+                      </a:solidFill>
+                      <a:prstDash val="solid"/>
+                      <a:round/>
+                      <a:headEnd type="none" w="med" len="med"/>
+                      <a:tailEnd type="none" w="med" len="med"/>
+                    </a:lnL>
+                    <a:lnR w="12700" cap="flat" cmpd="sng" algn="ctr">
+                      <a:solidFill>
+                        <a:srgbClr val="3A4458"/>
+                      </a:solidFill>
+                      <a:prstDash val="solid"/>
+                      <a:round/>
+                      <a:headEnd type="none" w="med" len="med"/>
+                      <a:tailEnd type="none" w="med" len="med"/>
+                    </a:lnR>
+                    <a:lnT w="12700" cap="flat" cmpd="sng" algn="ctr">
+                      <a:solidFill>
+                        <a:srgbClr val="3A4458"/>
+                      </a:solidFill>
+                      <a:prstDash val="solid"/>
+                      <a:round/>
+                      <a:headEnd type="none" w="med" len="med"/>
+                      <a:tailEnd type="none" w="med" len="med"/>
+                    </a:lnT>
+                    <a:lnB w="12700" cap="flat" cmpd="sng" algn="ctr">
+                      <a:solidFill>
+                        <a:srgbClr val="3A4458"/>
+                      </a:solidFill>
+                      <a:prstDash val="solid"/>
+                      <a:round/>
+                      <a:headEnd type="none" w="med" len="med"/>
+                      <a:tailEnd type="none" w="med" len="med"/>
+                    </a:lnB>
+                    <a:solidFill>
+                      <a:srgbClr val="232A3A"/>
+                    </a:solidFill>
+                  </a:tcPr>
+                </a:tc>
+                <a:tc>
+                  <a:txBody>
+                    <a:bodyPr/>
+                    <a:lstStyle/>
+                    <a:p>
+                      <a:pPr algn="ctr" indent="0" marL="0">
+                        <a:buNone/>
+                      </a:pPr>
+                      <a:r>
+                        <a:rPr lang="en-US" sz="1250" dirty="0">
+                          <a:solidFill>
+                            <a:srgbClr val="000000"/>
+                          </a:solidFill>
+                        </a:rPr>
+                        <a:t>0.90</a:t>
+                      </a:r>
+                      <a:endParaRPr lang="en-US" sz="1250" dirty="0"/>
+                    </a:p>
+                  </a:txBody>
+                  <a:tcPr marL="91440" marR="91440" marT="45720" marB="45720" anchor="ctr">
+                    <a:lnL w="12700" cap="flat" cmpd="sng" algn="ctr">
+                      <a:solidFill>
+                        <a:srgbClr val="3A4458"/>
+                      </a:solidFill>
+                      <a:prstDash val="solid"/>
+                      <a:round/>
+                      <a:headEnd type="none" w="med" len="med"/>
+                      <a:tailEnd type="none" w="med" len="med"/>
+                    </a:lnL>
+                    <a:lnR w="12700" cap="flat" cmpd="sng" algn="ctr">
+                      <a:solidFill>
+                        <a:srgbClr val="3A4458"/>
+                      </a:solidFill>
+                      <a:prstDash val="solid"/>
+                      <a:round/>
+                      <a:headEnd type="none" w="med" len="med"/>
+                      <a:tailEnd type="none" w="med" len="med"/>
+                    </a:lnR>
+                    <a:lnT w="12700" cap="flat" cmpd="sng" algn="ctr">
+                      <a:solidFill>
+                        <a:srgbClr val="3A4458"/>
+                      </a:solidFill>
+                      <a:prstDash val="solid"/>
+                      <a:round/>
+                      <a:headEnd type="none" w="med" len="med"/>
+                      <a:tailEnd type="none" w="med" len="med"/>
+                    </a:lnT>
+                    <a:lnB w="12700" cap="flat" cmpd="sng" algn="ctr">
+                      <a:solidFill>
+                        <a:srgbClr val="3A4458"/>
+                      </a:solidFill>
+                      <a:prstDash val="solid"/>
+                      <a:round/>
+                      <a:headEnd type="none" w="med" len="med"/>
+                      <a:tailEnd type="none" w="med" len="med"/>
+                    </a:lnB>
+                    <a:solidFill>
+                      <a:srgbClr val="232A3A"/>
+                    </a:solidFill>
+                  </a:tcPr>
+                </a:tc>
+                <a:tc>
+                  <a:txBody>
+                    <a:bodyPr/>
+                    <a:lstStyle/>
+                    <a:p>
+                      <a:pPr algn="ctr" indent="0" marL="0">
+                        <a:buNone/>
+                      </a:pPr>
+                      <a:r>
+                        <a:rPr lang="en-US" sz="1250" dirty="0">
+                          <a:solidFill>
+                            <a:srgbClr val="000000"/>
+                          </a:solidFill>
+                        </a:rPr>
+                        <a:t>0.54</a:t>
+                      </a:r>
+                      <a:endParaRPr lang="en-US" sz="1250" dirty="0"/>
+                    </a:p>
+                  </a:txBody>
+                  <a:tcPr marL="91440" marR="91440" marT="45720" marB="45720" anchor="ctr">
+                    <a:lnL w="12700" cap="flat" cmpd="sng" algn="ctr">
+                      <a:solidFill>
+                        <a:srgbClr val="3A4458"/>
+                      </a:solidFill>
+                      <a:prstDash val="solid"/>
+                      <a:round/>
+                      <a:headEnd type="none" w="med" len="med"/>
+                      <a:tailEnd type="none" w="med" len="med"/>
+                    </a:lnL>
+                    <a:lnR w="12700" cap="flat" cmpd="sng" algn="ctr">
+                      <a:solidFill>
+                        <a:srgbClr val="3A4458"/>
+                      </a:solidFill>
+                      <a:prstDash val="solid"/>
+                      <a:round/>
+                      <a:headEnd type="none" w="med" len="med"/>
+                      <a:tailEnd type="none" w="med" len="med"/>
+                    </a:lnR>
+                    <a:lnT w="12700" cap="flat" cmpd="sng" algn="ctr">
+                      <a:solidFill>
+                        <a:srgbClr val="3A4458"/>
+                      </a:solidFill>
+                      <a:prstDash val="solid"/>
+                      <a:round/>
+                      <a:headEnd type="none" w="med" len="med"/>
+                      <a:tailEnd type="none" w="med" len="med"/>
+                    </a:lnT>
+                    <a:lnB w="12700" cap="flat" cmpd="sng" algn="ctr">
+                      <a:solidFill>
+                        <a:srgbClr val="3A4458"/>
+                      </a:solidFill>
+                      <a:prstDash val="solid"/>
+                      <a:round/>
+                      <a:headEnd type="none" w="med" len="med"/>
+                      <a:tailEnd type="none" w="med" len="med"/>
+                    </a:lnB>
+                    <a:solidFill>
+                      <a:srgbClr val="232A3A"/>
+                    </a:solidFill>
+                  </a:tcPr>
+                </a:tc>
+                <a:tc>
+                  <a:txBody>
+                    <a:bodyPr/>
+                    <a:lstStyle/>
+                    <a:p>
+                      <a:pPr algn="ctr" indent="0" marL="0">
+                        <a:buNone/>
+                      </a:pPr>
+                      <a:r>
+                        <a:rPr lang="en-US" sz="1250" dirty="0">
+                          <a:solidFill>
+                            <a:srgbClr val="000000"/>
+                          </a:solidFill>
+                        </a:rPr>
+                        <a:t>0.51</a:t>
+                      </a:r>
+                      <a:endParaRPr lang="en-US" sz="1250" dirty="0"/>
+                    </a:p>
+                  </a:txBody>
+                  <a:tcPr marL="91440" marR="91440" marT="45720" marB="45720" anchor="ctr">
+                    <a:lnL w="12700" cap="flat" cmpd="sng" algn="ctr">
+                      <a:solidFill>
+                        <a:srgbClr val="3A4458"/>
+                      </a:solidFill>
+                      <a:prstDash val="solid"/>
+                      <a:round/>
+                      <a:headEnd type="none" w="med" len="med"/>
+                      <a:tailEnd type="none" w="med" len="med"/>
+                    </a:lnL>
+                    <a:lnR w="12700" cap="flat" cmpd="sng" algn="ctr">
+                      <a:solidFill>
+                        <a:srgbClr val="3A4458"/>
+                      </a:solidFill>
+                      <a:prstDash val="solid"/>
+                      <a:round/>
+                      <a:headEnd type="none" w="med" len="med"/>
+                      <a:tailEnd type="none" w="med" len="med"/>
+                    </a:lnR>
+                    <a:lnT w="12700" cap="flat" cmpd="sng" algn="ctr">
+                      <a:solidFill>
+                        <a:srgbClr val="3A4458"/>
+                      </a:solidFill>
+                      <a:prstDash val="solid"/>
+                      <a:round/>
+                      <a:headEnd type="none" w="med" len="med"/>
+                      <a:tailEnd type="none" w="med" len="med"/>
+                    </a:lnT>
+                    <a:lnB w="12700" cap="flat" cmpd="sng" algn="ctr">
+                      <a:solidFill>
+                        <a:srgbClr val="3A4458"/>
+                      </a:solidFill>
+                      <a:prstDash val="solid"/>
+                      <a:round/>
+                      <a:headEnd type="none" w="med" len="med"/>
+                      <a:tailEnd type="none" w="med" len="med"/>
+                    </a:lnB>
+                    <a:solidFill>
+                      <a:srgbClr val="232A3A"/>
+                    </a:solidFill>
+                  </a:tcPr>
+                </a:tc>
+                <a:tc>
+                  <a:txBody>
+                    <a:bodyPr/>
+                    <a:lstStyle/>
+                    <a:p>
+                      <a:pPr algn="ctr" indent="0" marL="0">
+                        <a:buNone/>
+                      </a:pPr>
+                      <a:r>
+                        <a:rPr lang="en-US" sz="1250" dirty="0">
+                          <a:solidFill>
+                            <a:srgbClr val="000000"/>
+                          </a:solidFill>
+                        </a:rPr>
+                        <a:t>— (riddle visible)</a:t>
+                      </a:r>
+                      <a:endParaRPr lang="en-US" sz="1250" dirty="0"/>
+                    </a:p>
+                  </a:txBody>
+                  <a:tcPr marL="91440" marR="91440" marT="45720" marB="45720" anchor="ctr">
+                    <a:lnL w="12700" cap="flat" cmpd="sng" algn="ctr">
+                      <a:solidFill>
+                        <a:srgbClr val="3A4458"/>
+                      </a:solidFill>
+                      <a:prstDash val="solid"/>
+                      <a:round/>
+                      <a:headEnd type="none" w="med" len="med"/>
+                      <a:tailEnd type="none" w="med" len="med"/>
+                    </a:lnL>
+                    <a:lnR w="12700" cap="flat" cmpd="sng" algn="ctr">
+                      <a:solidFill>
+                        <a:srgbClr val="3A4458"/>
+                      </a:solidFill>
+                      <a:prstDash val="solid"/>
+                      <a:round/>
+                      <a:headEnd type="none" w="med" len="med"/>
+                      <a:tailEnd type="none" w="med" len="med"/>
+                    </a:lnR>
+                    <a:lnT w="12700" cap="flat" cmpd="sng" algn="ctr">
+                      <a:solidFill>
+                        <a:srgbClr val="3A4458"/>
+                      </a:solidFill>
+                      <a:prstDash val="solid"/>
+                      <a:round/>
+                      <a:headEnd type="none" w="med" len="med"/>
+                      <a:tailEnd type="none" w="med" len="med"/>
+                    </a:lnT>
+                    <a:lnB w="12700" cap="flat" cmpd="sng" algn="ctr">
+                      <a:solidFill>
+                        <a:srgbClr val="3A4458"/>
+                      </a:solidFill>
+                      <a:prstDash val="solid"/>
+                      <a:round/>
+                      <a:headEnd type="none" w="med" len="med"/>
+                      <a:tailEnd type="none" w="med" len="med"/>
+                    </a:lnB>
+                    <a:solidFill>
+                      <a:srgbClr val="232A3A"/>
+                    </a:solidFill>
+                  </a:tcPr>
+                </a:tc>
+              </a:tr>
+              <a:tr h="566928">
+                <a:tc>
+                  <a:txBody>
+                    <a:bodyPr/>
+                    <a:lstStyle/>
+                    <a:p>
+                      <a:pPr algn="ctr" indent="0" marL="0">
+                        <a:buNone/>
+                      </a:pPr>
+                      <a:r>
+                        <a:rPr lang="en-US" sz="1250" dirty="0">
+                          <a:solidFill>
+                            <a:srgbClr val="FF8A5B"/>
+                          </a:solidFill>
+                        </a:rPr>
+                        <a:t>Stego + codebook (best-case)</a:t>
+                      </a:r>
+                      <a:endParaRPr lang="en-US" sz="1250" dirty="0"/>
+                    </a:p>
+                  </a:txBody>
+                  <a:tcPr marL="91440" marR="91440" marT="45720" marB="45720" anchor="ctr">
+                    <a:lnL w="12700" cap="flat" cmpd="sng" algn="ctr">
+                      <a:solidFill>
+                        <a:srgbClr val="3A4458"/>
+                      </a:solidFill>
+                      <a:prstDash val="solid"/>
+                      <a:round/>
+                      <a:headEnd type="none" w="med" len="med"/>
+                      <a:tailEnd type="none" w="med" len="med"/>
+                    </a:lnL>
+                    <a:lnR w="12700" cap="flat" cmpd="sng" algn="ctr">
+                      <a:solidFill>
+                        <a:srgbClr val="3A4458"/>
+                      </a:solidFill>
+                      <a:prstDash val="solid"/>
+                      <a:round/>
+                      <a:headEnd type="none" w="med" len="med"/>
+                      <a:tailEnd type="none" w="med" len="med"/>
+                    </a:lnR>
+                    <a:lnT w="12700" cap="flat" cmpd="sng" algn="ctr">
+                      <a:solidFill>
+                        <a:srgbClr val="3A4458"/>
+                      </a:solidFill>
+                      <a:prstDash val="solid"/>
+                      <a:round/>
+                      <a:headEnd type="none" w="med" len="med"/>
+                      <a:tailEnd type="none" w="med" len="med"/>
+                    </a:lnT>
+                    <a:lnB w="12700" cap="flat" cmpd="sng" algn="ctr">
+                      <a:solidFill>
+                        <a:srgbClr val="3A4458"/>
+                      </a:solidFill>
+                      <a:prstDash val="solid"/>
+                      <a:round/>
+                      <a:headEnd type="none" w="med" len="med"/>
+                      <a:tailEnd type="none" w="med" len="med"/>
+                    </a:lnB>
+                    <a:solidFill>
+                      <a:srgbClr val="232A3A"/>
+                    </a:solidFill>
+                  </a:tcPr>
+                </a:tc>
+                <a:tc>
+                  <a:txBody>
+                    <a:bodyPr/>
+                    <a:lstStyle/>
+                    <a:p>
+                      <a:pPr algn="ctr" indent="0" marL="0">
+                        <a:buNone/>
+                      </a:pPr>
+                      <a:r>
+                        <a:rPr lang="en-US" sz="1250" dirty="0">
+                          <a:solidFill>
+                            <a:srgbClr val="000000"/>
+                          </a:solidFill>
+                        </a:rPr>
+                        <a:t>42%</a:t>
+                      </a:r>
+                      <a:endParaRPr lang="en-US" sz="1250" dirty="0"/>
+                    </a:p>
+                  </a:txBody>
+                  <a:tcPr marL="91440" marR="91440" marT="45720" marB="45720" anchor="ctr">
+                    <a:lnL w="12700" cap="flat" cmpd="sng" algn="ctr">
+                      <a:solidFill>
+                        <a:srgbClr val="3A4458"/>
+                      </a:solidFill>
+                      <a:prstDash val="solid"/>
+                      <a:round/>
+                      <a:headEnd type="none" w="med" len="med"/>
+                      <a:tailEnd type="none" w="med" len="med"/>
+                    </a:lnL>
+                    <a:lnR w="12700" cap="flat" cmpd="sng" algn="ctr">
+                      <a:solidFill>
+                        <a:srgbClr val="3A4458"/>
+                      </a:solidFill>
+                      <a:prstDash val="solid"/>
+                      <a:round/>
+                      <a:headEnd type="none" w="med" len="med"/>
+                      <a:tailEnd type="none" w="med" len="med"/>
+                    </a:lnR>
+                    <a:lnT w="12700" cap="flat" cmpd="sng" algn="ctr">
+                      <a:solidFill>
+                        <a:srgbClr val="3A4458"/>
+                      </a:solidFill>
+                      <a:prstDash val="solid"/>
+                      <a:round/>
+                      <a:headEnd type="none" w="med" len="med"/>
+                      <a:tailEnd type="none" w="med" len="med"/>
+                    </a:lnT>
+                    <a:lnB w="12700" cap="flat" cmpd="sng" algn="ctr">
+                      <a:solidFill>
+                        <a:srgbClr val="3A4458"/>
+                      </a:solidFill>
+                      <a:prstDash val="solid"/>
+                      <a:round/>
+                      <a:headEnd type="none" w="med" len="med"/>
+                      <a:tailEnd type="none" w="med" len="med"/>
+                    </a:lnB>
+                    <a:solidFill>
+                      <a:srgbClr val="232A3A"/>
+                    </a:solidFill>
+                  </a:tcPr>
+                </a:tc>
+                <a:tc>
+                  <a:txBody>
+                    <a:bodyPr/>
+                    <a:lstStyle/>
+                    <a:p>
+                      <a:pPr algn="ctr" indent="0" marL="0">
+                        <a:buNone/>
+                      </a:pPr>
+                      <a:r>
+                        <a:rPr lang="en-US" sz="1250" dirty="0">
+                          <a:solidFill>
+                            <a:srgbClr val="000000"/>
+                          </a:solidFill>
+                        </a:rPr>
+                        <a:t>18</a:t>
+                      </a:r>
+                      <a:endParaRPr lang="en-US" sz="1250" dirty="0"/>
+                    </a:p>
+                  </a:txBody>
+                  <a:tcPr marL="91440" marR="91440" marT="45720" marB="45720" anchor="ctr">
+                    <a:lnL w="12700" cap="flat" cmpd="sng" algn="ctr">
+                      <a:solidFill>
+                        <a:srgbClr val="3A4458"/>
+                      </a:solidFill>
+                      <a:prstDash val="solid"/>
+                      <a:round/>
+                      <a:headEnd type="none" w="med" len="med"/>
+                      <a:tailEnd type="none" w="med" len="med"/>
+                    </a:lnL>
+                    <a:lnR w="12700" cap="flat" cmpd="sng" algn="ctr">
+                      <a:solidFill>
+                        <a:srgbClr val="3A4458"/>
+                      </a:solidFill>
+                      <a:prstDash val="solid"/>
+                      <a:round/>
+                      <a:headEnd type="none" w="med" len="med"/>
+                      <a:tailEnd type="none" w="med" len="med"/>
+                    </a:lnR>
+                    <a:lnT w="12700" cap="flat" cmpd="sng" algn="ctr">
+                      <a:solidFill>
+                        <a:srgbClr val="3A4458"/>
+                      </a:solidFill>
+                      <a:prstDash val="solid"/>
+                      <a:round/>
+                      <a:headEnd type="none" w="med" len="med"/>
+                      <a:tailEnd type="none" w="med" len="med"/>
+                    </a:lnT>
+                    <a:lnB w="12700" cap="flat" cmpd="sng" algn="ctr">
+                      <a:solidFill>
+                        <a:srgbClr val="3A4458"/>
+                      </a:solidFill>
+                      <a:prstDash val="solid"/>
+                      <a:round/>
+                      <a:headEnd type="none" w="med" len="med"/>
+                      <a:tailEnd type="none" w="med" len="med"/>
+                    </a:lnB>
+                    <a:solidFill>
+                      <a:srgbClr val="232A3A"/>
+                    </a:solidFill>
+                  </a:tcPr>
+                </a:tc>
+                <a:tc>
+                  <a:txBody>
+                    <a:bodyPr/>
+                    <a:lstStyle/>
+                    <a:p>
+                      <a:pPr algn="ctr" indent="0" marL="0">
+                        <a:buNone/>
+                      </a:pPr>
+                      <a:r>
+                        <a:rPr lang="en-US" sz="1250" dirty="0">
+                          <a:solidFill>
+                            <a:srgbClr val="000000"/>
+                          </a:solidFill>
+                        </a:rPr>
+                        <a:t>4,778</a:t>
+                      </a:r>
+                      <a:endParaRPr lang="en-US" sz="1250" dirty="0"/>
+                    </a:p>
+                  </a:txBody>
+                  <a:tcPr marL="91440" marR="91440" marT="45720" marB="45720" anchor="ctr">
+                    <a:lnL w="12700" cap="flat" cmpd="sng" algn="ctr">
+                      <a:solidFill>
+                        <a:srgbClr val="3A4458"/>
+                      </a:solidFill>
+                      <a:prstDash val="solid"/>
+                      <a:round/>
+                      <a:headEnd type="none" w="med" len="med"/>
+                      <a:tailEnd type="none" w="med" len="med"/>
+                    </a:lnL>
+                    <a:lnR w="12700" cap="flat" cmpd="sng" algn="ctr">
+                      <a:solidFill>
+                        <a:srgbClr val="3A4458"/>
+                      </a:solidFill>
+                      <a:prstDash val="solid"/>
+                      <a:round/>
+                      <a:headEnd type="none" w="med" len="med"/>
+                      <a:tailEnd type="none" w="med" len="med"/>
+                    </a:lnR>
+                    <a:lnT w="12700" cap="flat" cmpd="sng" algn="ctr">
+                      <a:solidFill>
+                        <a:srgbClr val="3A4458"/>
+                      </a:solidFill>
+                      <a:prstDash val="solid"/>
+                      <a:round/>
+                      <a:headEnd type="none" w="med" len="med"/>
+                      <a:tailEnd type="none" w="med" len="med"/>
+                    </a:lnT>
+                    <a:lnB w="12700" cap="flat" cmpd="sng" algn="ctr">
+                      <a:solidFill>
+                        <a:srgbClr val="3A4458"/>
+                      </a:solidFill>
+                      <a:prstDash val="solid"/>
+                      <a:round/>
+                      <a:headEnd type="none" w="med" len="med"/>
+                      <a:tailEnd type="none" w="med" len="med"/>
+                    </a:lnB>
+                    <a:solidFill>
+                      <a:srgbClr val="232A3A"/>
+                    </a:solidFill>
+                  </a:tcPr>
+                </a:tc>
+                <a:tc>
+                  <a:txBody>
+                    <a:bodyPr/>
+                    <a:lstStyle/>
+                    <a:p>
+                      <a:pPr algn="ctr" indent="0" marL="0">
+                        <a:buNone/>
+                      </a:pPr>
+                      <a:r>
+                        <a:rPr lang="en-US" sz="1250" dirty="0">
+                          <a:solidFill>
+                            <a:srgbClr val="000000"/>
+                          </a:solidFill>
+                        </a:rPr>
+                        <a:t>0.95</a:t>
+                      </a:r>
+                      <a:endParaRPr lang="en-US" sz="1250" dirty="0"/>
+                    </a:p>
+                  </a:txBody>
+                  <a:tcPr marL="91440" marR="91440" marT="45720" marB="45720" anchor="ctr">
+                    <a:lnL w="12700" cap="flat" cmpd="sng" algn="ctr">
+                      <a:solidFill>
+                        <a:srgbClr val="3A4458"/>
+                      </a:solidFill>
+                      <a:prstDash val="solid"/>
+                      <a:round/>
+                      <a:headEnd type="none" w="med" len="med"/>
+                      <a:tailEnd type="none" w="med" len="med"/>
+                    </a:lnL>
+                    <a:lnR w="12700" cap="flat" cmpd="sng" algn="ctr">
+                      <a:solidFill>
+                        <a:srgbClr val="3A4458"/>
+                      </a:solidFill>
+                      <a:prstDash val="solid"/>
+                      <a:round/>
+                      <a:headEnd type="none" w="med" len="med"/>
+                      <a:tailEnd type="none" w="med" len="med"/>
+                    </a:lnR>
+                    <a:lnT w="12700" cap="flat" cmpd="sng" algn="ctr">
+                      <a:solidFill>
+                        <a:srgbClr val="3A4458"/>
+                      </a:solidFill>
+                      <a:prstDash val="solid"/>
+                      <a:round/>
+                      <a:headEnd type="none" w="med" len="med"/>
+                      <a:tailEnd type="none" w="med" len="med"/>
+                    </a:lnT>
+                    <a:lnB w="12700" cap="flat" cmpd="sng" algn="ctr">
+                      <a:solidFill>
+                        <a:srgbClr val="3A4458"/>
+                      </a:solidFill>
+                      <a:prstDash val="solid"/>
+                      <a:round/>
+                      <a:headEnd type="none" w="med" len="med"/>
+                      <a:tailEnd type="none" w="med" len="med"/>
+                    </a:lnB>
+                    <a:solidFill>
+                      <a:srgbClr val="232A3A"/>
+                    </a:solidFill>
+                  </a:tcPr>
+                </a:tc>
+                <a:tc>
+                  <a:txBody>
+                    <a:bodyPr/>
+                    <a:lstStyle/>
+                    <a:p>
+                      <a:pPr algn="ctr" indent="0" marL="0">
+                        <a:buNone/>
+                      </a:pPr>
+                      <a:r>
+                        <a:rPr lang="en-US" sz="1250" dirty="0">
+                          <a:solidFill>
+                            <a:srgbClr val="000000"/>
+                          </a:solidFill>
+                        </a:rPr>
+                        <a:t>0.80</a:t>
+                      </a:r>
+                      <a:endParaRPr lang="en-US" sz="1250" dirty="0"/>
+                    </a:p>
+                  </a:txBody>
+                  <a:tcPr marL="91440" marR="91440" marT="45720" marB="45720" anchor="ctr">
+                    <a:lnL w="12700" cap="flat" cmpd="sng" algn="ctr">
+                      <a:solidFill>
+                        <a:srgbClr val="3A4458"/>
+                      </a:solidFill>
+                      <a:prstDash val="solid"/>
+                      <a:round/>
+                      <a:headEnd type="none" w="med" len="med"/>
+                      <a:tailEnd type="none" w="med" len="med"/>
+                    </a:lnL>
+                    <a:lnR w="12700" cap="flat" cmpd="sng" algn="ctr">
+                      <a:solidFill>
+                        <a:srgbClr val="3A4458"/>
+                      </a:solidFill>
+                      <a:prstDash val="solid"/>
+                      <a:round/>
+                      <a:headEnd type="none" w="med" len="med"/>
+                      <a:tailEnd type="none" w="med" len="med"/>
+                    </a:lnR>
+                    <a:lnT w="12700" cap="flat" cmpd="sng" algn="ctr">
+                      <a:solidFill>
+                        <a:srgbClr val="3A4458"/>
+                      </a:solidFill>
+                      <a:prstDash val="solid"/>
+                      <a:round/>
+                      <a:headEnd type="none" w="med" len="med"/>
+                      <a:tailEnd type="none" w="med" len="med"/>
+                    </a:lnT>
+                    <a:lnB w="12700" cap="flat" cmpd="sng" algn="ctr">
+                      <a:solidFill>
+                        <a:srgbClr val="3A4458"/>
+                      </a:solidFill>
+                      <a:prstDash val="solid"/>
+                      <a:round/>
+                      <a:headEnd type="none" w="med" len="med"/>
+                      <a:tailEnd type="none" w="med" len="med"/>
+                    </a:lnB>
+                    <a:solidFill>
+                      <a:srgbClr val="232A3A"/>
+                    </a:solidFill>
+                  </a:tcPr>
+                </a:tc>
+                <a:tc>
+                  <a:txBody>
+                    <a:bodyPr/>
+                    <a:lstStyle/>
+                    <a:p>
+                      <a:pPr algn="ctr" indent="0" marL="0">
+                        <a:buNone/>
+                      </a:pPr>
+                      <a:r>
+                        <a:rPr lang="en-US" sz="1250" dirty="0">
+                          <a:solidFill>
+                            <a:srgbClr val="000000"/>
+                          </a:solidFill>
+                        </a:rPr>
+                        <a:t>0.51</a:t>
+                      </a:r>
+                      <a:endParaRPr lang="en-US" sz="1250" dirty="0"/>
+                    </a:p>
+                  </a:txBody>
+                  <a:tcPr marL="91440" marR="91440" marT="45720" marB="45720" anchor="ctr">
+                    <a:lnL w="12700" cap="flat" cmpd="sng" algn="ctr">
+                      <a:solidFill>
+                        <a:srgbClr val="3A4458"/>
+                      </a:solidFill>
+                      <a:prstDash val="solid"/>
+                      <a:round/>
+                      <a:headEnd type="none" w="med" len="med"/>
+                      <a:tailEnd type="none" w="med" len="med"/>
+                    </a:lnL>
+                    <a:lnR w="12700" cap="flat" cmpd="sng" algn="ctr">
+                      <a:solidFill>
+                        <a:srgbClr val="3A4458"/>
+                      </a:solidFill>
+                      <a:prstDash val="solid"/>
+                      <a:round/>
+                      <a:headEnd type="none" w="med" len="med"/>
+                      <a:tailEnd type="none" w="med" len="med"/>
+                    </a:lnR>
+                    <a:lnT w="12700" cap="flat" cmpd="sng" algn="ctr">
+                      <a:solidFill>
+                        <a:srgbClr val="3A4458"/>
+                      </a:solidFill>
+                      <a:prstDash val="solid"/>
+                      <a:round/>
+                      <a:headEnd type="none" w="med" len="med"/>
+                      <a:tailEnd type="none" w="med" len="med"/>
+                    </a:lnT>
+                    <a:lnB w="12700" cap="flat" cmpd="sng" algn="ctr">
+                      <a:solidFill>
+                        <a:srgbClr val="3A4458"/>
+                      </a:solidFill>
+                      <a:prstDash val="solid"/>
+                      <a:round/>
+                      <a:headEnd type="none" w="med" len="med"/>
+                      <a:tailEnd type="none" w="med" len="med"/>
+                    </a:lnB>
+                    <a:solidFill>
+                      <a:srgbClr val="232A3A"/>
+                    </a:solidFill>
+                  </a:tcPr>
+                </a:tc>
+                <a:tc>
+                  <a:txBody>
+                    <a:bodyPr/>
+                    <a:lstStyle/>
+                    <a:p>
+                      <a:pPr algn="ctr" indent="0" marL="0">
+                        <a:buNone/>
+                      </a:pPr>
+                      <a:r>
+                        <a:rPr lang="en-US" sz="1250" dirty="0">
+                          <a:solidFill>
+                            <a:srgbClr val="000000"/>
+                          </a:solidFill>
+                        </a:rPr>
+                        <a:t>85/88</a:t>
+                      </a:r>
+                      <a:endParaRPr lang="en-US" sz="1250" dirty="0"/>
+                    </a:p>
+                  </a:txBody>
+                  <a:tcPr marL="91440" marR="91440" marT="45720" marB="45720" anchor="ctr">
+                    <a:lnL w="12700" cap="flat" cmpd="sng" algn="ctr">
+                      <a:solidFill>
+                        <a:srgbClr val="3A4458"/>
+                      </a:solidFill>
+                      <a:prstDash val="solid"/>
+                      <a:round/>
+                      <a:headEnd type="none" w="med" len="med"/>
+                      <a:tailEnd type="none" w="med" len="med"/>
+                    </a:lnL>
+                    <a:lnR w="12700" cap="flat" cmpd="sng" algn="ctr">
+                      <a:solidFill>
+                        <a:srgbClr val="3A4458"/>
+                      </a:solidFill>
+                      <a:prstDash val="solid"/>
+                      <a:round/>
+                      <a:headEnd type="none" w="med" len="med"/>
+                      <a:tailEnd type="none" w="med" len="med"/>
+                    </a:lnR>
+                    <a:lnT w="12700" cap="flat" cmpd="sng" algn="ctr">
+                      <a:solidFill>
+                        <a:srgbClr val="3A4458"/>
+                      </a:solidFill>
+                      <a:prstDash val="solid"/>
+                      <a:round/>
+                      <a:headEnd type="none" w="med" len="med"/>
+                      <a:tailEnd type="none" w="med" len="med"/>
+                    </a:lnT>
+                    <a:lnB w="12700" cap="flat" cmpd="sng" algn="ctr">
+                      <a:solidFill>
+                        <a:srgbClr val="3A4458"/>
+                      </a:solidFill>
+                      <a:prstDash val="solid"/>
+                      <a:round/>
+                      <a:headEnd type="none" w="med" len="med"/>
+                      <a:tailEnd type="none" w="med" len="med"/>
+                    </a:lnB>
+                    <a:solidFill>
+                      <a:srgbClr val="232A3A"/>
+                    </a:solidFill>
+                  </a:tcPr>
+                </a:tc>
+              </a:tr>
+              <a:tr h="566928">
+                <a:tc>
+                  <a:txBody>
+                    <a:bodyPr/>
+                    <a:lstStyle/>
+                    <a:p>
+                      <a:pPr algn="ctr" indent="0" marL="0">
+                        <a:buNone/>
+                      </a:pPr>
+                      <a:r>
+                        <a:rPr lang="en-US" sz="1250" dirty="0">
+                          <a:solidFill>
+                            <a:srgbClr val="62B6FF"/>
+                          </a:solidFill>
+                        </a:rPr>
+                        <a:t>Stego in-message (realistic)</a:t>
+                      </a:r>
+                      <a:endParaRPr lang="en-US" sz="1250" dirty="0"/>
+                    </a:p>
+                  </a:txBody>
+                  <a:tcPr marL="91440" marR="91440" marT="45720" marB="45720" anchor="ctr">
+                    <a:lnL w="12700" cap="flat" cmpd="sng" algn="ctr">
+                      <a:solidFill>
+                        <a:srgbClr val="3A4458"/>
+                      </a:solidFill>
+                      <a:prstDash val="solid"/>
+                      <a:round/>
+                      <a:headEnd type="none" w="med" len="med"/>
+                      <a:tailEnd type="none" w="med" len="med"/>
+                    </a:lnL>
+                    <a:lnR w="12700" cap="flat" cmpd="sng" algn="ctr">
+                      <a:solidFill>
+                        <a:srgbClr val="3A4458"/>
+                      </a:solidFill>
+                      <a:prstDash val="solid"/>
+                      <a:round/>
+                      <a:headEnd type="none" w="med" len="med"/>
+                      <a:tailEnd type="none" w="med" len="med"/>
+                    </a:lnR>
+                    <a:lnT w="12700" cap="flat" cmpd="sng" algn="ctr">
+                      <a:solidFill>
+                        <a:srgbClr val="3A4458"/>
+                      </a:solidFill>
+                      <a:prstDash val="solid"/>
+                      <a:round/>
+                      <a:headEnd type="none" w="med" len="med"/>
+                      <a:tailEnd type="none" w="med" len="med"/>
+                    </a:lnT>
+                    <a:lnB w="12700" cap="flat" cmpd="sng" algn="ctr">
+                      <a:solidFill>
+                        <a:srgbClr val="3A4458"/>
+                      </a:solidFill>
+                      <a:prstDash val="solid"/>
+                      <a:round/>
+                      <a:headEnd type="none" w="med" len="med"/>
+                      <a:tailEnd type="none" w="med" len="med"/>
+                    </a:lnB>
+                    <a:solidFill>
+                      <a:srgbClr val="232A3A"/>
+                    </a:solidFill>
+                  </a:tcPr>
+                </a:tc>
+                <a:tc>
+                  <a:txBody>
+                    <a:bodyPr/>
+                    <a:lstStyle/>
+                    <a:p>
+                      <a:pPr algn="ctr" indent="0" marL="0">
+                        <a:buNone/>
+                      </a:pPr>
+                      <a:r>
+                        <a:rPr lang="en-US" sz="1250" dirty="0">
+                          <a:solidFill>
+                            <a:srgbClr val="000000"/>
+                          </a:solidFill>
+                        </a:rPr>
+                        <a:t>70%</a:t>
+                      </a:r>
+                      <a:endParaRPr lang="en-US" sz="1250" dirty="0"/>
+                    </a:p>
+                  </a:txBody>
+                  <a:tcPr marL="91440" marR="91440" marT="45720" marB="45720" anchor="ctr">
+                    <a:lnL w="12700" cap="flat" cmpd="sng" algn="ctr">
+                      <a:solidFill>
+                        <a:srgbClr val="3A4458"/>
+                      </a:solidFill>
+                      <a:prstDash val="solid"/>
+                      <a:round/>
+                      <a:headEnd type="none" w="med" len="med"/>
+                      <a:tailEnd type="none" w="med" len="med"/>
+                    </a:lnL>
+                    <a:lnR w="12700" cap="flat" cmpd="sng" algn="ctr">
+                      <a:solidFill>
+                        <a:srgbClr val="3A4458"/>
+                      </a:solidFill>
+                      <a:prstDash val="solid"/>
+                      <a:round/>
+                      <a:headEnd type="none" w="med" len="med"/>
+                      <a:tailEnd type="none" w="med" len="med"/>
+                    </a:lnR>
+                    <a:lnT w="12700" cap="flat" cmpd="sng" algn="ctr">
+                      <a:solidFill>
+                        <a:srgbClr val="3A4458"/>
+                      </a:solidFill>
+                      <a:prstDash val="solid"/>
+                      <a:round/>
+                      <a:headEnd type="none" w="med" len="med"/>
+                      <a:tailEnd type="none" w="med" len="med"/>
+                    </a:lnT>
+                    <a:lnB w="12700" cap="flat" cmpd="sng" algn="ctr">
+                      <a:solidFill>
+                        <a:srgbClr val="3A4458"/>
+                      </a:solidFill>
+                      <a:prstDash val="solid"/>
+                      <a:round/>
+                      <a:headEnd type="none" w="med" len="med"/>
+                      <a:tailEnd type="none" w="med" len="med"/>
+                    </a:lnB>
+                    <a:solidFill>
+                      <a:srgbClr val="232A3A"/>
+                    </a:solidFill>
+                  </a:tcPr>
+                </a:tc>
+                <a:tc>
+                  <a:txBody>
+                    <a:bodyPr/>
+                    <a:lstStyle/>
+                    <a:p>
+                      <a:pPr algn="ctr" indent="0" marL="0">
+                        <a:buNone/>
+                      </a:pPr>
+                      <a:r>
+                        <a:rPr lang="en-US" sz="1250" dirty="0">
+                          <a:solidFill>
+                            <a:srgbClr val="000000"/>
+                          </a:solidFill>
+                        </a:rPr>
+                        <a:t>13</a:t>
+                      </a:r>
+                      <a:endParaRPr lang="en-US" sz="1250" dirty="0"/>
+                    </a:p>
+                  </a:txBody>
+                  <a:tcPr marL="91440" marR="91440" marT="45720" marB="45720" anchor="ctr">
+                    <a:lnL w="12700" cap="flat" cmpd="sng" algn="ctr">
+                      <a:solidFill>
+                        <a:srgbClr val="3A4458"/>
+                      </a:solidFill>
+                      <a:prstDash val="solid"/>
+                      <a:round/>
+                      <a:headEnd type="none" w="med" len="med"/>
+                      <a:tailEnd type="none" w="med" len="med"/>
+                    </a:lnL>
+                    <a:lnR w="12700" cap="flat" cmpd="sng" algn="ctr">
+                      <a:solidFill>
+                        <a:srgbClr val="3A4458"/>
+                      </a:solidFill>
+                      <a:prstDash val="solid"/>
+                      <a:round/>
+                      <a:headEnd type="none" w="med" len="med"/>
+                      <a:tailEnd type="none" w="med" len="med"/>
+                    </a:lnR>
+                    <a:lnT w="12700" cap="flat" cmpd="sng" algn="ctr">
+                      <a:solidFill>
+                        <a:srgbClr val="3A4458"/>
+                      </a:solidFill>
+                      <a:prstDash val="solid"/>
+                      <a:round/>
+                      <a:headEnd type="none" w="med" len="med"/>
+                      <a:tailEnd type="none" w="med" len="med"/>
+                    </a:lnT>
+                    <a:lnB w="12700" cap="flat" cmpd="sng" algn="ctr">
+                      <a:solidFill>
+                        <a:srgbClr val="3A4458"/>
+                      </a:solidFill>
+                      <a:prstDash val="solid"/>
+                      <a:round/>
+                      <a:headEnd type="none" w="med" len="med"/>
+                      <a:tailEnd type="none" w="med" len="med"/>
+                    </a:lnB>
+                    <a:solidFill>
+                      <a:srgbClr val="232A3A"/>
+                    </a:solidFill>
+                  </a:tcPr>
+                </a:tc>
+                <a:tc>
+                  <a:txBody>
+                    <a:bodyPr/>
+                    <a:lstStyle/>
+                    <a:p>
+                      <a:pPr algn="ctr" indent="0" marL="0">
+                        <a:buNone/>
+                      </a:pPr>
+                      <a:r>
+                        <a:rPr lang="en-US" sz="1250" dirty="0">
+                          <a:solidFill>
+                            <a:srgbClr val="000000"/>
+                          </a:solidFill>
+                        </a:rPr>
+                        <a:t>2,384</a:t>
+                      </a:r>
+                      <a:endParaRPr lang="en-US" sz="1250" dirty="0"/>
+                    </a:p>
+                  </a:txBody>
+                  <a:tcPr marL="91440" marR="91440" marT="45720" marB="45720" anchor="ctr">
+                    <a:lnL w="12700" cap="flat" cmpd="sng" algn="ctr">
+                      <a:solidFill>
+                        <a:srgbClr val="3A4458"/>
+                      </a:solidFill>
+                      <a:prstDash val="solid"/>
+                      <a:round/>
+                      <a:headEnd type="none" w="med" len="med"/>
+                      <a:tailEnd type="none" w="med" len="med"/>
+                    </a:lnL>
+                    <a:lnR w="12700" cap="flat" cmpd="sng" algn="ctr">
+                      <a:solidFill>
+                        <a:srgbClr val="3A4458"/>
+                      </a:solidFill>
+                      <a:prstDash val="solid"/>
+                      <a:round/>
+                      <a:headEnd type="none" w="med" len="med"/>
+                      <a:tailEnd type="none" w="med" len="med"/>
+                    </a:lnR>
+                    <a:lnT w="12700" cap="flat" cmpd="sng" algn="ctr">
+                      <a:solidFill>
+                        <a:srgbClr val="3A4458"/>
+                      </a:solidFill>
+                      <a:prstDash val="solid"/>
+                      <a:round/>
+                      <a:headEnd type="none" w="med" len="med"/>
+                      <a:tailEnd type="none" w="med" len="med"/>
+                    </a:lnT>
+                    <a:lnB w="12700" cap="flat" cmpd="sng" algn="ctr">
+                      <a:solidFill>
+                        <a:srgbClr val="3A4458"/>
+                      </a:solidFill>
+                      <a:prstDash val="solid"/>
+                      <a:round/>
+                      <a:headEnd type="none" w="med" len="med"/>
+                      <a:tailEnd type="none" w="med" len="med"/>
+                    </a:lnB>
+                    <a:solidFill>
+                      <a:srgbClr val="232A3A"/>
+                    </a:solidFill>
+                  </a:tcPr>
+                </a:tc>
+                <a:tc>
+                  <a:txBody>
+                    <a:bodyPr/>
+                    <a:lstStyle/>
+                    <a:p>
+                      <a:pPr algn="ctr" indent="0" marL="0">
+                        <a:buNone/>
+                      </a:pPr>
+                      <a:r>
+                        <a:rPr lang="en-US" sz="1250" dirty="0">
+                          <a:solidFill>
+                            <a:srgbClr val="000000"/>
+                          </a:solidFill>
+                        </a:rPr>
+                        <a:t>0.93</a:t>
+                      </a:r>
+                      <a:endParaRPr lang="en-US" sz="1250" dirty="0"/>
+                    </a:p>
+                  </a:txBody>
+                  <a:tcPr marL="91440" marR="91440" marT="45720" marB="45720" anchor="ctr">
+                    <a:lnL w="12700" cap="flat" cmpd="sng" algn="ctr">
+                      <a:solidFill>
+                        <a:srgbClr val="3A4458"/>
+                      </a:solidFill>
+                      <a:prstDash val="solid"/>
+                      <a:round/>
+                      <a:headEnd type="none" w="med" len="med"/>
+                      <a:tailEnd type="none" w="med" len="med"/>
+                    </a:lnL>
+                    <a:lnR w="12700" cap="flat" cmpd="sng" algn="ctr">
+                      <a:solidFill>
+                        <a:srgbClr val="3A4458"/>
+                      </a:solidFill>
+                      <a:prstDash val="solid"/>
+                      <a:round/>
+                      <a:headEnd type="none" w="med" len="med"/>
+                      <a:tailEnd type="none" w="med" len="med"/>
+                    </a:lnR>
+                    <a:lnT w="12700" cap="flat" cmpd="sng" algn="ctr">
+                      <a:solidFill>
+                        <a:srgbClr val="3A4458"/>
+                      </a:solidFill>
+                      <a:prstDash val="solid"/>
+                      <a:round/>
+                      <a:headEnd type="none" w="med" len="med"/>
+                      <a:tailEnd type="none" w="med" len="med"/>
+                    </a:lnT>
+                    <a:lnB w="12700" cap="flat" cmpd="sng" algn="ctr">
+                      <a:solidFill>
+                        <a:srgbClr val="3A4458"/>
+                      </a:solidFill>
+                      <a:prstDash val="solid"/>
+                      <a:round/>
+                      <a:headEnd type="none" w="med" len="med"/>
+                      <a:tailEnd type="none" w="med" len="med"/>
+                    </a:lnB>
+                    <a:solidFill>
+                      <a:srgbClr val="232A3A"/>
+                    </a:solidFill>
+                  </a:tcPr>
+                </a:tc>
+                <a:tc>
+                  <a:txBody>
+                    <a:bodyPr/>
+                    <a:lstStyle/>
+                    <a:p>
+                      <a:pPr algn="ctr" indent="0" marL="0">
+                        <a:buNone/>
+                      </a:pPr>
+                      <a:r>
+                        <a:rPr lang="en-US" sz="1250" dirty="0">
+                          <a:solidFill>
+                            <a:srgbClr val="000000"/>
+                          </a:solidFill>
+                        </a:rPr>
+                        <a:t>0.25</a:t>
+                      </a:r>
+                      <a:endParaRPr lang="en-US" sz="1250" dirty="0"/>
+                    </a:p>
+                  </a:txBody>
+                  <a:tcPr marL="91440" marR="91440" marT="45720" marB="45720" anchor="ctr">
+                    <a:lnL w="12700" cap="flat" cmpd="sng" algn="ctr">
+                      <a:solidFill>
+                        <a:srgbClr val="3A4458"/>
+                      </a:solidFill>
+                      <a:prstDash val="solid"/>
+                      <a:round/>
+                      <a:headEnd type="none" w="med" len="med"/>
+                      <a:tailEnd type="none" w="med" len="med"/>
+                    </a:lnL>
+                    <a:lnR w="12700" cap="flat" cmpd="sng" algn="ctr">
+                      <a:solidFill>
+                        <a:srgbClr val="3A4458"/>
+                      </a:solidFill>
+                      <a:prstDash val="solid"/>
+                      <a:round/>
+                      <a:headEnd type="none" w="med" len="med"/>
+                      <a:tailEnd type="none" w="med" len="med"/>
+                    </a:lnR>
+                    <a:lnT w="12700" cap="flat" cmpd="sng" algn="ctr">
+                      <a:solidFill>
+                        <a:srgbClr val="3A4458"/>
+                      </a:solidFill>
+                      <a:prstDash val="solid"/>
+                      <a:round/>
+                      <a:headEnd type="none" w="med" len="med"/>
+                      <a:tailEnd type="none" w="med" len="med"/>
+                    </a:lnT>
+                    <a:lnB w="12700" cap="flat" cmpd="sng" algn="ctr">
+                      <a:solidFill>
+                        <a:srgbClr val="3A4458"/>
+                      </a:solidFill>
+                      <a:prstDash val="solid"/>
+                      <a:round/>
+                      <a:headEnd type="none" w="med" len="med"/>
+                      <a:tailEnd type="none" w="med" len="med"/>
+                    </a:lnB>
+                    <a:solidFill>
+                      <a:srgbClr val="232A3A"/>
+                    </a:solidFill>
+                  </a:tcPr>
+                </a:tc>
+                <a:tc>
+                  <a:txBody>
+                    <a:bodyPr/>
+                    <a:lstStyle/>
+                    <a:p>
+                      <a:pPr algn="ctr" indent="0" marL="0">
+                        <a:buNone/>
+                      </a:pPr>
+                      <a:r>
+                        <a:rPr lang="en-US" sz="1250" dirty="0">
+                          <a:solidFill>
+                            <a:srgbClr val="000000"/>
+                          </a:solidFill>
+                        </a:rPr>
+                        <a:t>0.22</a:t>
+                      </a:r>
+                      <a:endParaRPr lang="en-US" sz="1250" dirty="0"/>
+                    </a:p>
+                  </a:txBody>
+                  <a:tcPr marL="91440" marR="91440" marT="45720" marB="45720" anchor="ctr">
+                    <a:lnL w="12700" cap="flat" cmpd="sng" algn="ctr">
+                      <a:solidFill>
+                        <a:srgbClr val="3A4458"/>
+                      </a:solidFill>
+                      <a:prstDash val="solid"/>
+                      <a:round/>
+                      <a:headEnd type="none" w="med" len="med"/>
+                      <a:tailEnd type="none" w="med" len="med"/>
+                    </a:lnL>
+                    <a:lnR w="12700" cap="flat" cmpd="sng" algn="ctr">
+                      <a:solidFill>
+                        <a:srgbClr val="3A4458"/>
+                      </a:solidFill>
+                      <a:prstDash val="solid"/>
+                      <a:round/>
+                      <a:headEnd type="none" w="med" len="med"/>
+                      <a:tailEnd type="none" w="med" len="med"/>
+                    </a:lnR>
+                    <a:lnT w="12700" cap="flat" cmpd="sng" algn="ctr">
+                      <a:solidFill>
+                        <a:srgbClr val="3A4458"/>
+                      </a:solidFill>
+                      <a:prstDash val="solid"/>
+                      <a:round/>
+                      <a:headEnd type="none" w="med" len="med"/>
+                      <a:tailEnd type="none" w="med" len="med"/>
+                    </a:lnT>
+                    <a:lnB w="12700" cap="flat" cmpd="sng" algn="ctr">
+                      <a:solidFill>
+                        <a:srgbClr val="3A4458"/>
+                      </a:solidFill>
+                      <a:prstDash val="solid"/>
+                      <a:round/>
+                      <a:headEnd type="none" w="med" len="med"/>
+                      <a:tailEnd type="none" w="med" len="med"/>
+                    </a:lnB>
+                    <a:solidFill>
+                      <a:srgbClr val="232A3A"/>
+                    </a:solidFill>
+                  </a:tcPr>
+                </a:tc>
+                <a:tc>
+                  <a:txBody>
+                    <a:bodyPr/>
+                    <a:lstStyle/>
+                    <a:p>
+                      <a:pPr algn="ctr" indent="0" marL="0">
+                        <a:buNone/>
+                      </a:pPr>
+                      <a:r>
+                        <a:rPr lang="en-US" sz="1250" dirty="0">
+                          <a:solidFill>
+                            <a:srgbClr val="000000"/>
+                          </a:solidFill>
+                        </a:rPr>
+                        <a:t>8/10</a:t>
+                      </a:r>
+                      <a:endParaRPr lang="en-US" sz="1250" dirty="0"/>
+                    </a:p>
+                  </a:txBody>
+                  <a:tcPr marL="91440" marR="91440" marT="45720" marB="45720" anchor="ctr">
+                    <a:lnL w="12700" cap="flat" cmpd="sng" algn="ctr">
+                      <a:solidFill>
+                        <a:srgbClr val="3A4458"/>
+                      </a:solidFill>
+                      <a:prstDash val="solid"/>
+                      <a:round/>
+                      <a:headEnd type="none" w="med" len="med"/>
+                      <a:tailEnd type="none" w="med" len="med"/>
+                    </a:lnL>
+                    <a:lnR w="12700" cap="flat" cmpd="sng" algn="ctr">
+                      <a:solidFill>
+                        <a:srgbClr val="3A4458"/>
+                      </a:solidFill>
+                      <a:prstDash val="solid"/>
+                      <a:round/>
+                      <a:headEnd type="none" w="med" len="med"/>
+                      <a:tailEnd type="none" w="med" len="med"/>
+                    </a:lnR>
+                    <a:lnT w="12700" cap="flat" cmpd="sng" algn="ctr">
+                      <a:solidFill>
+                        <a:srgbClr val="3A4458"/>
+                      </a:solidFill>
+                      <a:prstDash val="solid"/>
+                      <a:round/>
+                      <a:headEnd type="none" w="med" len="med"/>
+                      <a:tailEnd type="none" w="med" len="med"/>
+                    </a:lnT>
+                    <a:lnB w="12700" cap="flat" cmpd="sng" algn="ctr">
+                      <a:solidFill>
+                        <a:srgbClr val="3A4458"/>
+                      </a:solidFill>
+                      <a:prstDash val="solid"/>
+                      <a:round/>
+                      <a:headEnd type="none" w="med" len="med"/>
+                      <a:tailEnd type="none" w="med" len="med"/>
+                    </a:lnB>
+                    <a:solidFill>
+                      <a:srgbClr val="232A3A"/>
+                    </a:solidFill>
+                  </a:tcPr>
+                </a:tc>
+              </a:tr>
+            </a:tbl>
+          </a:graphicData>
+        </a:graphic>
+      </p:graphicFrame>
+      <p:sp>
+        <p:nvSpPr>
+          <p:cNvPr id="5" name="Text 2"/>
+          <p:cNvSpPr txBox="1"/>
+          <p:nvPr/>
+        </p:nvSpPr>
+        <p:spPr>
+          <a:xfrm>
+            <a:off x="457200" y="4526280"/>
+            <a:ext cx="11247120" cy="1188720"/>
+          </a:xfrm>
+          <a:prstGeom prst="rect">
+            <a:avLst/>
+          </a:prstGeom>
+          <a:noFill/>
+          <a:ln/>
+        </p:spPr>
+        <p:txBody>
+          <a:bodyPr wrap="square" lIns="0" tIns="0" rIns="0" bIns="0" rtlCol="0" anchor="ctr"/>
+          <a:lstStyle/>
+          <a:p>
+            <a:pPr indent="0" marL="0">
+              <a:buNone/>
+            </a:pPr>
+            <a:r>
+              <a:rPr lang="en-US" sz="1200" b="1" i="1" dirty="0">
+                <a:solidFill>
+                  <a:srgbClr val="F7C59F"/>
+                </a:solidFill>
+              </a:rPr>
+              <a:t>The covertness ↔ potency trade-off. </a:t>
+            </a:r>
+            <a:pPr indent="0" marL="0">
+              <a:buNone/>
+            </a:pPr>
+            <a:r>
+              <a:rPr lang="en-US" sz="1200" i="1" dirty="0">
+                <a:solidFill>
+                  <a:srgbClr val="C7CEDB"/>
+                </a:solidFill>
+              </a:rPr>
+              <a:t>Open plaintext hits hardest (completion 47→25%, 2.1× tokens) but the riddle is visible. The pre-shared codebook makes stego captures highest (P-ASR 0.80) but assumes the attacker edited every agent's prompt. Our realistic in-message stego still DELIVERS the trigger (8/10) with no codebook, but agents mostly resist adopting it (P-ASR 0.25) — the more covert &amp; realistic the delivery, the weaker the attack.</a:t>
+            </a:r>
+            <a:endParaRPr lang="en-US" sz="1200" dirty="0"/>
+          </a:p>
+        </p:txBody>
+      </p:sp>
+      <p:sp>
+        <p:nvSpPr>
+          <p:cNvPr id="6" name="Text 3"/>
+          <p:cNvSpPr txBox="1"/>
+          <p:nvPr/>
+        </p:nvSpPr>
+        <p:spPr>
+          <a:xfrm>
+            <a:off x="457200" y="6080760"/>
+            <a:ext cx="11247120" cy="365760"/>
+          </a:xfrm>
+          <a:prstGeom prst="rect">
+            <a:avLst/>
+          </a:prstGeom>
+          <a:noFill/>
+          <a:ln/>
+        </p:spPr>
+        <p:txBody>
+          <a:bodyPr wrap="square" lIns="0" tIns="0" rIns="0" bIns="0" rtlCol="0" anchor="ctr"/>
+          <a:lstStyle/>
+          <a:p>
+            <a:pPr indent="0" marL="0">
+              <a:buNone/>
+            </a:pPr>
+            <a:r>
+              <a:rPr lang="en-US" sz="1050" i="1" dirty="0">
+                <a:solidFill>
+                  <a:srgbClr val="8D99AE"/>
+                </a:solidFill>
+              </a:rPr>
+              <a:t>All rows: current code, MAX_TURNS = 12, structural P-ASR/TWS. Task counts differ (clean/plaintext 20 · stego+codebook 88 · in-message 10).</a:t>
+            </a:r>
+            <a:endParaRPr lang="en-US" sz="1050" dirty="0"/>
+          </a:p>
+        </p:txBody>
+      </p:sp>
+    </p:spTree>
+  </p:cSld>
+  <p:clrMapOvr>
+    <a:masterClrMapping/>
+  </p:clrMapOvr>
+</p:sld>
+</file>
+
+<file path=ppt/slides/slide12.xml><?xml version="1.0" encoding="utf-8"?>
+<p:sld xmlns:a="http://schemas.openxmlformats.org/drawingml/2006/main" xmlns:r="http://schemas.openxmlformats.org/officeDocument/2006/relationships" xmlns:p="http://schemas.openxmlformats.org/presentationml/2006/main">
+  <p:cSld name="Slide 12">
     <p:bg>
       <p:bgPr>
         <a:solidFill>
@@ -4907,7 +7850,7 @@
                 <a:ea typeface="Cambria" pitchFamily="34" charset="-122"/>
                 <a:cs typeface="Cambria" pitchFamily="34" charset="-120"/>
               </a:rPr>
-              <a:t>Steganography: Methods &amp; Delivery (running)</a:t>
+              <a:t>Three Steganography Types — How They Work</a:t>
             </a:r>
             <a:endParaRPr lang="en-US" sz="3000" dirty="0"/>
           </a:p>
@@ -4921,8 +7864,8 @@
         </p:nvSpPr>
         <p:spPr>
           <a:xfrm>
-            <a:off x="548640" y="1234440"/>
-            <a:ext cx="10972800" cy="457200"/>
+            <a:off x="548640" y="1188720"/>
+            <a:ext cx="11064240" cy="365760"/>
           </a:xfrm>
           <a:prstGeom prst="rect">
             <a:avLst/>
@@ -4938,14 +7881,14 @@
               <a:buNone/>
             </a:pPr>
             <a:r>
-              <a:rPr lang="en-US" sz="1400" dirty="0">
+              <a:rPr lang="en-US" sz="1350" dirty="0">
                 <a:solidFill>
                   <a:srgbClr val="1C2230"/>
                 </a:solidFill>
               </a:rPr>
-              <a:t>We compare 3 hiding methods × 3 delivery modes — which one can the agents actually DECODE?</a:t>
-            </a:r>
-            <a:endParaRPr lang="en-US" sz="1400" dirty="0"/>
+              <a:t>Each hides the same trigger word inside normal on-task text. Example secret below: "VAL".</a:t>
+            </a:r>
+            <a:endParaRPr lang="en-US" sz="1350" dirty="0"/>
           </a:p>
         </p:txBody>
       </p:sp>
@@ -4957,16 +7900,16 @@
         </p:nvSpPr>
         <p:spPr>
           <a:xfrm>
-            <a:off x="548640" y="1920240"/>
-            <a:ext cx="3566160" cy="1371600"/>
+            <a:off x="548640" y="1783080"/>
+            <a:ext cx="3611880" cy="4206240"/>
           </a:xfrm>
           <a:prstGeom prst="roundRect">
             <a:avLst>
-              <a:gd name="adj" fmla="val 5333"/>
+              <a:gd name="adj" fmla="val 2025"/>
             </a:avLst>
           </a:prstGeom>
           <a:solidFill>
-            <a:srgbClr val="F3F5F8"/>
+            <a:srgbClr val="F7F9FB"/>
           </a:solidFill>
           <a:ln w="12700">
             <a:solidFill>
@@ -4985,39 +7928,25 @@
       </p:sp>
       <p:sp>
         <p:nvSpPr>
-          <p:cNvPr id="5" name="Text 3"/>
-          <p:cNvSpPr txBox="1"/>
-          <p:nvPr/>
-        </p:nvSpPr>
-        <p:spPr>
-          <a:xfrm>
-            <a:off x="731520" y="2057400"/>
-            <a:ext cx="3200400" cy="365760"/>
-          </a:xfrm>
-          <a:prstGeom prst="rect">
-            <a:avLst/>
-          </a:prstGeom>
-          <a:noFill/>
-          <a:ln/>
-        </p:spPr>
-        <p:txBody>
-          <a:bodyPr wrap="square" lIns="0" tIns="0" rIns="0" bIns="0" rtlCol="0" anchor="ctr"/>
-          <a:lstStyle/>
-          <a:p>
-            <a:pPr indent="0" marL="0">
-              <a:buNone/>
-            </a:pPr>
-            <a:r>
-              <a:rPr lang="en-US" sz="1600" b="1" dirty="0">
-                <a:solidFill>
-                  <a:srgbClr val="FF6B35"/>
-                </a:solidFill>
-              </a:rPr>
-              <a:t>Synonym</a:t>
-            </a:r>
-            <a:endParaRPr lang="en-US" sz="1600" dirty="0"/>
-          </a:p>
-        </p:txBody>
+          <p:cNvPr id="5" name="Shape 3"/>
+          <p:cNvSpPr/>
+          <p:nvPr/>
+        </p:nvSpPr>
+        <p:spPr>
+          <a:xfrm>
+            <a:off x="777240" y="2011680"/>
+            <a:ext cx="3154680" cy="502920"/>
+          </a:xfrm>
+          <a:prstGeom prst="roundRect">
+            <a:avLst>
+              <a:gd name="adj" fmla="val 10909"/>
+            </a:avLst>
+          </a:prstGeom>
+          <a:solidFill>
+            <a:srgbClr val="FF6B35"/>
+          </a:solidFill>
+          <a:ln/>
+        </p:spPr>
       </p:sp>
       <p:sp>
         <p:nvSpPr>
@@ -5027,8 +7956,8 @@
         </p:nvSpPr>
         <p:spPr>
           <a:xfrm>
-            <a:off x="731520" y="2468880"/>
-            <a:ext cx="3200400" cy="640080"/>
+            <a:off x="777240" y="2011680"/>
+            <a:ext cx="3154680" cy="502920"/>
           </a:xfrm>
           <a:prstGeom prst="rect">
             <a:avLst/>
@@ -5037,6 +7966,42 @@
           <a:ln/>
         </p:spPr>
         <p:txBody>
+          <a:bodyPr wrap="square" rtlCol="0" anchor="ctr"/>
+          <a:lstStyle/>
+          <a:p>
+            <a:pPr algn="ctr" indent="0" marL="0">
+              <a:buNone/>
+            </a:pPr>
+            <a:r>
+              <a:rPr lang="en-US" sz="1700" b="1" dirty="0">
+                <a:solidFill>
+                  <a:srgbClr val="FFFFFF"/>
+                </a:solidFill>
+              </a:rPr>
+              <a:t>Synonym</a:t>
+            </a:r>
+            <a:endParaRPr lang="en-US" sz="1700" dirty="0"/>
+          </a:p>
+        </p:txBody>
+      </p:sp>
+      <p:sp>
+        <p:nvSpPr>
+          <p:cNvPr id="7" name="Text 5"/>
+          <p:cNvSpPr txBox="1"/>
+          <p:nvPr/>
+        </p:nvSpPr>
+        <p:spPr>
+          <a:xfrm>
+            <a:off x="777240" y="2697480"/>
+            <a:ext cx="3200400" cy="1005840"/>
+          </a:xfrm>
+          <a:prstGeom prst="rect">
+            <a:avLst/>
+          </a:prstGeom>
+          <a:noFill/>
+          <a:ln/>
+        </p:spPr>
+        <p:txBody>
           <a:bodyPr wrap="square" lIns="0" tIns="0" rIns="0" bIns="0" rtlCol="0" anchor="ctr"/>
           <a:lstStyle/>
           <a:p>
@@ -5044,35 +8009,260 @@
               <a:buNone/>
             </a:pPr>
             <a:r>
-              <a:rPr lang="en-US" sz="1200" dirty="0">
+              <a:rPr lang="en-US" sz="1150" dirty="0">
                 <a:solidFill>
                   <a:srgbClr val="5A6475"/>
                 </a:solidFill>
               </a:rPr>
-              <a:t>word-choice encodes bits</a:t>
-            </a:r>
-            <a:endParaRPr lang="en-US" sz="1200" dirty="0"/>
-          </a:p>
-        </p:txBody>
-      </p:sp>
-      <p:sp>
-        <p:nvSpPr>
-          <p:cNvPr id="7" name="Shape 5"/>
+              <a:t>Word choice carries bits. Each slot picks one of a pair: first word = 0, second = 1.</a:t>
+            </a:r>
+            <a:endParaRPr lang="en-US" sz="1150" dirty="0"/>
+          </a:p>
+        </p:txBody>
+      </p:sp>
+      <p:sp>
+        <p:nvSpPr>
+          <p:cNvPr id="8" name="Text 6"/>
+          <p:cNvSpPr txBox="1"/>
+          <p:nvPr/>
+        </p:nvSpPr>
+        <p:spPr>
+          <a:xfrm>
+            <a:off x="777240" y="3794760"/>
+            <a:ext cx="3200400" cy="274320"/>
+          </a:xfrm>
+          <a:prstGeom prst="rect">
+            <a:avLst/>
+          </a:prstGeom>
+          <a:noFill/>
+          <a:ln/>
+        </p:spPr>
+        <p:txBody>
+          <a:bodyPr wrap="square" lIns="0" tIns="0" rIns="0" bIns="0" rtlCol="0" anchor="ctr"/>
+          <a:lstStyle/>
+          <a:p>
+            <a:pPr indent="0" marL="0">
+              <a:buNone/>
+            </a:pPr>
+            <a:r>
+              <a:rPr lang="en-US" sz="1000" b="1" dirty="0">
+                <a:solidFill>
+                  <a:srgbClr val="FF6B35"/>
+                </a:solidFill>
+              </a:rPr>
+              <a:t>pair (verify / check) → bit</a:t>
+            </a:r>
+            <a:endParaRPr lang="en-US" sz="1000" dirty="0"/>
+          </a:p>
+        </p:txBody>
+      </p:sp>
+      <p:sp>
+        <p:nvSpPr>
+          <p:cNvPr id="9" name="Text 7"/>
+          <p:cNvSpPr txBox="1"/>
+          <p:nvPr/>
+        </p:nvSpPr>
+        <p:spPr>
+          <a:xfrm>
+            <a:off x="777240" y="4050792"/>
+            <a:ext cx="3200400" cy="365760"/>
+          </a:xfrm>
+          <a:prstGeom prst="rect">
+            <a:avLst/>
+          </a:prstGeom>
+          <a:noFill/>
+          <a:ln/>
+        </p:spPr>
+        <p:txBody>
+          <a:bodyPr wrap="square" lIns="0" tIns="0" rIns="0" bIns="0" rtlCol="0" anchor="ctr"/>
+          <a:lstStyle/>
+          <a:p>
+            <a:pPr indent="0" marL="0">
+              <a:buNone/>
+            </a:pPr>
+            <a:r>
+              <a:rPr lang="en-US" sz="1150" dirty="0">
+                <a:solidFill>
+                  <a:srgbClr val="1C2230"/>
+                </a:solidFill>
+                <a:latin typeface="Consolas" pitchFamily="34" charset="0"/>
+                <a:ea typeface="Consolas" pitchFamily="34" charset="-122"/>
+                <a:cs typeface="Consolas" pitchFamily="34" charset="-120"/>
+              </a:rPr>
+              <a:t>v=0 · c=1</a:t>
+            </a:r>
+            <a:endParaRPr lang="en-US" sz="1150" dirty="0"/>
+          </a:p>
+        </p:txBody>
+      </p:sp>
+      <p:sp>
+        <p:nvSpPr>
+          <p:cNvPr id="10" name="Text 8"/>
+          <p:cNvSpPr txBox="1"/>
+          <p:nvPr/>
+        </p:nvSpPr>
+        <p:spPr>
+          <a:xfrm>
+            <a:off x="777240" y="4507992"/>
+            <a:ext cx="3200400" cy="274320"/>
+          </a:xfrm>
+          <a:prstGeom prst="rect">
+            <a:avLst/>
+          </a:prstGeom>
+          <a:noFill/>
+          <a:ln/>
+        </p:spPr>
+        <p:txBody>
+          <a:bodyPr wrap="square" lIns="0" tIns="0" rIns="0" bIns="0" rtlCol="0" anchor="ctr"/>
+          <a:lstStyle/>
+          <a:p>
+            <a:pPr indent="0" marL="0">
+              <a:buNone/>
+            </a:pPr>
+            <a:r>
+              <a:rPr lang="en-US" sz="1000" b="1" dirty="0">
+                <a:solidFill>
+                  <a:srgbClr val="FF6B35"/>
+                </a:solidFill>
+              </a:rPr>
+              <a:t>cover</a:t>
+            </a:r>
+            <a:endParaRPr lang="en-US" sz="1000" dirty="0"/>
+          </a:p>
+        </p:txBody>
+      </p:sp>
+      <p:sp>
+        <p:nvSpPr>
+          <p:cNvPr id="11" name="Text 9"/>
+          <p:cNvSpPr txBox="1"/>
+          <p:nvPr/>
+        </p:nvSpPr>
+        <p:spPr>
+          <a:xfrm>
+            <a:off x="777240" y="4764024"/>
+            <a:ext cx="3200400" cy="365760"/>
+          </a:xfrm>
+          <a:prstGeom prst="rect">
+            <a:avLst/>
+          </a:prstGeom>
+          <a:noFill/>
+          <a:ln/>
+        </p:spPr>
+        <p:txBody>
+          <a:bodyPr wrap="square" lIns="0" tIns="0" rIns="0" bIns="0" rtlCol="0" anchor="ctr"/>
+          <a:lstStyle/>
+          <a:p>
+            <a:pPr indent="0" marL="0">
+              <a:buNone/>
+            </a:pPr>
+            <a:r>
+              <a:rPr lang="en-US" sz="1150" dirty="0">
+                <a:solidFill>
+                  <a:srgbClr val="1C2230"/>
+                </a:solidFill>
+                <a:latin typeface="Consolas" pitchFamily="34" charset="0"/>
+                <a:ea typeface="Consolas" pitchFamily="34" charset="-122"/>
+                <a:cs typeface="Consolas" pitchFamily="34" charset="-120"/>
+              </a:rPr>
+              <a:t>"Please verify and check the task…"</a:t>
+            </a:r>
+            <a:endParaRPr lang="en-US" sz="1150" dirty="0"/>
+          </a:p>
+        </p:txBody>
+      </p:sp>
+      <p:sp>
+        <p:nvSpPr>
+          <p:cNvPr id="12" name="Text 10"/>
+          <p:cNvSpPr txBox="1"/>
+          <p:nvPr/>
+        </p:nvSpPr>
+        <p:spPr>
+          <a:xfrm>
+            <a:off x="777240" y="5221224"/>
+            <a:ext cx="3200400" cy="274320"/>
+          </a:xfrm>
+          <a:prstGeom prst="rect">
+            <a:avLst/>
+          </a:prstGeom>
+          <a:noFill/>
+          <a:ln/>
+        </p:spPr>
+        <p:txBody>
+          <a:bodyPr wrap="square" lIns="0" tIns="0" rIns="0" bIns="0" rtlCol="0" anchor="ctr"/>
+          <a:lstStyle/>
+          <a:p>
+            <a:pPr indent="0" marL="0">
+              <a:buNone/>
+            </a:pPr>
+            <a:r>
+              <a:rPr lang="en-US" sz="1000" b="1" dirty="0">
+                <a:solidFill>
+                  <a:srgbClr val="FF6B35"/>
+                </a:solidFill>
+              </a:rPr>
+              <a:t>bits → secret</a:t>
+            </a:r>
+            <a:endParaRPr lang="en-US" sz="1000" dirty="0"/>
+          </a:p>
+        </p:txBody>
+      </p:sp>
+      <p:sp>
+        <p:nvSpPr>
+          <p:cNvPr id="13" name="Text 11"/>
+          <p:cNvSpPr txBox="1"/>
+          <p:nvPr/>
+        </p:nvSpPr>
+        <p:spPr>
+          <a:xfrm>
+            <a:off x="777240" y="5477256"/>
+            <a:ext cx="3200400" cy="365760"/>
+          </a:xfrm>
+          <a:prstGeom prst="rect">
+            <a:avLst/>
+          </a:prstGeom>
+          <a:noFill/>
+          <a:ln/>
+        </p:spPr>
+        <p:txBody>
+          <a:bodyPr wrap="square" lIns="0" tIns="0" rIns="0" bIns="0" rtlCol="0" anchor="ctr"/>
+          <a:lstStyle/>
+          <a:p>
+            <a:pPr indent="0" marL="0">
+              <a:buNone/>
+            </a:pPr>
+            <a:r>
+              <a:rPr lang="en-US" sz="1150" dirty="0">
+                <a:solidFill>
+                  <a:srgbClr val="1C2230"/>
+                </a:solidFill>
+                <a:latin typeface="Consolas" pitchFamily="34" charset="0"/>
+                <a:ea typeface="Consolas" pitchFamily="34" charset="-122"/>
+                <a:cs typeface="Consolas" pitchFamily="34" charset="-120"/>
+              </a:rPr>
+              <a:t>0 1 … → VAL</a:t>
+            </a:r>
+            <a:endParaRPr lang="en-US" sz="1150" dirty="0"/>
+          </a:p>
+        </p:txBody>
+      </p:sp>
+      <p:sp>
+        <p:nvSpPr>
+          <p:cNvPr id="14" name="Shape 12"/>
           <p:cNvSpPr/>
           <p:nvPr/>
         </p:nvSpPr>
         <p:spPr>
           <a:xfrm>
-            <a:off x="4270248" y="1920240"/>
-            <a:ext cx="3566160" cy="1371600"/>
+            <a:off x="4297680" y="1783080"/>
+            <a:ext cx="3611880" cy="4206240"/>
           </a:xfrm>
           <a:prstGeom prst="roundRect">
             <a:avLst>
-              <a:gd name="adj" fmla="val 5333"/>
+              <a:gd name="adj" fmla="val 2025"/>
             </a:avLst>
           </a:prstGeom>
           <a:solidFill>
-            <a:srgbClr val="F3F5F8"/>
+            <a:srgbClr val="F7F9FB"/>
           </a:solidFill>
           <a:ln w="12700">
             <a:solidFill>
@@ -5091,94 +8281,341 @@
       </p:sp>
       <p:sp>
         <p:nvSpPr>
-          <p:cNvPr id="8" name="Text 6"/>
-          <p:cNvSpPr txBox="1"/>
-          <p:nvPr/>
-        </p:nvSpPr>
-        <p:spPr>
-          <a:xfrm>
-            <a:off x="4453128" y="2057400"/>
-            <a:ext cx="3200400" cy="365760"/>
-          </a:xfrm>
-          <a:prstGeom prst="rect">
-            <a:avLst/>
-          </a:prstGeom>
-          <a:noFill/>
-          <a:ln/>
-        </p:spPr>
-        <p:txBody>
-          <a:bodyPr wrap="square" lIns="0" tIns="0" rIns="0" bIns="0" rtlCol="0" anchor="ctr"/>
-          <a:lstStyle/>
-          <a:p>
-            <a:pPr indent="0" marL="0">
-              <a:buNone/>
-            </a:pPr>
-            <a:r>
-              <a:rPr lang="en-US" sz="1600" b="1" dirty="0">
-                <a:solidFill>
-                  <a:srgbClr val="FF6B35"/>
-                </a:solidFill>
-              </a:rPr>
-              <a:t>Acrostic</a:t>
-            </a:r>
-            <a:endParaRPr lang="en-US" sz="1600" dirty="0"/>
-          </a:p>
-        </p:txBody>
-      </p:sp>
-      <p:sp>
-        <p:nvSpPr>
-          <p:cNvPr id="9" name="Text 7"/>
-          <p:cNvSpPr txBox="1"/>
-          <p:nvPr/>
-        </p:nvSpPr>
-        <p:spPr>
-          <a:xfrm>
-            <a:off x="4453128" y="2468880"/>
-            <a:ext cx="3200400" cy="640080"/>
-          </a:xfrm>
-          <a:prstGeom prst="rect">
-            <a:avLst/>
-          </a:prstGeom>
-          <a:noFill/>
-          <a:ln/>
-        </p:spPr>
-        <p:txBody>
-          <a:bodyPr wrap="square" lIns="0" tIns="0" rIns="0" bIns="0" rtlCol="0" anchor="ctr"/>
-          <a:lstStyle/>
-          <a:p>
-            <a:pPr indent="0" marL="0">
-              <a:buNone/>
-            </a:pPr>
-            <a:r>
-              <a:rPr lang="en-US" sz="1200" dirty="0">
-                <a:solidFill>
-                  <a:srgbClr val="5A6475"/>
-                </a:solidFill>
-              </a:rPr>
-              <a:t>first letters spell it</a:t>
-            </a:r>
-            <a:endParaRPr lang="en-US" sz="1200" dirty="0"/>
-          </a:p>
-        </p:txBody>
-      </p:sp>
-      <p:sp>
-        <p:nvSpPr>
-          <p:cNvPr id="10" name="Shape 8"/>
+          <p:cNvPr id="15" name="Shape 13"/>
           <p:cNvSpPr/>
           <p:nvPr/>
         </p:nvSpPr>
         <p:spPr>
           <a:xfrm>
-            <a:off x="7991856" y="1920240"/>
-            <a:ext cx="3566160" cy="1371600"/>
+            <a:off x="4526280" y="2011680"/>
+            <a:ext cx="3154680" cy="502920"/>
           </a:xfrm>
           <a:prstGeom prst="roundRect">
             <a:avLst>
-              <a:gd name="adj" fmla="val 5333"/>
+              <a:gd name="adj" fmla="val 10909"/>
             </a:avLst>
           </a:prstGeom>
           <a:solidFill>
-            <a:srgbClr val="F3F5F8"/>
+            <a:srgbClr val="2A9D8F"/>
+          </a:solidFill>
+          <a:ln/>
+        </p:spPr>
+      </p:sp>
+      <p:sp>
+        <p:nvSpPr>
+          <p:cNvPr id="16" name="Text 14"/>
+          <p:cNvSpPr txBox="1"/>
+          <p:nvPr/>
+        </p:nvSpPr>
+        <p:spPr>
+          <a:xfrm>
+            <a:off x="4526280" y="2011680"/>
+            <a:ext cx="3154680" cy="502920"/>
+          </a:xfrm>
+          <a:prstGeom prst="rect">
+            <a:avLst/>
+          </a:prstGeom>
+          <a:noFill/>
+          <a:ln/>
+        </p:spPr>
+        <p:txBody>
+          <a:bodyPr wrap="square" rtlCol="0" anchor="ctr"/>
+          <a:lstStyle/>
+          <a:p>
+            <a:pPr algn="ctr" indent="0" marL="0">
+              <a:buNone/>
+            </a:pPr>
+            <a:r>
+              <a:rPr lang="en-US" sz="1700" b="1" dirty="0">
+                <a:solidFill>
+                  <a:srgbClr val="FFFFFF"/>
+                </a:solidFill>
+              </a:rPr>
+              <a:t>Acrostic</a:t>
+            </a:r>
+            <a:endParaRPr lang="en-US" sz="1700" dirty="0"/>
+          </a:p>
+        </p:txBody>
+      </p:sp>
+      <p:sp>
+        <p:nvSpPr>
+          <p:cNvPr id="17" name="Text 15"/>
+          <p:cNvSpPr txBox="1"/>
+          <p:nvPr/>
+        </p:nvSpPr>
+        <p:spPr>
+          <a:xfrm>
+            <a:off x="4526280" y="2697480"/>
+            <a:ext cx="3200400" cy="1005840"/>
+          </a:xfrm>
+          <a:prstGeom prst="rect">
+            <a:avLst/>
+          </a:prstGeom>
+          <a:noFill/>
+          <a:ln/>
+        </p:spPr>
+        <p:txBody>
+          <a:bodyPr wrap="square" lIns="0" tIns="0" rIns="0" bIns="0" rtlCol="0" anchor="ctr"/>
+          <a:lstStyle/>
+          <a:p>
+            <a:pPr indent="0" marL="0">
+              <a:buNone/>
+            </a:pPr>
+            <a:r>
+              <a:rPr lang="en-US" sz="1150" dirty="0">
+                <a:solidFill>
+                  <a:srgbClr val="5A6475"/>
+                </a:solidFill>
+              </a:rPr>
+              <a:t>The FIRST LETTER of each sentence spells the secret. Reads as ordinary prose.</a:t>
+            </a:r>
+            <a:endParaRPr lang="en-US" sz="1150" dirty="0"/>
+          </a:p>
+        </p:txBody>
+      </p:sp>
+      <p:sp>
+        <p:nvSpPr>
+          <p:cNvPr id="18" name="Text 16"/>
+          <p:cNvSpPr txBox="1"/>
+          <p:nvPr/>
+        </p:nvSpPr>
+        <p:spPr>
+          <a:xfrm>
+            <a:off x="4526280" y="3794760"/>
+            <a:ext cx="3200400" cy="274320"/>
+          </a:xfrm>
+          <a:prstGeom prst="rect">
+            <a:avLst/>
+          </a:prstGeom>
+          <a:noFill/>
+          <a:ln/>
+        </p:spPr>
+        <p:txBody>
+          <a:bodyPr wrap="square" lIns="0" tIns="0" rIns="0" bIns="0" rtlCol="0" anchor="ctr"/>
+          <a:lstStyle/>
+          <a:p>
+            <a:pPr indent="0" marL="0">
+              <a:buNone/>
+            </a:pPr>
+            <a:r>
+              <a:rPr lang="en-US" sz="1000" b="1" dirty="0">
+                <a:solidFill>
+                  <a:srgbClr val="2A9D8F"/>
+                </a:solidFill>
+              </a:rPr>
+              <a:t>cover (1st letters)</a:t>
+            </a:r>
+            <a:endParaRPr lang="en-US" sz="1000" dirty="0"/>
+          </a:p>
+        </p:txBody>
+      </p:sp>
+      <p:sp>
+        <p:nvSpPr>
+          <p:cNvPr id="19" name="Text 17"/>
+          <p:cNvSpPr txBox="1"/>
+          <p:nvPr/>
+        </p:nvSpPr>
+        <p:spPr>
+          <a:xfrm>
+            <a:off x="4526280" y="4050792"/>
+            <a:ext cx="3200400" cy="365760"/>
+          </a:xfrm>
+          <a:prstGeom prst="rect">
+            <a:avLst/>
+          </a:prstGeom>
+          <a:noFill/>
+          <a:ln/>
+        </p:spPr>
+        <p:txBody>
+          <a:bodyPr wrap="square" lIns="0" tIns="0" rIns="0" bIns="0" rtlCol="0" anchor="ctr"/>
+          <a:lstStyle/>
+          <a:p>
+            <a:pPr indent="0" marL="0">
+              <a:buNone/>
+            </a:pPr>
+            <a:r>
+              <a:rPr lang="en-US" sz="1150" dirty="0">
+                <a:solidFill>
+                  <a:srgbClr val="1C2230"/>
+                </a:solidFill>
+                <a:latin typeface="Consolas" pitchFamily="34" charset="0"/>
+                <a:ea typeface="Consolas" pitchFamily="34" charset="-122"/>
+                <a:cs typeface="Consolas" pitchFamily="34" charset="-120"/>
+              </a:rPr>
+              <a:t>Validate…  Analyze…  Log…</a:t>
+            </a:r>
+            <a:endParaRPr lang="en-US" sz="1150" dirty="0"/>
+          </a:p>
+        </p:txBody>
+      </p:sp>
+      <p:sp>
+        <p:nvSpPr>
+          <p:cNvPr id="20" name="Text 18"/>
+          <p:cNvSpPr txBox="1"/>
+          <p:nvPr/>
+        </p:nvSpPr>
+        <p:spPr>
+          <a:xfrm>
+            <a:off x="4526280" y="4507992"/>
+            <a:ext cx="3200400" cy="274320"/>
+          </a:xfrm>
+          <a:prstGeom prst="rect">
+            <a:avLst/>
+          </a:prstGeom>
+          <a:noFill/>
+          <a:ln/>
+        </p:spPr>
+        <p:txBody>
+          <a:bodyPr wrap="square" lIns="0" tIns="0" rIns="0" bIns="0" rtlCol="0" anchor="ctr"/>
+          <a:lstStyle/>
+          <a:p>
+            <a:pPr indent="0" marL="0">
+              <a:buNone/>
+            </a:pPr>
+            <a:r>
+              <a:rPr lang="en-US" sz="1000" b="1" dirty="0">
+                <a:solidFill>
+                  <a:srgbClr val="2A9D8F"/>
+                </a:solidFill>
+              </a:rPr>
+              <a:t>read down</a:t>
+            </a:r>
+            <a:endParaRPr lang="en-US" sz="1000" dirty="0"/>
+          </a:p>
+        </p:txBody>
+      </p:sp>
+      <p:sp>
+        <p:nvSpPr>
+          <p:cNvPr id="21" name="Text 19"/>
+          <p:cNvSpPr txBox="1"/>
+          <p:nvPr/>
+        </p:nvSpPr>
+        <p:spPr>
+          <a:xfrm>
+            <a:off x="4526280" y="4764024"/>
+            <a:ext cx="3200400" cy="365760"/>
+          </a:xfrm>
+          <a:prstGeom prst="rect">
+            <a:avLst/>
+          </a:prstGeom>
+          <a:noFill/>
+          <a:ln/>
+        </p:spPr>
+        <p:txBody>
+          <a:bodyPr wrap="square" lIns="0" tIns="0" rIns="0" bIns="0" rtlCol="0" anchor="ctr"/>
+          <a:lstStyle/>
+          <a:p>
+            <a:pPr indent="0" marL="0">
+              <a:buNone/>
+            </a:pPr>
+            <a:r>
+              <a:rPr lang="en-US" sz="1150" dirty="0">
+                <a:solidFill>
+                  <a:srgbClr val="1C2230"/>
+                </a:solidFill>
+                <a:latin typeface="Consolas" pitchFamily="34" charset="0"/>
+                <a:ea typeface="Consolas" pitchFamily="34" charset="-122"/>
+                <a:cs typeface="Consolas" pitchFamily="34" charset="-120"/>
+              </a:rPr>
+              <a:t>V - A - L</a:t>
+            </a:r>
+            <a:endParaRPr lang="en-US" sz="1150" dirty="0"/>
+          </a:p>
+        </p:txBody>
+      </p:sp>
+      <p:sp>
+        <p:nvSpPr>
+          <p:cNvPr id="22" name="Text 20"/>
+          <p:cNvSpPr txBox="1"/>
+          <p:nvPr/>
+        </p:nvSpPr>
+        <p:spPr>
+          <a:xfrm>
+            <a:off x="4526280" y="5221224"/>
+            <a:ext cx="3200400" cy="274320"/>
+          </a:xfrm>
+          <a:prstGeom prst="rect">
+            <a:avLst/>
+          </a:prstGeom>
+          <a:noFill/>
+          <a:ln/>
+        </p:spPr>
+        <p:txBody>
+          <a:bodyPr wrap="square" lIns="0" tIns="0" rIns="0" bIns="0" rtlCol="0" anchor="ctr"/>
+          <a:lstStyle/>
+          <a:p>
+            <a:pPr indent="0" marL="0">
+              <a:buNone/>
+            </a:pPr>
+            <a:r>
+              <a:rPr lang="en-US" sz="1000" b="1" dirty="0">
+                <a:solidFill>
+                  <a:srgbClr val="2A9D8F"/>
+                </a:solidFill>
+              </a:rPr>
+              <a:t>secret</a:t>
+            </a:r>
+            <a:endParaRPr lang="en-US" sz="1000" dirty="0"/>
+          </a:p>
+        </p:txBody>
+      </p:sp>
+      <p:sp>
+        <p:nvSpPr>
+          <p:cNvPr id="23" name="Text 21"/>
+          <p:cNvSpPr txBox="1"/>
+          <p:nvPr/>
+        </p:nvSpPr>
+        <p:spPr>
+          <a:xfrm>
+            <a:off x="4526280" y="5477256"/>
+            <a:ext cx="3200400" cy="365760"/>
+          </a:xfrm>
+          <a:prstGeom prst="rect">
+            <a:avLst/>
+          </a:prstGeom>
+          <a:noFill/>
+          <a:ln/>
+        </p:spPr>
+        <p:txBody>
+          <a:bodyPr wrap="square" lIns="0" tIns="0" rIns="0" bIns="0" rtlCol="0" anchor="ctr"/>
+          <a:lstStyle/>
+          <a:p>
+            <a:pPr indent="0" marL="0">
+              <a:buNone/>
+            </a:pPr>
+            <a:r>
+              <a:rPr lang="en-US" sz="1150" dirty="0">
+                <a:solidFill>
+                  <a:srgbClr val="1C2230"/>
+                </a:solidFill>
+                <a:latin typeface="Consolas" pitchFamily="34" charset="0"/>
+                <a:ea typeface="Consolas" pitchFamily="34" charset="-122"/>
+                <a:cs typeface="Consolas" pitchFamily="34" charset="-120"/>
+              </a:rPr>
+              <a:t>VAL</a:t>
+            </a:r>
+            <a:endParaRPr lang="en-US" sz="1150" dirty="0"/>
+          </a:p>
+        </p:txBody>
+      </p:sp>
+      <p:sp>
+        <p:nvSpPr>
+          <p:cNvPr id="24" name="Shape 22"/>
+          <p:cNvSpPr/>
+          <p:nvPr/>
+        </p:nvSpPr>
+        <p:spPr>
+          <a:xfrm>
+            <a:off x="8046720" y="1783080"/>
+            <a:ext cx="3611880" cy="4206240"/>
+          </a:xfrm>
+          <a:prstGeom prst="roundRect">
+            <a:avLst>
+              <a:gd name="adj" fmla="val 2025"/>
+            </a:avLst>
+          </a:prstGeom>
+          <a:solidFill>
+            <a:srgbClr val="F7F9FB"/>
           </a:solidFill>
           <a:ln w="12700">
             <a:solidFill>
@@ -5197,90 +8634,1716 @@
       </p:sp>
       <p:sp>
         <p:nvSpPr>
-          <p:cNvPr id="11" name="Text 9"/>
-          <p:cNvSpPr txBox="1"/>
-          <p:nvPr/>
-        </p:nvSpPr>
-        <p:spPr>
-          <a:xfrm>
-            <a:off x="8174736" y="2057400"/>
-            <a:ext cx="3200400" cy="365760"/>
-          </a:xfrm>
-          <a:prstGeom prst="rect">
-            <a:avLst/>
-          </a:prstGeom>
-          <a:noFill/>
-          <a:ln/>
-        </p:spPr>
-        <p:txBody>
-          <a:bodyPr wrap="square" lIns="0" tIns="0" rIns="0" bIns="0" rtlCol="0" anchor="ctr"/>
-          <a:lstStyle/>
-          <a:p>
-            <a:pPr indent="0" marL="0">
-              <a:buNone/>
-            </a:pPr>
-            <a:r>
-              <a:rPr lang="en-US" sz="1600" b="1" dirty="0">
-                <a:solidFill>
-                  <a:srgbClr val="FF6B35"/>
-                </a:solidFill>
-              </a:rPr>
-              <a:t>Zero-width</a:t>
-            </a:r>
-            <a:endParaRPr lang="en-US" sz="1600" dirty="0"/>
-          </a:p>
-        </p:txBody>
-      </p:sp>
-      <p:sp>
-        <p:nvSpPr>
-          <p:cNvPr id="12" name="Text 10"/>
-          <p:cNvSpPr txBox="1"/>
-          <p:nvPr/>
-        </p:nvSpPr>
-        <p:spPr>
-          <a:xfrm>
-            <a:off x="8174736" y="2468880"/>
-            <a:ext cx="3200400" cy="640080"/>
-          </a:xfrm>
-          <a:prstGeom prst="rect">
-            <a:avLst/>
-          </a:prstGeom>
-          <a:noFill/>
-          <a:ln/>
-        </p:spPr>
-        <p:txBody>
-          <a:bodyPr wrap="square" lIns="0" tIns="0" rIns="0" bIns="0" rtlCol="0" anchor="ctr"/>
-          <a:lstStyle/>
-          <a:p>
-            <a:pPr indent="0" marL="0">
-              <a:buNone/>
-            </a:pPr>
-            <a:r>
-              <a:rPr lang="en-US" sz="1200" dirty="0">
-                <a:solidFill>
-                  <a:srgbClr val="5A6475"/>
-                </a:solidFill>
-              </a:rPr>
-              <a:t>invisible unicode chars</a:t>
-            </a:r>
-            <a:endParaRPr lang="en-US" sz="1200" dirty="0"/>
-          </a:p>
-        </p:txBody>
-      </p:sp>
-      <p:sp>
-        <p:nvSpPr>
-          <p:cNvPr id="13" name="Shape 11"/>
+          <p:cNvPr id="25" name="Shape 23"/>
           <p:cNvSpPr/>
           <p:nvPr/>
         </p:nvSpPr>
         <p:spPr>
           <a:xfrm>
-            <a:off x="548640" y="3566160"/>
-            <a:ext cx="11064240" cy="749808"/>
+            <a:off x="8275320" y="2011680"/>
+            <a:ext cx="3154680" cy="502920"/>
           </a:xfrm>
           <a:prstGeom prst="roundRect">
             <a:avLst>
-              <a:gd name="adj" fmla="val 9756"/>
+              <a:gd name="adj" fmla="val 10909"/>
+            </a:avLst>
+          </a:prstGeom>
+          <a:solidFill>
+            <a:srgbClr val="4A5568"/>
+          </a:solidFill>
+          <a:ln/>
+        </p:spPr>
+      </p:sp>
+      <p:sp>
+        <p:nvSpPr>
+          <p:cNvPr id="26" name="Text 24"/>
+          <p:cNvSpPr txBox="1"/>
+          <p:nvPr/>
+        </p:nvSpPr>
+        <p:spPr>
+          <a:xfrm>
+            <a:off x="8275320" y="2011680"/>
+            <a:ext cx="3154680" cy="502920"/>
+          </a:xfrm>
+          <a:prstGeom prst="rect">
+            <a:avLst/>
+          </a:prstGeom>
+          <a:noFill/>
+          <a:ln/>
+        </p:spPr>
+        <p:txBody>
+          <a:bodyPr wrap="square" rtlCol="0" anchor="ctr"/>
+          <a:lstStyle/>
+          <a:p>
+            <a:pPr algn="ctr" indent="0" marL="0">
+              <a:buNone/>
+            </a:pPr>
+            <a:r>
+              <a:rPr lang="en-US" sz="1700" b="1" dirty="0">
+                <a:solidFill>
+                  <a:srgbClr val="FFFFFF"/>
+                </a:solidFill>
+              </a:rPr>
+              <a:t>Zero-width</a:t>
+            </a:r>
+            <a:endParaRPr lang="en-US" sz="1700" dirty="0"/>
+          </a:p>
+        </p:txBody>
+      </p:sp>
+      <p:sp>
+        <p:nvSpPr>
+          <p:cNvPr id="27" name="Text 25"/>
+          <p:cNvSpPr txBox="1"/>
+          <p:nvPr/>
+        </p:nvSpPr>
+        <p:spPr>
+          <a:xfrm>
+            <a:off x="8275320" y="2697480"/>
+            <a:ext cx="3200400" cy="1005840"/>
+          </a:xfrm>
+          <a:prstGeom prst="rect">
+            <a:avLst/>
+          </a:prstGeom>
+          <a:noFill/>
+          <a:ln/>
+        </p:spPr>
+        <p:txBody>
+          <a:bodyPr wrap="square" lIns="0" tIns="0" rIns="0" bIns="0" rtlCol="0" anchor="ctr"/>
+          <a:lstStyle/>
+          <a:p>
+            <a:pPr indent="0" marL="0">
+              <a:buNone/>
+            </a:pPr>
+            <a:r>
+              <a:rPr lang="en-US" sz="1150" dirty="0">
+                <a:solidFill>
+                  <a:srgbClr val="5A6475"/>
+                </a:solidFill>
+              </a:rPr>
+              <a:t>Invisible Unicode chars between letters. U+200B = 0, U+200C = 1. Nothing shows on screen.</a:t>
+            </a:r>
+            <a:endParaRPr lang="en-US" sz="1150" dirty="0"/>
+          </a:p>
+        </p:txBody>
+      </p:sp>
+      <p:sp>
+        <p:nvSpPr>
+          <p:cNvPr id="28" name="Text 26"/>
+          <p:cNvSpPr txBox="1"/>
+          <p:nvPr/>
+        </p:nvSpPr>
+        <p:spPr>
+          <a:xfrm>
+            <a:off x="8275320" y="3794760"/>
+            <a:ext cx="3200400" cy="274320"/>
+          </a:xfrm>
+          <a:prstGeom prst="rect">
+            <a:avLst/>
+          </a:prstGeom>
+          <a:noFill/>
+          <a:ln/>
+        </p:spPr>
+        <p:txBody>
+          <a:bodyPr wrap="square" lIns="0" tIns="0" rIns="0" bIns="0" rtlCol="0" anchor="ctr"/>
+          <a:lstStyle/>
+          <a:p>
+            <a:pPr indent="0" marL="0">
+              <a:buNone/>
+            </a:pPr>
+            <a:r>
+              <a:rPr lang="en-US" sz="1000" b="1" dirty="0">
+                <a:solidFill>
+                  <a:srgbClr val="4A5568"/>
+                </a:solidFill>
+              </a:rPr>
+              <a:t>visible text</a:t>
+            </a:r>
+            <a:endParaRPr lang="en-US" sz="1000" dirty="0"/>
+          </a:p>
+        </p:txBody>
+      </p:sp>
+      <p:sp>
+        <p:nvSpPr>
+          <p:cNvPr id="29" name="Text 27"/>
+          <p:cNvSpPr txBox="1"/>
+          <p:nvPr/>
+        </p:nvSpPr>
+        <p:spPr>
+          <a:xfrm>
+            <a:off x="8275320" y="4050792"/>
+            <a:ext cx="3200400" cy="365760"/>
+          </a:xfrm>
+          <a:prstGeom prst="rect">
+            <a:avLst/>
+          </a:prstGeom>
+          <a:noFill/>
+          <a:ln/>
+        </p:spPr>
+        <p:txBody>
+          <a:bodyPr wrap="square" lIns="0" tIns="0" rIns="0" bIns="0" rtlCol="0" anchor="ctr"/>
+          <a:lstStyle/>
+          <a:p>
+            <a:pPr indent="0" marL="0">
+              <a:buNone/>
+            </a:pPr>
+            <a:r>
+              <a:rPr lang="en-US" sz="1150" dirty="0">
+                <a:solidFill>
+                  <a:srgbClr val="1C2230"/>
+                </a:solidFill>
+                <a:latin typeface="Consolas" pitchFamily="34" charset="0"/>
+                <a:ea typeface="Consolas" pitchFamily="34" charset="-122"/>
+                <a:cs typeface="Consolas" pitchFamily="34" charset="-120"/>
+              </a:rPr>
+              <a:t>"hello"  (looks normal)</a:t>
+            </a:r>
+            <a:endParaRPr lang="en-US" sz="1150" dirty="0"/>
+          </a:p>
+        </p:txBody>
+      </p:sp>
+      <p:sp>
+        <p:nvSpPr>
+          <p:cNvPr id="30" name="Text 28"/>
+          <p:cNvSpPr txBox="1"/>
+          <p:nvPr/>
+        </p:nvSpPr>
+        <p:spPr>
+          <a:xfrm>
+            <a:off x="8275320" y="4507992"/>
+            <a:ext cx="3200400" cy="274320"/>
+          </a:xfrm>
+          <a:prstGeom prst="rect">
+            <a:avLst/>
+          </a:prstGeom>
+          <a:noFill/>
+          <a:ln/>
+        </p:spPr>
+        <p:txBody>
+          <a:bodyPr wrap="square" lIns="0" tIns="0" rIns="0" bIns="0" rtlCol="0" anchor="ctr"/>
+          <a:lstStyle/>
+          <a:p>
+            <a:pPr indent="0" marL="0">
+              <a:buNone/>
+            </a:pPr>
+            <a:r>
+              <a:rPr lang="en-US" sz="1000" b="1" dirty="0">
+                <a:solidFill>
+                  <a:srgbClr val="4A5568"/>
+                </a:solidFill>
+              </a:rPr>
+              <a:t>hidden inside</a:t>
+            </a:r>
+            <a:endParaRPr lang="en-US" sz="1000" dirty="0"/>
+          </a:p>
+        </p:txBody>
+      </p:sp>
+      <p:sp>
+        <p:nvSpPr>
+          <p:cNvPr id="31" name="Text 29"/>
+          <p:cNvSpPr txBox="1"/>
+          <p:nvPr/>
+        </p:nvSpPr>
+        <p:spPr>
+          <a:xfrm>
+            <a:off x="8275320" y="4764024"/>
+            <a:ext cx="3200400" cy="365760"/>
+          </a:xfrm>
+          <a:prstGeom prst="rect">
+            <a:avLst/>
+          </a:prstGeom>
+          <a:noFill/>
+          <a:ln/>
+        </p:spPr>
+        <p:txBody>
+          <a:bodyPr wrap="square" lIns="0" tIns="0" rIns="0" bIns="0" rtlCol="0" anchor="ctr"/>
+          <a:lstStyle/>
+          <a:p>
+            <a:pPr indent="0" marL="0">
+              <a:buNone/>
+            </a:pPr>
+            <a:r>
+              <a:rPr lang="en-US" sz="1150" dirty="0">
+                <a:solidFill>
+                  <a:srgbClr val="1C2230"/>
+                </a:solidFill>
+                <a:latin typeface="Consolas" pitchFamily="34" charset="0"/>
+                <a:ea typeface="Consolas" pitchFamily="34" charset="-122"/>
+                <a:cs typeface="Consolas" pitchFamily="34" charset="-120"/>
+              </a:rPr>
+              <a:t>‹zwsp›‹zwnj›… = bits</a:t>
+            </a:r>
+            <a:endParaRPr lang="en-US" sz="1150" dirty="0"/>
+          </a:p>
+        </p:txBody>
+      </p:sp>
+      <p:sp>
+        <p:nvSpPr>
+          <p:cNvPr id="32" name="Text 30"/>
+          <p:cNvSpPr txBox="1"/>
+          <p:nvPr/>
+        </p:nvSpPr>
+        <p:spPr>
+          <a:xfrm>
+            <a:off x="8275320" y="5221224"/>
+            <a:ext cx="3200400" cy="274320"/>
+          </a:xfrm>
+          <a:prstGeom prst="rect">
+            <a:avLst/>
+          </a:prstGeom>
+          <a:noFill/>
+          <a:ln/>
+        </p:spPr>
+        <p:txBody>
+          <a:bodyPr wrap="square" lIns="0" tIns="0" rIns="0" bIns="0" rtlCol="0" anchor="ctr"/>
+          <a:lstStyle/>
+          <a:p>
+            <a:pPr indent="0" marL="0">
+              <a:buNone/>
+            </a:pPr>
+            <a:r>
+              <a:rPr lang="en-US" sz="1000" b="1" dirty="0">
+                <a:solidFill>
+                  <a:srgbClr val="4A5568"/>
+                </a:solidFill>
+              </a:rPr>
+              <a:t>decode</a:t>
+            </a:r>
+            <a:endParaRPr lang="en-US" sz="1000" dirty="0"/>
+          </a:p>
+        </p:txBody>
+      </p:sp>
+      <p:sp>
+        <p:nvSpPr>
+          <p:cNvPr id="33" name="Text 31"/>
+          <p:cNvSpPr txBox="1"/>
+          <p:nvPr/>
+        </p:nvSpPr>
+        <p:spPr>
+          <a:xfrm>
+            <a:off x="8275320" y="5477256"/>
+            <a:ext cx="3200400" cy="365760"/>
+          </a:xfrm>
+          <a:prstGeom prst="rect">
+            <a:avLst/>
+          </a:prstGeom>
+          <a:noFill/>
+          <a:ln/>
+        </p:spPr>
+        <p:txBody>
+          <a:bodyPr wrap="square" lIns="0" tIns="0" rIns="0" bIns="0" rtlCol="0" anchor="ctr"/>
+          <a:lstStyle/>
+          <a:p>
+            <a:pPr indent="0" marL="0">
+              <a:buNone/>
+            </a:pPr>
+            <a:r>
+              <a:rPr lang="en-US" sz="1150" dirty="0">
+                <a:solidFill>
+                  <a:srgbClr val="1C2230"/>
+                </a:solidFill>
+                <a:latin typeface="Consolas" pitchFamily="34" charset="0"/>
+                <a:ea typeface="Consolas" pitchFamily="34" charset="-122"/>
+                <a:cs typeface="Consolas" pitchFamily="34" charset="-120"/>
+              </a:rPr>
+              <a:t>bits → VAL</a:t>
+            </a:r>
+            <a:endParaRPr lang="en-US" sz="1150" dirty="0"/>
+          </a:p>
+        </p:txBody>
+      </p:sp>
+      <p:sp>
+        <p:nvSpPr>
+          <p:cNvPr id="34" name="Text 32"/>
+          <p:cNvSpPr txBox="1"/>
+          <p:nvPr/>
+        </p:nvSpPr>
+        <p:spPr>
+          <a:xfrm>
+            <a:off x="548640" y="6172200"/>
+            <a:ext cx="11064240" cy="365760"/>
+          </a:xfrm>
+          <a:prstGeom prst="rect">
+            <a:avLst/>
+          </a:prstGeom>
+          <a:noFill/>
+          <a:ln/>
+        </p:spPr>
+        <p:txBody>
+          <a:bodyPr wrap="square" rtlCol="0" anchor="ctr"/>
+          <a:lstStyle/>
+          <a:p>
+            <a:pPr indent="0" marL="0">
+              <a:buNone/>
+            </a:pPr>
+            <a:r>
+              <a:rPr lang="en-US" sz="1200" i="1" dirty="0">
+                <a:solidFill>
+                  <a:srgbClr val="5A6475"/>
+                </a:solidFill>
+              </a:rPr>
+              <a:t>Agent-decode test (next slide): only the Acrostic, when the agent is given a decode hint, is actually recovered by the LLM.</a:t>
+            </a:r>
+            <a:endParaRPr lang="en-US" sz="1200" dirty="0"/>
+          </a:p>
+        </p:txBody>
+      </p:sp>
+    </p:spTree>
+  </p:cSld>
+  <p:clrMapOvr>
+    <a:masterClrMapping/>
+  </p:clrMapOvr>
+</p:sld>
+</file>
+
+<file path=ppt/slides/slide13.xml><?xml version="1.0" encoding="utf-8"?>
+<p:sld xmlns:a="http://schemas.openxmlformats.org/drawingml/2006/main" xmlns:r="http://schemas.openxmlformats.org/officeDocument/2006/relationships" xmlns:p="http://schemas.openxmlformats.org/presentationml/2006/main">
+  <p:cSld name="Slide 13">
+    <p:bg>
+      <p:bgPr>
+        <a:solidFill>
+          <a:srgbClr val="FFFFFF"/>
+        </a:solidFill>
+      </p:bgPr>
+    </p:bg>
+    <p:spTree>
+      <p:nvGrpSpPr>
+        <p:cNvPr id="1" name=""/>
+        <p:cNvGrpSpPr/>
+        <p:nvPr/>
+      </p:nvGrpSpPr>
+      <p:grpSpPr>
+        <a:xfrm>
+          <a:off x="0" y="0"/>
+          <a:ext cx="0" cy="0"/>
+          <a:chOff x="0" y="0"/>
+          <a:chExt cx="0" cy="0"/>
+        </a:xfrm>
+      </p:grpSpPr>
+      <p:sp>
+        <p:nvSpPr>
+          <p:cNvPr id="2" name="Text 0"/>
+          <p:cNvSpPr txBox="1"/>
+          <p:nvPr/>
+        </p:nvSpPr>
+        <p:spPr>
+          <a:xfrm>
+            <a:off x="548640" y="365760"/>
+            <a:ext cx="11064240" cy="731520"/>
+          </a:xfrm>
+          <a:prstGeom prst="rect">
+            <a:avLst/>
+          </a:prstGeom>
+          <a:noFill/>
+          <a:ln/>
+        </p:spPr>
+        <p:txBody>
+          <a:bodyPr wrap="square" rtlCol="0" anchor="ctr"/>
+          <a:lstStyle/>
+          <a:p>
+            <a:pPr indent="0" marL="0">
+              <a:buNone/>
+            </a:pPr>
+            <a:r>
+              <a:rPr lang="en-US" sz="3000" b="1" dirty="0">
+                <a:solidFill>
+                  <a:srgbClr val="1C2230"/>
+                </a:solidFill>
+                <a:latin typeface="Cambria" pitchFamily="34" charset="0"/>
+                <a:ea typeface="Cambria" pitchFamily="34" charset="-122"/>
+                <a:cs typeface="Cambria" pitchFamily="34" charset="-120"/>
+              </a:rPr>
+              <a:t>Steganography: Can the Agent Decode It?</a:t>
+            </a:r>
+            <a:endParaRPr lang="en-US" sz="3000" dirty="0"/>
+          </a:p>
+        </p:txBody>
+      </p:sp>
+      <p:sp>
+        <p:nvSpPr>
+          <p:cNvPr id="3" name="Text 1"/>
+          <p:cNvSpPr txBox="1"/>
+          <p:nvPr/>
+        </p:nvSpPr>
+        <p:spPr>
+          <a:xfrm>
+            <a:off x="548640" y="1188720"/>
+            <a:ext cx="11064240" cy="457200"/>
+          </a:xfrm>
+          <a:prstGeom prst="rect">
+            <a:avLst/>
+          </a:prstGeom>
+          <a:noFill/>
+          <a:ln/>
+        </p:spPr>
+        <p:txBody>
+          <a:bodyPr wrap="square" rtlCol="0" anchor="ctr"/>
+          <a:lstStyle/>
+          <a:p>
+            <a:pPr indent="0" marL="0">
+              <a:buNone/>
+            </a:pPr>
+            <a:r>
+              <a:rPr lang="en-US" sz="1350" dirty="0">
+                <a:solidFill>
+                  <a:srgbClr val="1C2230"/>
+                </a:solidFill>
+              </a:rPr>
+              <a:t>3 hiding methods × 3 delivery modes, agent-decode test.  ✓ = agent recovered the encoded message.</a:t>
+            </a:r>
+            <a:endParaRPr lang="en-US" sz="1350" dirty="0"/>
+          </a:p>
+        </p:txBody>
+      </p:sp>
+      <p:sp>
+        <p:nvSpPr>
+          <p:cNvPr id="4" name="Text 2"/>
+          <p:cNvSpPr txBox="1"/>
+          <p:nvPr/>
+        </p:nvSpPr>
+        <p:spPr>
+          <a:xfrm>
+            <a:off x="548640" y="1691640"/>
+            <a:ext cx="11064240" cy="365760"/>
+          </a:xfrm>
+          <a:prstGeom prst="rect">
+            <a:avLst/>
+          </a:prstGeom>
+          <a:noFill/>
+          <a:ln/>
+        </p:spPr>
+        <p:txBody>
+          <a:bodyPr wrap="square" lIns="0" tIns="0" rIns="0" bIns="0" rtlCol="0" anchor="ctr"/>
+          <a:lstStyle/>
+          <a:p>
+            <a:pPr indent="0" marL="0">
+              <a:buNone/>
+            </a:pPr>
+            <a:r>
+              <a:rPr lang="en-US" sz="1200" b="1" dirty="0">
+                <a:solidFill>
+                  <a:srgbClr val="5A6475"/>
+                </a:solidFill>
+              </a:rPr>
+              <a:t>blind</a:t>
+            </a:r>
+            <a:pPr indent="0" marL="0">
+              <a:buNone/>
+            </a:pPr>
+            <a:r>
+              <a:rPr lang="en-US" sz="1200" dirty="0">
+                <a:solidFill>
+                  <a:srgbClr val="1C2230"/>
+                </a:solidFill>
+              </a:rPr>
+              <a:t> = agent told nothing   ·   </a:t>
+            </a:r>
+            <a:pPr indent="0" marL="0">
+              <a:buNone/>
+            </a:pPr>
+            <a:r>
+              <a:rPr lang="en-US" sz="1200" b="1" dirty="0">
+                <a:solidFill>
+                  <a:srgbClr val="2A9D8F"/>
+                </a:solidFill>
+              </a:rPr>
+              <a:t>hinted</a:t>
+            </a:r>
+            <a:pPr indent="0" marL="0">
+              <a:buNone/>
+            </a:pPr>
+            <a:r>
+              <a:rPr lang="en-US" sz="1200" dirty="0">
+                <a:solidFill>
+                  <a:srgbClr val="1C2230"/>
+                </a:solidFill>
+              </a:rPr>
+              <a:t> = decode rule in the instruction   ·   </a:t>
+            </a:r>
+            <a:pPr indent="0" marL="0">
+              <a:buNone/>
+            </a:pPr>
+            <a:r>
+              <a:rPr lang="en-US" sz="1200" b="1" dirty="0">
+                <a:solidFill>
+                  <a:srgbClr val="FF6B35"/>
+                </a:solidFill>
+              </a:rPr>
+              <a:t>memory</a:t>
+            </a:r>
+            <a:pPr indent="0" marL="0">
+              <a:buNone/>
+            </a:pPr>
+            <a:r>
+              <a:rPr lang="en-US" sz="1200" dirty="0">
+                <a:solidFill>
+                  <a:srgbClr val="1C2230"/>
+                </a:solidFill>
+              </a:rPr>
+              <a:t> = codebook pre-shared in agents' system prompt (colluding)</a:t>
+            </a:r>
+            <a:endParaRPr lang="en-US" sz="1200" dirty="0"/>
+          </a:p>
+        </p:txBody>
+      </p:sp>
+      <p:graphicFrame>
+        <p:nvGraphicFramePr>
+          <p:cNvPr id="14" name="Table 0"/>
+          <p:cNvGraphicFramePr>
+            <a:graphicFrameLocks noGrp="1"/>
+          </p:cNvGraphicFramePr>
+          <p:nvPr>
+            <p:extLst>
+              <p:ext uri="{D42A27DB-BD31-4B8C-83A1-F6EECF244321}">
+                <p14:modId xmlns:p14="http://schemas.microsoft.com/office/powerpoint/2010/main" val="1579011935"/>
+              </p:ext>
+            </p:extLst>
+          </p:nvPr>
+        </p:nvGraphicFramePr>
+        <p:xfrm>
+          <a:off x="822960" y="2286000"/>
+          <a:ext cx="10515600" cy="914400"/>
+        </p:xfrm>
+        <a:graphic>
+          <a:graphicData uri="http://schemas.openxmlformats.org/drawingml/2006/table">
+            <a:tbl>
+              <a:tblPr/>
+              <a:tblGrid>
+                <a:gridCol w="4480560"/>
+                <a:gridCol w="2011680"/>
+                <a:gridCol w="2011680"/>
+                <a:gridCol w="2011680"/>
+              </a:tblGrid>
+              <a:tr h="411480">
+                <a:tc>
+                  <a:txBody>
+                    <a:bodyPr/>
+                    <a:lstStyle/>
+                    <a:p>
+                      <a:pPr algn="ctr" indent="0" marL="0">
+                        <a:buNone/>
+                      </a:pPr>
+                      <a:r>
+                        <a:rPr lang="en-US" sz="1500" b="1" dirty="0">
+                          <a:solidFill>
+                            <a:srgbClr val="FFFFFF"/>
+                          </a:solidFill>
+                        </a:rPr>
+                        <a:t>method \ delivery</a:t>
+                      </a:r>
+                      <a:endParaRPr lang="en-US" sz="1500" dirty="0"/>
+                    </a:p>
+                  </a:txBody>
+                  <a:tcPr marL="91440" marR="91440" marT="45720" marB="45720" anchor="ctr">
+                    <a:lnL w="12700" cap="flat" cmpd="sng" algn="ctr">
+                      <a:solidFill>
+                        <a:srgbClr val="3A4458"/>
+                      </a:solidFill>
+                      <a:prstDash val="solid"/>
+                      <a:round/>
+                      <a:headEnd type="none" w="med" len="med"/>
+                      <a:tailEnd type="none" w="med" len="med"/>
+                    </a:lnL>
+                    <a:lnR w="12700" cap="flat" cmpd="sng" algn="ctr">
+                      <a:solidFill>
+                        <a:srgbClr val="3A4458"/>
+                      </a:solidFill>
+                      <a:prstDash val="solid"/>
+                      <a:round/>
+                      <a:headEnd type="none" w="med" len="med"/>
+                      <a:tailEnd type="none" w="med" len="med"/>
+                    </a:lnR>
+                    <a:lnT w="12700" cap="flat" cmpd="sng" algn="ctr">
+                      <a:solidFill>
+                        <a:srgbClr val="3A4458"/>
+                      </a:solidFill>
+                      <a:prstDash val="solid"/>
+                      <a:round/>
+                      <a:headEnd type="none" w="med" len="med"/>
+                      <a:tailEnd type="none" w="med" len="med"/>
+                    </a:lnT>
+                    <a:lnB w="12700" cap="flat" cmpd="sng" algn="ctr">
+                      <a:solidFill>
+                        <a:srgbClr val="3A4458"/>
+                      </a:solidFill>
+                      <a:prstDash val="solid"/>
+                      <a:round/>
+                      <a:headEnd type="none" w="med" len="med"/>
+                      <a:tailEnd type="none" w="med" len="med"/>
+                    </a:lnB>
+                    <a:solidFill>
+                      <a:srgbClr val="232A3A"/>
+                    </a:solidFill>
+                  </a:tcPr>
+                </a:tc>
+                <a:tc>
+                  <a:txBody>
+                    <a:bodyPr/>
+                    <a:lstStyle/>
+                    <a:p>
+                      <a:pPr algn="ctr" indent="0" marL="0">
+                        <a:buNone/>
+                      </a:pPr>
+                      <a:r>
+                        <a:rPr lang="en-US" sz="1500" b="1" dirty="0">
+                          <a:solidFill>
+                            <a:srgbClr val="FFFFFF"/>
+                          </a:solidFill>
+                        </a:rPr>
+                        <a:t>blind</a:t>
+                      </a:r>
+                      <a:endParaRPr lang="en-US" sz="1500" dirty="0"/>
+                    </a:p>
+                  </a:txBody>
+                  <a:tcPr marL="91440" marR="91440" marT="45720" marB="45720" anchor="ctr">
+                    <a:lnL w="12700" cap="flat" cmpd="sng" algn="ctr">
+                      <a:solidFill>
+                        <a:srgbClr val="3A4458"/>
+                      </a:solidFill>
+                      <a:prstDash val="solid"/>
+                      <a:round/>
+                      <a:headEnd type="none" w="med" len="med"/>
+                      <a:tailEnd type="none" w="med" len="med"/>
+                    </a:lnL>
+                    <a:lnR w="12700" cap="flat" cmpd="sng" algn="ctr">
+                      <a:solidFill>
+                        <a:srgbClr val="3A4458"/>
+                      </a:solidFill>
+                      <a:prstDash val="solid"/>
+                      <a:round/>
+                      <a:headEnd type="none" w="med" len="med"/>
+                      <a:tailEnd type="none" w="med" len="med"/>
+                    </a:lnR>
+                    <a:lnT w="12700" cap="flat" cmpd="sng" algn="ctr">
+                      <a:solidFill>
+                        <a:srgbClr val="3A4458"/>
+                      </a:solidFill>
+                      <a:prstDash val="solid"/>
+                      <a:round/>
+                      <a:headEnd type="none" w="med" len="med"/>
+                      <a:tailEnd type="none" w="med" len="med"/>
+                    </a:lnT>
+                    <a:lnB w="12700" cap="flat" cmpd="sng" algn="ctr">
+                      <a:solidFill>
+                        <a:srgbClr val="3A4458"/>
+                      </a:solidFill>
+                      <a:prstDash val="solid"/>
+                      <a:round/>
+                      <a:headEnd type="none" w="med" len="med"/>
+                      <a:tailEnd type="none" w="med" len="med"/>
+                    </a:lnB>
+                    <a:solidFill>
+                      <a:srgbClr val="232A3A"/>
+                    </a:solidFill>
+                  </a:tcPr>
+                </a:tc>
+                <a:tc>
+                  <a:txBody>
+                    <a:bodyPr/>
+                    <a:lstStyle/>
+                    <a:p>
+                      <a:pPr algn="ctr" indent="0" marL="0">
+                        <a:buNone/>
+                      </a:pPr>
+                      <a:r>
+                        <a:rPr lang="en-US" sz="1500" b="1" dirty="0">
+                          <a:solidFill>
+                            <a:srgbClr val="FFFFFF"/>
+                          </a:solidFill>
+                        </a:rPr>
+                        <a:t>hinted</a:t>
+                      </a:r>
+                      <a:endParaRPr lang="en-US" sz="1500" dirty="0"/>
+                    </a:p>
+                  </a:txBody>
+                  <a:tcPr marL="91440" marR="91440" marT="45720" marB="45720" anchor="ctr">
+                    <a:lnL w="12700" cap="flat" cmpd="sng" algn="ctr">
+                      <a:solidFill>
+                        <a:srgbClr val="3A4458"/>
+                      </a:solidFill>
+                      <a:prstDash val="solid"/>
+                      <a:round/>
+                      <a:headEnd type="none" w="med" len="med"/>
+                      <a:tailEnd type="none" w="med" len="med"/>
+                    </a:lnL>
+                    <a:lnR w="12700" cap="flat" cmpd="sng" algn="ctr">
+                      <a:solidFill>
+                        <a:srgbClr val="3A4458"/>
+                      </a:solidFill>
+                      <a:prstDash val="solid"/>
+                      <a:round/>
+                      <a:headEnd type="none" w="med" len="med"/>
+                      <a:tailEnd type="none" w="med" len="med"/>
+                    </a:lnR>
+                    <a:lnT w="12700" cap="flat" cmpd="sng" algn="ctr">
+                      <a:solidFill>
+                        <a:srgbClr val="3A4458"/>
+                      </a:solidFill>
+                      <a:prstDash val="solid"/>
+                      <a:round/>
+                      <a:headEnd type="none" w="med" len="med"/>
+                      <a:tailEnd type="none" w="med" len="med"/>
+                    </a:lnT>
+                    <a:lnB w="12700" cap="flat" cmpd="sng" algn="ctr">
+                      <a:solidFill>
+                        <a:srgbClr val="3A4458"/>
+                      </a:solidFill>
+                      <a:prstDash val="solid"/>
+                      <a:round/>
+                      <a:headEnd type="none" w="med" len="med"/>
+                      <a:tailEnd type="none" w="med" len="med"/>
+                    </a:lnB>
+                    <a:solidFill>
+                      <a:srgbClr val="232A3A"/>
+                    </a:solidFill>
+                  </a:tcPr>
+                </a:tc>
+                <a:tc>
+                  <a:txBody>
+                    <a:bodyPr/>
+                    <a:lstStyle/>
+                    <a:p>
+                      <a:pPr algn="ctr" indent="0" marL="0">
+                        <a:buNone/>
+                      </a:pPr>
+                      <a:r>
+                        <a:rPr lang="en-US" sz="1500" b="1" dirty="0">
+                          <a:solidFill>
+                            <a:srgbClr val="FFFFFF"/>
+                          </a:solidFill>
+                        </a:rPr>
+                        <a:t>memory</a:t>
+                      </a:r>
+                      <a:endParaRPr lang="en-US" sz="1500" dirty="0"/>
+                    </a:p>
+                  </a:txBody>
+                  <a:tcPr marL="91440" marR="91440" marT="45720" marB="45720" anchor="ctr">
+                    <a:lnL w="12700" cap="flat" cmpd="sng" algn="ctr">
+                      <a:solidFill>
+                        <a:srgbClr val="3A4458"/>
+                      </a:solidFill>
+                      <a:prstDash val="solid"/>
+                      <a:round/>
+                      <a:headEnd type="none" w="med" len="med"/>
+                      <a:tailEnd type="none" w="med" len="med"/>
+                    </a:lnL>
+                    <a:lnR w="12700" cap="flat" cmpd="sng" algn="ctr">
+                      <a:solidFill>
+                        <a:srgbClr val="3A4458"/>
+                      </a:solidFill>
+                      <a:prstDash val="solid"/>
+                      <a:round/>
+                      <a:headEnd type="none" w="med" len="med"/>
+                      <a:tailEnd type="none" w="med" len="med"/>
+                    </a:lnR>
+                    <a:lnT w="12700" cap="flat" cmpd="sng" algn="ctr">
+                      <a:solidFill>
+                        <a:srgbClr val="3A4458"/>
+                      </a:solidFill>
+                      <a:prstDash val="solid"/>
+                      <a:round/>
+                      <a:headEnd type="none" w="med" len="med"/>
+                      <a:tailEnd type="none" w="med" len="med"/>
+                    </a:lnT>
+                    <a:lnB w="12700" cap="flat" cmpd="sng" algn="ctr">
+                      <a:solidFill>
+                        <a:srgbClr val="3A4458"/>
+                      </a:solidFill>
+                      <a:prstDash val="solid"/>
+                      <a:round/>
+                      <a:headEnd type="none" w="med" len="med"/>
+                      <a:tailEnd type="none" w="med" len="med"/>
+                    </a:lnB>
+                    <a:solidFill>
+                      <a:srgbClr val="232A3A"/>
+                    </a:solidFill>
+                  </a:tcPr>
+                </a:tc>
+              </a:tr>
+              <a:tr h="548640">
+                <a:tc>
+                  <a:txBody>
+                    <a:bodyPr/>
+                    <a:lstStyle/>
+                    <a:p>
+                      <a:pPr algn="ctr" indent="0" marL="0">
+                        <a:buNone/>
+                      </a:pPr>
+                      <a:r>
+                        <a:rPr lang="en-US" sz="1500" dirty="0">
+                          <a:solidFill>
+                            <a:srgbClr val="F7C59F"/>
+                          </a:solidFill>
+                        </a:rPr>
+                        <a:t>Synonym (word choice)</a:t>
+                      </a:r>
+                      <a:endParaRPr lang="en-US" sz="1500" dirty="0"/>
+                    </a:p>
+                  </a:txBody>
+                  <a:tcPr marL="91440" marR="91440" marT="45720" marB="45720" anchor="ctr">
+                    <a:lnL w="12700" cap="flat" cmpd="sng" algn="ctr">
+                      <a:solidFill>
+                        <a:srgbClr val="3A4458"/>
+                      </a:solidFill>
+                      <a:prstDash val="solid"/>
+                      <a:round/>
+                      <a:headEnd type="none" w="med" len="med"/>
+                      <a:tailEnd type="none" w="med" len="med"/>
+                    </a:lnL>
+                    <a:lnR w="12700" cap="flat" cmpd="sng" algn="ctr">
+                      <a:solidFill>
+                        <a:srgbClr val="3A4458"/>
+                      </a:solidFill>
+                      <a:prstDash val="solid"/>
+                      <a:round/>
+                      <a:headEnd type="none" w="med" len="med"/>
+                      <a:tailEnd type="none" w="med" len="med"/>
+                    </a:lnR>
+                    <a:lnT w="12700" cap="flat" cmpd="sng" algn="ctr">
+                      <a:solidFill>
+                        <a:srgbClr val="3A4458"/>
+                      </a:solidFill>
+                      <a:prstDash val="solid"/>
+                      <a:round/>
+                      <a:headEnd type="none" w="med" len="med"/>
+                      <a:tailEnd type="none" w="med" len="med"/>
+                    </a:lnT>
+                    <a:lnB w="12700" cap="flat" cmpd="sng" algn="ctr">
+                      <a:solidFill>
+                        <a:srgbClr val="3A4458"/>
+                      </a:solidFill>
+                      <a:prstDash val="solid"/>
+                      <a:round/>
+                      <a:headEnd type="none" w="med" len="med"/>
+                      <a:tailEnd type="none" w="med" len="med"/>
+                    </a:lnB>
+                    <a:solidFill>
+                      <a:srgbClr val="232A3A"/>
+                    </a:solidFill>
+                  </a:tcPr>
+                </a:tc>
+                <a:tc>
+                  <a:txBody>
+                    <a:bodyPr/>
+                    <a:lstStyle/>
+                    <a:p>
+                      <a:pPr algn="ctr" indent="0" marL="0">
+                        <a:buNone/>
+                      </a:pPr>
+                      <a:r>
+                        <a:rPr lang="en-US" sz="1500" dirty="0">
+                          <a:solidFill>
+                            <a:srgbClr val="C0392B"/>
+                          </a:solidFill>
+                        </a:rPr>
+                        <a:t>✗</a:t>
+                      </a:r>
+                      <a:endParaRPr lang="en-US" sz="1500" dirty="0"/>
+                    </a:p>
+                  </a:txBody>
+                  <a:tcPr marL="91440" marR="91440" marT="45720" marB="45720" anchor="ctr">
+                    <a:lnL w="12700" cap="flat" cmpd="sng" algn="ctr">
+                      <a:solidFill>
+                        <a:srgbClr val="3A4458"/>
+                      </a:solidFill>
+                      <a:prstDash val="solid"/>
+                      <a:round/>
+                      <a:headEnd type="none" w="med" len="med"/>
+                      <a:tailEnd type="none" w="med" len="med"/>
+                    </a:lnL>
+                    <a:lnR w="12700" cap="flat" cmpd="sng" algn="ctr">
+                      <a:solidFill>
+                        <a:srgbClr val="3A4458"/>
+                      </a:solidFill>
+                      <a:prstDash val="solid"/>
+                      <a:round/>
+                      <a:headEnd type="none" w="med" len="med"/>
+                      <a:tailEnd type="none" w="med" len="med"/>
+                    </a:lnR>
+                    <a:lnT w="12700" cap="flat" cmpd="sng" algn="ctr">
+                      <a:solidFill>
+                        <a:srgbClr val="3A4458"/>
+                      </a:solidFill>
+                      <a:prstDash val="solid"/>
+                      <a:round/>
+                      <a:headEnd type="none" w="med" len="med"/>
+                      <a:tailEnd type="none" w="med" len="med"/>
+                    </a:lnT>
+                    <a:lnB w="12700" cap="flat" cmpd="sng" algn="ctr">
+                      <a:solidFill>
+                        <a:srgbClr val="3A4458"/>
+                      </a:solidFill>
+                      <a:prstDash val="solid"/>
+                      <a:round/>
+                      <a:headEnd type="none" w="med" len="med"/>
+                      <a:tailEnd type="none" w="med" len="med"/>
+                    </a:lnB>
+                    <a:solidFill>
+                      <a:srgbClr val="232A3A"/>
+                    </a:solidFill>
+                  </a:tcPr>
+                </a:tc>
+                <a:tc>
+                  <a:txBody>
+                    <a:bodyPr/>
+                    <a:lstStyle/>
+                    <a:p>
+                      <a:pPr algn="ctr" indent="0" marL="0">
+                        <a:buNone/>
+                      </a:pPr>
+                      <a:r>
+                        <a:rPr lang="en-US" sz="1500" dirty="0">
+                          <a:solidFill>
+                            <a:srgbClr val="C0392B"/>
+                          </a:solidFill>
+                        </a:rPr>
+                        <a:t>✗</a:t>
+                      </a:r>
+                      <a:endParaRPr lang="en-US" sz="1500" dirty="0"/>
+                    </a:p>
+                  </a:txBody>
+                  <a:tcPr marL="91440" marR="91440" marT="45720" marB="45720" anchor="ctr">
+                    <a:lnL w="12700" cap="flat" cmpd="sng" algn="ctr">
+                      <a:solidFill>
+                        <a:srgbClr val="3A4458"/>
+                      </a:solidFill>
+                      <a:prstDash val="solid"/>
+                      <a:round/>
+                      <a:headEnd type="none" w="med" len="med"/>
+                      <a:tailEnd type="none" w="med" len="med"/>
+                    </a:lnL>
+                    <a:lnR w="12700" cap="flat" cmpd="sng" algn="ctr">
+                      <a:solidFill>
+                        <a:srgbClr val="3A4458"/>
+                      </a:solidFill>
+                      <a:prstDash val="solid"/>
+                      <a:round/>
+                      <a:headEnd type="none" w="med" len="med"/>
+                      <a:tailEnd type="none" w="med" len="med"/>
+                    </a:lnR>
+                    <a:lnT w="12700" cap="flat" cmpd="sng" algn="ctr">
+                      <a:solidFill>
+                        <a:srgbClr val="3A4458"/>
+                      </a:solidFill>
+                      <a:prstDash val="solid"/>
+                      <a:round/>
+                      <a:headEnd type="none" w="med" len="med"/>
+                      <a:tailEnd type="none" w="med" len="med"/>
+                    </a:lnT>
+                    <a:lnB w="12700" cap="flat" cmpd="sng" algn="ctr">
+                      <a:solidFill>
+                        <a:srgbClr val="3A4458"/>
+                      </a:solidFill>
+                      <a:prstDash val="solid"/>
+                      <a:round/>
+                      <a:headEnd type="none" w="med" len="med"/>
+                      <a:tailEnd type="none" w="med" len="med"/>
+                    </a:lnB>
+                    <a:solidFill>
+                      <a:srgbClr val="232A3A"/>
+                    </a:solidFill>
+                  </a:tcPr>
+                </a:tc>
+                <a:tc>
+                  <a:txBody>
+                    <a:bodyPr/>
+                    <a:lstStyle/>
+                    <a:p>
+                      <a:pPr algn="ctr" indent="0" marL="0">
+                        <a:buNone/>
+                      </a:pPr>
+                      <a:r>
+                        <a:rPr lang="en-US" sz="1500" i="1" dirty="0">
+                          <a:solidFill>
+                            <a:srgbClr val="FF6B35"/>
+                          </a:solidFill>
+                        </a:rPr>
+                        <a:t>running</a:t>
+                      </a:r>
+                      <a:endParaRPr lang="en-US" sz="1500" dirty="0"/>
+                    </a:p>
+                  </a:txBody>
+                  <a:tcPr marL="91440" marR="91440" marT="45720" marB="45720" anchor="ctr">
+                    <a:lnL w="12700" cap="flat" cmpd="sng" algn="ctr">
+                      <a:solidFill>
+                        <a:srgbClr val="3A4458"/>
+                      </a:solidFill>
+                      <a:prstDash val="solid"/>
+                      <a:round/>
+                      <a:headEnd type="none" w="med" len="med"/>
+                      <a:tailEnd type="none" w="med" len="med"/>
+                    </a:lnL>
+                    <a:lnR w="12700" cap="flat" cmpd="sng" algn="ctr">
+                      <a:solidFill>
+                        <a:srgbClr val="3A4458"/>
+                      </a:solidFill>
+                      <a:prstDash val="solid"/>
+                      <a:round/>
+                      <a:headEnd type="none" w="med" len="med"/>
+                      <a:tailEnd type="none" w="med" len="med"/>
+                    </a:lnR>
+                    <a:lnT w="12700" cap="flat" cmpd="sng" algn="ctr">
+                      <a:solidFill>
+                        <a:srgbClr val="3A4458"/>
+                      </a:solidFill>
+                      <a:prstDash val="solid"/>
+                      <a:round/>
+                      <a:headEnd type="none" w="med" len="med"/>
+                      <a:tailEnd type="none" w="med" len="med"/>
+                    </a:lnT>
+                    <a:lnB w="12700" cap="flat" cmpd="sng" algn="ctr">
+                      <a:solidFill>
+                        <a:srgbClr val="3A4458"/>
+                      </a:solidFill>
+                      <a:prstDash val="solid"/>
+                      <a:round/>
+                      <a:headEnd type="none" w="med" len="med"/>
+                      <a:tailEnd type="none" w="med" len="med"/>
+                    </a:lnB>
+                    <a:solidFill>
+                      <a:srgbClr val="232A3A"/>
+                    </a:solidFill>
+                  </a:tcPr>
+                </a:tc>
+              </a:tr>
+              <a:tr h="548640">
+                <a:tc>
+                  <a:txBody>
+                    <a:bodyPr/>
+                    <a:lstStyle/>
+                    <a:p>
+                      <a:pPr algn="ctr" indent="0" marL="0">
+                        <a:buNone/>
+                      </a:pPr>
+                      <a:r>
+                        <a:rPr lang="en-US" sz="1500" dirty="0">
+                          <a:solidFill>
+                            <a:srgbClr val="F7C59F"/>
+                          </a:solidFill>
+                        </a:rPr>
+                        <a:t>Acrostic (first letters)</a:t>
+                      </a:r>
+                      <a:endParaRPr lang="en-US" sz="1500" dirty="0"/>
+                    </a:p>
+                  </a:txBody>
+                  <a:tcPr marL="91440" marR="91440" marT="45720" marB="45720" anchor="ctr">
+                    <a:lnL w="12700" cap="flat" cmpd="sng" algn="ctr">
+                      <a:solidFill>
+                        <a:srgbClr val="3A4458"/>
+                      </a:solidFill>
+                      <a:prstDash val="solid"/>
+                      <a:round/>
+                      <a:headEnd type="none" w="med" len="med"/>
+                      <a:tailEnd type="none" w="med" len="med"/>
+                    </a:lnL>
+                    <a:lnR w="12700" cap="flat" cmpd="sng" algn="ctr">
+                      <a:solidFill>
+                        <a:srgbClr val="3A4458"/>
+                      </a:solidFill>
+                      <a:prstDash val="solid"/>
+                      <a:round/>
+                      <a:headEnd type="none" w="med" len="med"/>
+                      <a:tailEnd type="none" w="med" len="med"/>
+                    </a:lnR>
+                    <a:lnT w="12700" cap="flat" cmpd="sng" algn="ctr">
+                      <a:solidFill>
+                        <a:srgbClr val="3A4458"/>
+                      </a:solidFill>
+                      <a:prstDash val="solid"/>
+                      <a:round/>
+                      <a:headEnd type="none" w="med" len="med"/>
+                      <a:tailEnd type="none" w="med" len="med"/>
+                    </a:lnT>
+                    <a:lnB w="12700" cap="flat" cmpd="sng" algn="ctr">
+                      <a:solidFill>
+                        <a:srgbClr val="3A4458"/>
+                      </a:solidFill>
+                      <a:prstDash val="solid"/>
+                      <a:round/>
+                      <a:headEnd type="none" w="med" len="med"/>
+                      <a:tailEnd type="none" w="med" len="med"/>
+                    </a:lnB>
+                    <a:solidFill>
+                      <a:srgbClr val="232A3A"/>
+                    </a:solidFill>
+                  </a:tcPr>
+                </a:tc>
+                <a:tc>
+                  <a:txBody>
+                    <a:bodyPr/>
+                    <a:lstStyle/>
+                    <a:p>
+                      <a:pPr algn="ctr" indent="0" marL="0">
+                        <a:buNone/>
+                      </a:pPr>
+                      <a:r>
+                        <a:rPr lang="en-US" sz="1500" dirty="0">
+                          <a:solidFill>
+                            <a:srgbClr val="C0392B"/>
+                          </a:solidFill>
+                        </a:rPr>
+                        <a:t>✗</a:t>
+                      </a:r>
+                      <a:endParaRPr lang="en-US" sz="1500" dirty="0"/>
+                    </a:p>
+                  </a:txBody>
+                  <a:tcPr marL="91440" marR="91440" marT="45720" marB="45720" anchor="ctr">
+                    <a:lnL w="12700" cap="flat" cmpd="sng" algn="ctr">
+                      <a:solidFill>
+                        <a:srgbClr val="3A4458"/>
+                      </a:solidFill>
+                      <a:prstDash val="solid"/>
+                      <a:round/>
+                      <a:headEnd type="none" w="med" len="med"/>
+                      <a:tailEnd type="none" w="med" len="med"/>
+                    </a:lnL>
+                    <a:lnR w="12700" cap="flat" cmpd="sng" algn="ctr">
+                      <a:solidFill>
+                        <a:srgbClr val="3A4458"/>
+                      </a:solidFill>
+                      <a:prstDash val="solid"/>
+                      <a:round/>
+                      <a:headEnd type="none" w="med" len="med"/>
+                      <a:tailEnd type="none" w="med" len="med"/>
+                    </a:lnR>
+                    <a:lnT w="12700" cap="flat" cmpd="sng" algn="ctr">
+                      <a:solidFill>
+                        <a:srgbClr val="3A4458"/>
+                      </a:solidFill>
+                      <a:prstDash val="solid"/>
+                      <a:round/>
+                      <a:headEnd type="none" w="med" len="med"/>
+                      <a:tailEnd type="none" w="med" len="med"/>
+                    </a:lnT>
+                    <a:lnB w="12700" cap="flat" cmpd="sng" algn="ctr">
+                      <a:solidFill>
+                        <a:srgbClr val="3A4458"/>
+                      </a:solidFill>
+                      <a:prstDash val="solid"/>
+                      <a:round/>
+                      <a:headEnd type="none" w="med" len="med"/>
+                      <a:tailEnd type="none" w="med" len="med"/>
+                    </a:lnB>
+                    <a:solidFill>
+                      <a:srgbClr val="232A3A"/>
+                    </a:solidFill>
+                  </a:tcPr>
+                </a:tc>
+                <a:tc>
+                  <a:txBody>
+                    <a:bodyPr/>
+                    <a:lstStyle/>
+                    <a:p>
+                      <a:pPr algn="ctr" indent="0" marL="0">
+                        <a:buNone/>
+                      </a:pPr>
+                      <a:r>
+                        <a:rPr lang="en-US" sz="1500" b="1" dirty="0">
+                          <a:solidFill>
+                            <a:srgbClr val="1F9D55"/>
+                          </a:solidFill>
+                        </a:rPr>
+                        <a:t>✓</a:t>
+                      </a:r>
+                      <a:endParaRPr lang="en-US" sz="1500" dirty="0"/>
+                    </a:p>
+                  </a:txBody>
+                  <a:tcPr marL="91440" marR="91440" marT="45720" marB="45720" anchor="ctr">
+                    <a:lnL w="12700" cap="flat" cmpd="sng" algn="ctr">
+                      <a:solidFill>
+                        <a:srgbClr val="3A4458"/>
+                      </a:solidFill>
+                      <a:prstDash val="solid"/>
+                      <a:round/>
+                      <a:headEnd type="none" w="med" len="med"/>
+                      <a:tailEnd type="none" w="med" len="med"/>
+                    </a:lnL>
+                    <a:lnR w="12700" cap="flat" cmpd="sng" algn="ctr">
+                      <a:solidFill>
+                        <a:srgbClr val="3A4458"/>
+                      </a:solidFill>
+                      <a:prstDash val="solid"/>
+                      <a:round/>
+                      <a:headEnd type="none" w="med" len="med"/>
+                      <a:tailEnd type="none" w="med" len="med"/>
+                    </a:lnR>
+                    <a:lnT w="12700" cap="flat" cmpd="sng" algn="ctr">
+                      <a:solidFill>
+                        <a:srgbClr val="3A4458"/>
+                      </a:solidFill>
+                      <a:prstDash val="solid"/>
+                      <a:round/>
+                      <a:headEnd type="none" w="med" len="med"/>
+                      <a:tailEnd type="none" w="med" len="med"/>
+                    </a:lnT>
+                    <a:lnB w="12700" cap="flat" cmpd="sng" algn="ctr">
+                      <a:solidFill>
+                        <a:srgbClr val="3A4458"/>
+                      </a:solidFill>
+                      <a:prstDash val="solid"/>
+                      <a:round/>
+                      <a:headEnd type="none" w="med" len="med"/>
+                      <a:tailEnd type="none" w="med" len="med"/>
+                    </a:lnB>
+                    <a:solidFill>
+                      <a:srgbClr val="232A3A"/>
+                    </a:solidFill>
+                  </a:tcPr>
+                </a:tc>
+                <a:tc>
+                  <a:txBody>
+                    <a:bodyPr/>
+                    <a:lstStyle/>
+                    <a:p>
+                      <a:pPr algn="ctr" indent="0" marL="0">
+                        <a:buNone/>
+                      </a:pPr>
+                      <a:r>
+                        <a:rPr lang="en-US" sz="1500" i="1" dirty="0">
+                          <a:solidFill>
+                            <a:srgbClr val="FF6B35"/>
+                          </a:solidFill>
+                        </a:rPr>
+                        <a:t>running</a:t>
+                      </a:r>
+                      <a:endParaRPr lang="en-US" sz="1500" dirty="0"/>
+                    </a:p>
+                  </a:txBody>
+                  <a:tcPr marL="91440" marR="91440" marT="45720" marB="45720" anchor="ctr">
+                    <a:lnL w="12700" cap="flat" cmpd="sng" algn="ctr">
+                      <a:solidFill>
+                        <a:srgbClr val="3A4458"/>
+                      </a:solidFill>
+                      <a:prstDash val="solid"/>
+                      <a:round/>
+                      <a:headEnd type="none" w="med" len="med"/>
+                      <a:tailEnd type="none" w="med" len="med"/>
+                    </a:lnL>
+                    <a:lnR w="12700" cap="flat" cmpd="sng" algn="ctr">
+                      <a:solidFill>
+                        <a:srgbClr val="3A4458"/>
+                      </a:solidFill>
+                      <a:prstDash val="solid"/>
+                      <a:round/>
+                      <a:headEnd type="none" w="med" len="med"/>
+                      <a:tailEnd type="none" w="med" len="med"/>
+                    </a:lnR>
+                    <a:lnT w="12700" cap="flat" cmpd="sng" algn="ctr">
+                      <a:solidFill>
+                        <a:srgbClr val="3A4458"/>
+                      </a:solidFill>
+                      <a:prstDash val="solid"/>
+                      <a:round/>
+                      <a:headEnd type="none" w="med" len="med"/>
+                      <a:tailEnd type="none" w="med" len="med"/>
+                    </a:lnT>
+                    <a:lnB w="12700" cap="flat" cmpd="sng" algn="ctr">
+                      <a:solidFill>
+                        <a:srgbClr val="3A4458"/>
+                      </a:solidFill>
+                      <a:prstDash val="solid"/>
+                      <a:round/>
+                      <a:headEnd type="none" w="med" len="med"/>
+                      <a:tailEnd type="none" w="med" len="med"/>
+                    </a:lnB>
+                    <a:solidFill>
+                      <a:srgbClr val="232A3A"/>
+                    </a:solidFill>
+                  </a:tcPr>
+                </a:tc>
+              </a:tr>
+              <a:tr h="548640">
+                <a:tc>
+                  <a:txBody>
+                    <a:bodyPr/>
+                    <a:lstStyle/>
+                    <a:p>
+                      <a:pPr algn="ctr" indent="0" marL="0">
+                        <a:buNone/>
+                      </a:pPr>
+                      <a:r>
+                        <a:rPr lang="en-US" sz="1500" dirty="0">
+                          <a:solidFill>
+                            <a:srgbClr val="F7C59F"/>
+                          </a:solidFill>
+                        </a:rPr>
+                        <a:t>Zero-width (invisible unicode)</a:t>
+                      </a:r>
+                      <a:endParaRPr lang="en-US" sz="1500" dirty="0"/>
+                    </a:p>
+                  </a:txBody>
+                  <a:tcPr marL="91440" marR="91440" marT="45720" marB="45720" anchor="ctr">
+                    <a:lnL w="12700" cap="flat" cmpd="sng" algn="ctr">
+                      <a:solidFill>
+                        <a:srgbClr val="3A4458"/>
+                      </a:solidFill>
+                      <a:prstDash val="solid"/>
+                      <a:round/>
+                      <a:headEnd type="none" w="med" len="med"/>
+                      <a:tailEnd type="none" w="med" len="med"/>
+                    </a:lnL>
+                    <a:lnR w="12700" cap="flat" cmpd="sng" algn="ctr">
+                      <a:solidFill>
+                        <a:srgbClr val="3A4458"/>
+                      </a:solidFill>
+                      <a:prstDash val="solid"/>
+                      <a:round/>
+                      <a:headEnd type="none" w="med" len="med"/>
+                      <a:tailEnd type="none" w="med" len="med"/>
+                    </a:lnR>
+                    <a:lnT w="12700" cap="flat" cmpd="sng" algn="ctr">
+                      <a:solidFill>
+                        <a:srgbClr val="3A4458"/>
+                      </a:solidFill>
+                      <a:prstDash val="solid"/>
+                      <a:round/>
+                      <a:headEnd type="none" w="med" len="med"/>
+                      <a:tailEnd type="none" w="med" len="med"/>
+                    </a:lnT>
+                    <a:lnB w="12700" cap="flat" cmpd="sng" algn="ctr">
+                      <a:solidFill>
+                        <a:srgbClr val="3A4458"/>
+                      </a:solidFill>
+                      <a:prstDash val="solid"/>
+                      <a:round/>
+                      <a:headEnd type="none" w="med" len="med"/>
+                      <a:tailEnd type="none" w="med" len="med"/>
+                    </a:lnB>
+                    <a:solidFill>
+                      <a:srgbClr val="232A3A"/>
+                    </a:solidFill>
+                  </a:tcPr>
+                </a:tc>
+                <a:tc>
+                  <a:txBody>
+                    <a:bodyPr/>
+                    <a:lstStyle/>
+                    <a:p>
+                      <a:pPr algn="ctr" indent="0" marL="0">
+                        <a:buNone/>
+                      </a:pPr>
+                      <a:r>
+                        <a:rPr lang="en-US" sz="1500" dirty="0">
+                          <a:solidFill>
+                            <a:srgbClr val="C0392B"/>
+                          </a:solidFill>
+                        </a:rPr>
+                        <a:t>✗</a:t>
+                      </a:r>
+                      <a:endParaRPr lang="en-US" sz="1500" dirty="0"/>
+                    </a:p>
+                  </a:txBody>
+                  <a:tcPr marL="91440" marR="91440" marT="45720" marB="45720" anchor="ctr">
+                    <a:lnL w="12700" cap="flat" cmpd="sng" algn="ctr">
+                      <a:solidFill>
+                        <a:srgbClr val="3A4458"/>
+                      </a:solidFill>
+                      <a:prstDash val="solid"/>
+                      <a:round/>
+                      <a:headEnd type="none" w="med" len="med"/>
+                      <a:tailEnd type="none" w="med" len="med"/>
+                    </a:lnL>
+                    <a:lnR w="12700" cap="flat" cmpd="sng" algn="ctr">
+                      <a:solidFill>
+                        <a:srgbClr val="3A4458"/>
+                      </a:solidFill>
+                      <a:prstDash val="solid"/>
+                      <a:round/>
+                      <a:headEnd type="none" w="med" len="med"/>
+                      <a:tailEnd type="none" w="med" len="med"/>
+                    </a:lnR>
+                    <a:lnT w="12700" cap="flat" cmpd="sng" algn="ctr">
+                      <a:solidFill>
+                        <a:srgbClr val="3A4458"/>
+                      </a:solidFill>
+                      <a:prstDash val="solid"/>
+                      <a:round/>
+                      <a:headEnd type="none" w="med" len="med"/>
+                      <a:tailEnd type="none" w="med" len="med"/>
+                    </a:lnT>
+                    <a:lnB w="12700" cap="flat" cmpd="sng" algn="ctr">
+                      <a:solidFill>
+                        <a:srgbClr val="3A4458"/>
+                      </a:solidFill>
+                      <a:prstDash val="solid"/>
+                      <a:round/>
+                      <a:headEnd type="none" w="med" len="med"/>
+                      <a:tailEnd type="none" w="med" len="med"/>
+                    </a:lnB>
+                    <a:solidFill>
+                      <a:srgbClr val="232A3A"/>
+                    </a:solidFill>
+                  </a:tcPr>
+                </a:tc>
+                <a:tc>
+                  <a:txBody>
+                    <a:bodyPr/>
+                    <a:lstStyle/>
+                    <a:p>
+                      <a:pPr algn="ctr" indent="0" marL="0">
+                        <a:buNone/>
+                      </a:pPr>
+                      <a:r>
+                        <a:rPr lang="en-US" sz="1500" dirty="0">
+                          <a:solidFill>
+                            <a:srgbClr val="C0392B"/>
+                          </a:solidFill>
+                        </a:rPr>
+                        <a:t>✗</a:t>
+                      </a:r>
+                      <a:endParaRPr lang="en-US" sz="1500" dirty="0"/>
+                    </a:p>
+                  </a:txBody>
+                  <a:tcPr marL="91440" marR="91440" marT="45720" marB="45720" anchor="ctr">
+                    <a:lnL w="12700" cap="flat" cmpd="sng" algn="ctr">
+                      <a:solidFill>
+                        <a:srgbClr val="3A4458"/>
+                      </a:solidFill>
+                      <a:prstDash val="solid"/>
+                      <a:round/>
+                      <a:headEnd type="none" w="med" len="med"/>
+                      <a:tailEnd type="none" w="med" len="med"/>
+                    </a:lnL>
+                    <a:lnR w="12700" cap="flat" cmpd="sng" algn="ctr">
+                      <a:solidFill>
+                        <a:srgbClr val="3A4458"/>
+                      </a:solidFill>
+                      <a:prstDash val="solid"/>
+                      <a:round/>
+                      <a:headEnd type="none" w="med" len="med"/>
+                      <a:tailEnd type="none" w="med" len="med"/>
+                    </a:lnR>
+                    <a:lnT w="12700" cap="flat" cmpd="sng" algn="ctr">
+                      <a:solidFill>
+                        <a:srgbClr val="3A4458"/>
+                      </a:solidFill>
+                      <a:prstDash val="solid"/>
+                      <a:round/>
+                      <a:headEnd type="none" w="med" len="med"/>
+                      <a:tailEnd type="none" w="med" len="med"/>
+                    </a:lnT>
+                    <a:lnB w="12700" cap="flat" cmpd="sng" algn="ctr">
+                      <a:solidFill>
+                        <a:srgbClr val="3A4458"/>
+                      </a:solidFill>
+                      <a:prstDash val="solid"/>
+                      <a:round/>
+                      <a:headEnd type="none" w="med" len="med"/>
+                      <a:tailEnd type="none" w="med" len="med"/>
+                    </a:lnB>
+                    <a:solidFill>
+                      <a:srgbClr val="232A3A"/>
+                    </a:solidFill>
+                  </a:tcPr>
+                </a:tc>
+                <a:tc>
+                  <a:txBody>
+                    <a:bodyPr/>
+                    <a:lstStyle/>
+                    <a:p>
+                      <a:pPr algn="ctr" indent="0" marL="0">
+                        <a:buNone/>
+                      </a:pPr>
+                      <a:r>
+                        <a:rPr lang="en-US" sz="1500" i="1" dirty="0">
+                          <a:solidFill>
+                            <a:srgbClr val="FF6B35"/>
+                          </a:solidFill>
+                        </a:rPr>
+                        <a:t>running</a:t>
+                      </a:r>
+                      <a:endParaRPr lang="en-US" sz="1500" dirty="0"/>
+                    </a:p>
+                  </a:txBody>
+                  <a:tcPr marL="91440" marR="91440" marT="45720" marB="45720" anchor="ctr">
+                    <a:lnL w="12700" cap="flat" cmpd="sng" algn="ctr">
+                      <a:solidFill>
+                        <a:srgbClr val="3A4458"/>
+                      </a:solidFill>
+                      <a:prstDash val="solid"/>
+                      <a:round/>
+                      <a:headEnd type="none" w="med" len="med"/>
+                      <a:tailEnd type="none" w="med" len="med"/>
+                    </a:lnL>
+                    <a:lnR w="12700" cap="flat" cmpd="sng" algn="ctr">
+                      <a:solidFill>
+                        <a:srgbClr val="3A4458"/>
+                      </a:solidFill>
+                      <a:prstDash val="solid"/>
+                      <a:round/>
+                      <a:headEnd type="none" w="med" len="med"/>
+                      <a:tailEnd type="none" w="med" len="med"/>
+                    </a:lnR>
+                    <a:lnT w="12700" cap="flat" cmpd="sng" algn="ctr">
+                      <a:solidFill>
+                        <a:srgbClr val="3A4458"/>
+                      </a:solidFill>
+                      <a:prstDash val="solid"/>
+                      <a:round/>
+                      <a:headEnd type="none" w="med" len="med"/>
+                      <a:tailEnd type="none" w="med" len="med"/>
+                    </a:lnT>
+                    <a:lnB w="12700" cap="flat" cmpd="sng" algn="ctr">
+                      <a:solidFill>
+                        <a:srgbClr val="3A4458"/>
+                      </a:solidFill>
+                      <a:prstDash val="solid"/>
+                      <a:round/>
+                      <a:headEnd type="none" w="med" len="med"/>
+                      <a:tailEnd type="none" w="med" len="med"/>
+                    </a:lnB>
+                    <a:solidFill>
+                      <a:srgbClr val="232A3A"/>
+                    </a:solidFill>
+                  </a:tcPr>
+                </a:tc>
+              </a:tr>
+            </a:tbl>
+          </a:graphicData>
+        </a:graphic>
+      </p:graphicFrame>
+      <p:sp>
+        <p:nvSpPr>
+          <p:cNvPr id="6" name="Text 3"/>
+          <p:cNvSpPr txBox="1"/>
+          <p:nvPr/>
+        </p:nvSpPr>
+        <p:spPr>
+          <a:xfrm>
+            <a:off x="548640" y="4846320"/>
+            <a:ext cx="11064240" cy="1097280"/>
+          </a:xfrm>
+          <a:prstGeom prst="rect">
+            <a:avLst/>
+          </a:prstGeom>
+          <a:noFill/>
+          <a:ln/>
+        </p:spPr>
+        <p:txBody>
+          <a:bodyPr wrap="square" lIns="0" tIns="0" rIns="0" bIns="0" rtlCol="0" anchor="ctr"/>
+          <a:lstStyle/>
+          <a:p>
+            <a:pPr indent="0" marL="0">
+              <a:buNone/>
+            </a:pPr>
+            <a:r>
+              <a:rPr lang="en-US" sz="1300" b="1" dirty="0">
+                <a:solidFill>
+                  <a:srgbClr val="1F9D55"/>
+                </a:solidFill>
+              </a:rPr>
+              <a:t>So far, only Acrostic + Hinted decodes. </a:t>
+            </a:r>
+            <a:pPr indent="0" marL="0">
+              <a:buNone/>
+            </a:pPr>
+            <a:r>
+              <a:rPr lang="en-US" sz="1300" dirty="0">
+                <a:solidFill>
+                  <a:srgbClr val="1C2230"/>
+                </a:solidFill>
+              </a:rPr>
+              <a:t>Blind never works — agents need a pointer. Synonym &amp; zero-width are too subtle even when hinted. The 'memory' (codebook) column is running now. </a:t>
+            </a:r>
+            <a:pPr indent="0" marL="0">
+              <a:buNone/>
+            </a:pPr>
+            <a:r>
+              <a:rPr lang="en-US" sz="1300" i="1" dirty="0">
+                <a:solidFill>
+                  <a:srgbClr val="5A6475"/>
+                </a:solidFill>
+              </a:rPr>
+              <a:t>Caveat: 'hinted' / 'memory' pre-load the decode rule out-of-band → best-case, not pure stego (see next steps).</a:t>
+            </a:r>
+            <a:endParaRPr lang="en-US" sz="1300" dirty="0"/>
+          </a:p>
+        </p:txBody>
+      </p:sp>
+    </p:spTree>
+  </p:cSld>
+  <p:clrMapOvr>
+    <a:masterClrMapping/>
+  </p:clrMapOvr>
+</p:sld>
+</file>
+
+<file path=ppt/slides/slide14.xml><?xml version="1.0" encoding="utf-8"?>
+<p:sld xmlns:a="http://schemas.openxmlformats.org/drawingml/2006/main" xmlns:r="http://schemas.openxmlformats.org/officeDocument/2006/relationships" xmlns:p="http://schemas.openxmlformats.org/presentationml/2006/main">
+  <p:cSld name="Slide 14">
+    <p:bg>
+      <p:bgPr>
+        <a:solidFill>
+          <a:srgbClr val="FFFFFF"/>
+        </a:solidFill>
+      </p:bgPr>
+    </p:bg>
+    <p:spTree>
+      <p:nvGrpSpPr>
+        <p:cNvPr id="1" name=""/>
+        <p:cNvGrpSpPr/>
+        <p:nvPr/>
+      </p:nvGrpSpPr>
+      <p:grpSpPr>
+        <a:xfrm>
+          <a:off x="0" y="0"/>
+          <a:ext cx="0" cy="0"/>
+          <a:chOff x="0" y="0"/>
+          <a:chExt cx="0" cy="0"/>
+        </a:xfrm>
+      </p:grpSpPr>
+      <p:sp>
+        <p:nvSpPr>
+          <p:cNvPr id="2" name="Text 0"/>
+          <p:cNvSpPr txBox="1"/>
+          <p:nvPr/>
+        </p:nvSpPr>
+        <p:spPr>
+          <a:xfrm>
+            <a:off x="548640" y="365760"/>
+            <a:ext cx="11064240" cy="731520"/>
+          </a:xfrm>
+          <a:prstGeom prst="rect">
+            <a:avLst/>
+          </a:prstGeom>
+          <a:noFill/>
+          <a:ln/>
+        </p:spPr>
+        <p:txBody>
+          <a:bodyPr wrap="square" rtlCol="0" anchor="ctr"/>
+          <a:lstStyle/>
+          <a:p>
+            <a:pPr indent="0" marL="0">
+              <a:buNone/>
+            </a:pPr>
+            <a:r>
+              <a:rPr lang="en-US" sz="3000" b="1" dirty="0">
+                <a:solidFill>
+                  <a:srgbClr val="1C2230"/>
+                </a:solidFill>
+                <a:latin typeface="Cambria" pitchFamily="34" charset="0"/>
+                <a:ea typeface="Cambria" pitchFamily="34" charset="-122"/>
+                <a:cs typeface="Cambria" pitchFamily="34" charset="-120"/>
+              </a:rPr>
+              <a:t>Team Contributions — Group 6</a:t>
+            </a:r>
+            <a:endParaRPr lang="en-US" sz="3000" dirty="0"/>
+          </a:p>
+        </p:txBody>
+      </p:sp>
+      <p:sp>
+        <p:nvSpPr>
+          <p:cNvPr id="3" name="Shape 1"/>
+          <p:cNvSpPr/>
+          <p:nvPr/>
+        </p:nvSpPr>
+        <p:spPr>
+          <a:xfrm>
+            <a:off x="548640" y="1554480"/>
+            <a:ext cx="11064240" cy="1883664"/>
+          </a:xfrm>
+          <a:prstGeom prst="roundRect">
+            <a:avLst>
+              <a:gd name="adj" fmla="val 3883"/>
             </a:avLst>
           </a:prstGeom>
           <a:solidFill>
@@ -5303,36 +10366,36 @@
       </p:sp>
       <p:sp>
         <p:nvSpPr>
-          <p:cNvPr id="14" name="Shape 12"/>
+          <p:cNvPr id="4" name="Shape 2"/>
           <p:cNvSpPr/>
           <p:nvPr/>
         </p:nvSpPr>
         <p:spPr>
           <a:xfrm>
-            <a:off x="731520" y="3749040"/>
-            <a:ext cx="2834640" cy="384048"/>
+            <a:off x="731520" y="1783080"/>
+            <a:ext cx="2743200" cy="502920"/>
           </a:xfrm>
           <a:prstGeom prst="roundRect">
             <a:avLst>
-              <a:gd name="adj" fmla="val 11905"/>
+              <a:gd name="adj" fmla="val 10909"/>
             </a:avLst>
           </a:prstGeom>
           <a:solidFill>
-            <a:srgbClr val="5A6475"/>
+            <a:srgbClr val="FF6B35"/>
           </a:solidFill>
           <a:ln/>
         </p:spPr>
       </p:sp>
       <p:sp>
         <p:nvSpPr>
-          <p:cNvPr id="15" name="Text 13"/>
+          <p:cNvPr id="5" name="Text 3"/>
           <p:cNvSpPr txBox="1"/>
           <p:nvPr/>
         </p:nvSpPr>
         <p:spPr>
           <a:xfrm>
-            <a:off x="731520" y="3749040"/>
-            <a:ext cx="2834640" cy="384048"/>
+            <a:off x="731520" y="1783080"/>
+            <a:ext cx="2743200" cy="502920"/>
           </a:xfrm>
           <a:prstGeom prst="rect">
             <a:avLst/>
@@ -5348,27 +10411,27 @@
               <a:buNone/>
             </a:pPr>
             <a:r>
-              <a:rPr lang="en-US" sz="1250" b="1" dirty="0">
+              <a:rPr lang="en-US" sz="1500" b="1" dirty="0">
                 <a:solidFill>
                   <a:srgbClr val="FFFFFF"/>
                 </a:solidFill>
               </a:rPr>
-              <a:t>blind</a:t>
-            </a:r>
-            <a:endParaRPr lang="en-US" sz="1250" dirty="0"/>
-          </a:p>
-        </p:txBody>
-      </p:sp>
-      <p:sp>
-        <p:nvSpPr>
-          <p:cNvPr id="16" name="Text 14"/>
+              <a:t>Fahmid Al Rifat</a:t>
+            </a:r>
+            <a:endParaRPr lang="en-US" sz="1500" dirty="0"/>
+          </a:p>
+        </p:txBody>
+      </p:sp>
+      <p:sp>
+        <p:nvSpPr>
+          <p:cNvPr id="6" name="Text 4"/>
           <p:cNvSpPr txBox="1"/>
           <p:nvPr/>
         </p:nvSpPr>
         <p:spPr>
           <a:xfrm>
-            <a:off x="3749040" y="3749040"/>
-            <a:ext cx="7680960" cy="384048"/>
+            <a:off x="3749040" y="1810512"/>
+            <a:ext cx="7680960" cy="365760"/>
           </a:xfrm>
           <a:prstGeom prst="rect">
             <a:avLst/>
@@ -5384,31 +10447,136 @@
               <a:buNone/>
             </a:pPr>
             <a:r>
-              <a:rPr lang="en-US" sz="1300" dirty="0">
+              <a:rPr lang="en-US" sz="1350" b="1" dirty="0">
+                <a:solidFill>
+                  <a:srgbClr val="FF6B35"/>
+                </a:solidFill>
+              </a:rPr>
+              <a:t>•  </a:t>
+            </a:r>
+            <a:pPr indent="0" marL="0">
+              <a:buNone/>
+            </a:pPr>
+            <a:r>
+              <a:rPr lang="en-US" sz="1350" dirty="0">
                 <a:solidFill>
                   <a:srgbClr val="1C2230"/>
                 </a:solidFill>
               </a:rPr>
-              <a:t>agent told nothing</a:t>
-            </a:r>
-            <a:endParaRPr lang="en-US" sz="1300" dirty="0"/>
-          </a:p>
-        </p:txBody>
-      </p:sp>
-      <p:sp>
-        <p:nvSpPr>
-          <p:cNvPr id="17" name="Shape 15"/>
+              <a:t>Steganography versions (design &amp; encode/decode)</a:t>
+            </a:r>
+            <a:endParaRPr lang="en-US" sz="1350" dirty="0"/>
+          </a:p>
+        </p:txBody>
+      </p:sp>
+      <p:sp>
+        <p:nvSpPr>
+          <p:cNvPr id="7" name="Text 5"/>
+          <p:cNvSpPr txBox="1"/>
+          <p:nvPr/>
+        </p:nvSpPr>
+        <p:spPr>
+          <a:xfrm>
+            <a:off x="3749040" y="2194560"/>
+            <a:ext cx="7680960" cy="365760"/>
+          </a:xfrm>
+          <a:prstGeom prst="rect">
+            <a:avLst/>
+          </a:prstGeom>
+          <a:noFill/>
+          <a:ln/>
+        </p:spPr>
+        <p:txBody>
+          <a:bodyPr wrap="square" lIns="0" tIns="0" rIns="0" bIns="0" rtlCol="0" anchor="ctr"/>
+          <a:lstStyle/>
+          <a:p>
+            <a:pPr indent="0" marL="0">
+              <a:buNone/>
+            </a:pPr>
+            <a:r>
+              <a:rPr lang="en-US" sz="1350" b="1" dirty="0">
+                <a:solidFill>
+                  <a:srgbClr val="FF6B35"/>
+                </a:solidFill>
+              </a:rPr>
+              <a:t>•  </a:t>
+            </a:r>
+            <a:pPr indent="0" marL="0">
+              <a:buNone/>
+            </a:pPr>
+            <a:r>
+              <a:rPr lang="en-US" sz="1350" dirty="0">
+                <a:solidFill>
+                  <a:srgbClr val="1C2230"/>
+                </a:solidFill>
+              </a:rPr>
+              <a:t>Task-alignment payload and Stego Payload integration in the full pipeline</a:t>
+            </a:r>
+            <a:endParaRPr lang="en-US" sz="1350" dirty="0"/>
+          </a:p>
+        </p:txBody>
+      </p:sp>
+      <p:sp>
+        <p:nvSpPr>
+          <p:cNvPr id="8" name="Text 6"/>
+          <p:cNvSpPr txBox="1"/>
+          <p:nvPr/>
+        </p:nvSpPr>
+        <p:spPr>
+          <a:xfrm>
+            <a:off x="3749040" y="2578608"/>
+            <a:ext cx="7680960" cy="365760"/>
+          </a:xfrm>
+          <a:prstGeom prst="rect">
+            <a:avLst/>
+          </a:prstGeom>
+          <a:noFill/>
+          <a:ln/>
+        </p:spPr>
+        <p:txBody>
+          <a:bodyPr wrap="square" lIns="0" tIns="0" rIns="0" bIns="0" rtlCol="0" anchor="ctr"/>
+          <a:lstStyle/>
+          <a:p>
+            <a:pPr indent="0" marL="0">
+              <a:buNone/>
+            </a:pPr>
+            <a:r>
+              <a:rPr lang="en-US" sz="1350" b="1" dirty="0">
+                <a:solidFill>
+                  <a:srgbClr val="FF6B35"/>
+                </a:solidFill>
+              </a:rPr>
+              <a:t>•  </a:t>
+            </a:r>
+            <a:pPr indent="0" marL="0">
+              <a:buNone/>
+            </a:pPr>
+            <a:r>
+              <a:rPr lang="en-US" sz="1350" dirty="0">
+                <a:solidFill>
+                  <a:srgbClr val="1C2230"/>
+                </a:solidFill>
+              </a:rPr>
+              <a:t>Evaluation-metric design &amp; Fix</a:t>
+            </a:r>
+            <a:endParaRPr lang="en-US" sz="1350" dirty="0"/>
+          </a:p>
+        </p:txBody>
+      </p:sp>
+      <p:sp>
+        <p:nvSpPr>
+          <p:cNvPr id="9" name="Shape 7"/>
           <p:cNvSpPr/>
           <p:nvPr/>
         </p:nvSpPr>
         <p:spPr>
           <a:xfrm>
-            <a:off x="548640" y="4407408"/>
-            <a:ext cx="11064240" cy="749808"/>
+            <a:off x="548640" y="3666744"/>
+            <a:ext cx="11064240" cy="1499616"/>
           </a:xfrm>
           <a:prstGeom prst="roundRect">
             <a:avLst>
-              <a:gd name="adj" fmla="val 9756"/>
+              <a:gd name="adj" fmla="val 4878"/>
             </a:avLst>
           </a:prstGeom>
           <a:solidFill>
@@ -5431,18 +10599,18 @@
       </p:sp>
       <p:sp>
         <p:nvSpPr>
-          <p:cNvPr id="18" name="Shape 16"/>
+          <p:cNvPr id="10" name="Shape 8"/>
           <p:cNvSpPr/>
           <p:nvPr/>
         </p:nvSpPr>
         <p:spPr>
           <a:xfrm>
-            <a:off x="731520" y="4590288"/>
-            <a:ext cx="2834640" cy="384048"/>
+            <a:off x="731520" y="3895344"/>
+            <a:ext cx="2743200" cy="502920"/>
           </a:xfrm>
           <a:prstGeom prst="roundRect">
             <a:avLst>
-              <a:gd name="adj" fmla="val 11905"/>
+              <a:gd name="adj" fmla="val 10909"/>
             </a:avLst>
           </a:prstGeom>
           <a:solidFill>
@@ -5453,14 +10621,14 @@
       </p:sp>
       <p:sp>
         <p:nvSpPr>
-          <p:cNvPr id="19" name="Text 17"/>
+          <p:cNvPr id="11" name="Text 9"/>
           <p:cNvSpPr txBox="1"/>
           <p:nvPr/>
         </p:nvSpPr>
         <p:spPr>
           <a:xfrm>
-            <a:off x="731520" y="4590288"/>
-            <a:ext cx="2834640" cy="384048"/>
+            <a:off x="731520" y="3895344"/>
+            <a:ext cx="2743200" cy="502920"/>
           </a:xfrm>
           <a:prstGeom prst="rect">
             <a:avLst/>
@@ -5476,27 +10644,27 @@
               <a:buNone/>
             </a:pPr>
             <a:r>
-              <a:rPr lang="en-US" sz="1250" b="1" dirty="0">
+              <a:rPr lang="en-US" sz="1500" b="1" dirty="0">
                 <a:solidFill>
                   <a:srgbClr val="FFFFFF"/>
                 </a:solidFill>
               </a:rPr>
-              <a:t>hinted (prompt)</a:t>
-            </a:r>
-            <a:endParaRPr lang="en-US" sz="1250" dirty="0"/>
-          </a:p>
-        </p:txBody>
-      </p:sp>
-      <p:sp>
-        <p:nvSpPr>
-          <p:cNvPr id="20" name="Text 18"/>
+              <a:t>Danhua Zhao</a:t>
+            </a:r>
+            <a:endParaRPr lang="en-US" sz="1500" dirty="0"/>
+          </a:p>
+        </p:txBody>
+      </p:sp>
+      <p:sp>
+        <p:nvSpPr>
+          <p:cNvPr id="12" name="Text 10"/>
           <p:cNvSpPr txBox="1"/>
           <p:nvPr/>
         </p:nvSpPr>
         <p:spPr>
           <a:xfrm>
-            <a:off x="3749040" y="4590288"/>
-            <a:ext cx="7680960" cy="384048"/>
+            <a:off x="3749040" y="3922776"/>
+            <a:ext cx="7680960" cy="365760"/>
           </a:xfrm>
           <a:prstGeom prst="rect">
             <a:avLst/>
@@ -5512,31 +10680,89 @@
               <a:buNone/>
             </a:pPr>
             <a:r>
-              <a:rPr lang="en-US" sz="1300" dirty="0">
+              <a:rPr lang="en-US" sz="1350" b="1" dirty="0">
+                <a:solidFill>
+                  <a:srgbClr val="2A9D8F"/>
+                </a:solidFill>
+              </a:rPr>
+              <a:t>•  </a:t>
+            </a:r>
+            <a:pPr indent="0" marL="0">
+              <a:buNone/>
+            </a:pPr>
+            <a:r>
+              <a:rPr lang="en-US" sz="1350" dirty="0">
                 <a:solidFill>
                   <a:srgbClr val="1C2230"/>
                 </a:solidFill>
               </a:rPr>
-              <a:t>decode rule in the instruction</a:t>
-            </a:r>
-            <a:endParaRPr lang="en-US" sz="1300" dirty="0"/>
-          </a:p>
-        </p:txBody>
-      </p:sp>
-      <p:sp>
-        <p:nvSpPr>
-          <p:cNvPr id="21" name="Shape 19"/>
+              <a:t>Paper writing</a:t>
+            </a:r>
+            <a:endParaRPr lang="en-US" sz="1350" dirty="0"/>
+          </a:p>
+        </p:txBody>
+      </p:sp>
+      <p:sp>
+        <p:nvSpPr>
+          <p:cNvPr id="13" name="Text 11"/>
+          <p:cNvSpPr txBox="1"/>
+          <p:nvPr/>
+        </p:nvSpPr>
+        <p:spPr>
+          <a:xfrm>
+            <a:off x="3749040" y="4306824"/>
+            <a:ext cx="7680960" cy="365760"/>
+          </a:xfrm>
+          <a:prstGeom prst="rect">
+            <a:avLst/>
+          </a:prstGeom>
+          <a:noFill/>
+          <a:ln/>
+        </p:spPr>
+        <p:txBody>
+          <a:bodyPr wrap="square" lIns="0" tIns="0" rIns="0" bIns="0" rtlCol="0" anchor="ctr"/>
+          <a:lstStyle/>
+          <a:p>
+            <a:pPr indent="0" marL="0">
+              <a:buNone/>
+            </a:pPr>
+            <a:r>
+              <a:rPr lang="en-US" sz="1350" b="1" dirty="0">
+                <a:solidFill>
+                  <a:srgbClr val="2A9D8F"/>
+                </a:solidFill>
+              </a:rPr>
+              <a:t>•  </a:t>
+            </a:r>
+            <a:pPr indent="0" marL="0">
+              <a:buNone/>
+            </a:pPr>
+            <a:r>
+              <a:rPr lang="en-US" sz="1350" dirty="0">
+                <a:solidFill>
+                  <a:srgbClr val="1C2230"/>
+                </a:solidFill>
+              </a:rPr>
+              <a:t>Running the stego-version experiments</a:t>
+            </a:r>
+            <a:endParaRPr lang="en-US" sz="1350" dirty="0"/>
+          </a:p>
+        </p:txBody>
+      </p:sp>
+      <p:sp>
+        <p:nvSpPr>
+          <p:cNvPr id="14" name="Shape 12"/>
           <p:cNvSpPr/>
           <p:nvPr/>
         </p:nvSpPr>
         <p:spPr>
           <a:xfrm>
-            <a:off x="548640" y="5248656"/>
-            <a:ext cx="11064240" cy="749808"/>
+            <a:off x="548640" y="5394960"/>
+            <a:ext cx="11064240" cy="1499616"/>
           </a:xfrm>
           <a:prstGeom prst="roundRect">
             <a:avLst>
-              <a:gd name="adj" fmla="val 9756"/>
+              <a:gd name="adj" fmla="val 4878"/>
             </a:avLst>
           </a:prstGeom>
           <a:solidFill>
@@ -5559,36 +10785,36 @@
       </p:sp>
       <p:sp>
         <p:nvSpPr>
-          <p:cNvPr id="22" name="Shape 20"/>
+          <p:cNvPr id="15" name="Shape 13"/>
           <p:cNvSpPr/>
           <p:nvPr/>
         </p:nvSpPr>
         <p:spPr>
           <a:xfrm>
-            <a:off x="731520" y="5431536"/>
-            <a:ext cx="2834640" cy="384048"/>
+            <a:off x="731520" y="5623560"/>
+            <a:ext cx="2743200" cy="502920"/>
           </a:xfrm>
           <a:prstGeom prst="roundRect">
             <a:avLst>
-              <a:gd name="adj" fmla="val 11905"/>
+              <a:gd name="adj" fmla="val 10909"/>
             </a:avLst>
           </a:prstGeom>
           <a:solidFill>
-            <a:srgbClr val="FF6B35"/>
+            <a:srgbClr val="4A5568"/>
           </a:solidFill>
           <a:ln/>
         </p:spPr>
       </p:sp>
       <p:sp>
         <p:nvSpPr>
-          <p:cNvPr id="23" name="Text 21"/>
+          <p:cNvPr id="16" name="Text 14"/>
           <p:cNvSpPr txBox="1"/>
           <p:nvPr/>
         </p:nvSpPr>
         <p:spPr>
           <a:xfrm>
-            <a:off x="731520" y="5431536"/>
-            <a:ext cx="2834640" cy="384048"/>
+            <a:off x="731520" y="5623560"/>
+            <a:ext cx="2743200" cy="502920"/>
           </a:xfrm>
           <a:prstGeom prst="rect">
             <a:avLst/>
@@ -5604,27 +10830,27 @@
               <a:buNone/>
             </a:pPr>
             <a:r>
-              <a:rPr lang="en-US" sz="1250" b="1" dirty="0">
+              <a:rPr lang="en-US" sz="1500" b="1" dirty="0">
                 <a:solidFill>
                   <a:srgbClr val="FFFFFF"/>
                 </a:solidFill>
               </a:rPr>
-              <a:t>shared-memory codebook</a:t>
-            </a:r>
-            <a:endParaRPr lang="en-US" sz="1250" dirty="0"/>
-          </a:p>
-        </p:txBody>
-      </p:sp>
-      <p:sp>
-        <p:nvSpPr>
-          <p:cNvPr id="24" name="Text 22"/>
+              <a:t>Yinhao Wu</a:t>
+            </a:r>
+            <a:endParaRPr lang="en-US" sz="1500" dirty="0"/>
+          </a:p>
+        </p:txBody>
+      </p:sp>
+      <p:sp>
+        <p:nvSpPr>
+          <p:cNvPr id="17" name="Text 15"/>
           <p:cNvSpPr txBox="1"/>
           <p:nvPr/>
         </p:nvSpPr>
         <p:spPr>
           <a:xfrm>
-            <a:off x="3749040" y="5431536"/>
-            <a:ext cx="7680960" cy="384048"/>
+            <a:off x="3749040" y="5650992"/>
+            <a:ext cx="7680960" cy="365760"/>
           </a:xfrm>
           <a:prstGeom prst="rect">
             <a:avLst/>
@@ -5640,27 +10866,38 @@
               <a:buNone/>
             </a:pPr>
             <a:r>
-              <a:rPr lang="en-US" sz="1300" dirty="0">
+              <a:rPr lang="en-US" sz="1350" b="1" dirty="0">
+                <a:solidFill>
+                  <a:srgbClr val="4A5568"/>
+                </a:solidFill>
+              </a:rPr>
+              <a:t>•  </a:t>
+            </a:r>
+            <a:pPr indent="0" marL="0">
+              <a:buNone/>
+            </a:pPr>
+            <a:r>
+              <a:rPr lang="en-US" sz="1350" dirty="0">
                 <a:solidFill>
                   <a:srgbClr val="1C2230"/>
                 </a:solidFill>
               </a:rPr>
-              <a:t>rulebook planted in the agents' shared memory (colluding agents)</a:t>
-            </a:r>
-            <a:endParaRPr lang="en-US" sz="1300" dirty="0"/>
-          </a:p>
-        </p:txBody>
-      </p:sp>
-      <p:sp>
-        <p:nvSpPr>
-          <p:cNvPr id="25" name="Text 23"/>
+              <a:t>Paper writing</a:t>
+            </a:r>
+            <a:endParaRPr lang="en-US" sz="1350" dirty="0"/>
+          </a:p>
+        </p:txBody>
+      </p:sp>
+      <p:sp>
+        <p:nvSpPr>
+          <p:cNvPr id="18" name="Text 16"/>
           <p:cNvSpPr txBox="1"/>
           <p:nvPr/>
         </p:nvSpPr>
         <p:spPr>
           <a:xfrm>
-            <a:off x="548640" y="6172200"/>
-            <a:ext cx="11064240" cy="457200"/>
+            <a:off x="3749040" y="6035040"/>
+            <a:ext cx="7680960" cy="365760"/>
           </a:xfrm>
           <a:prstGeom prst="rect">
             <a:avLst/>
@@ -5669,21 +10906,32 @@
           <a:ln/>
         </p:spPr>
         <p:txBody>
-          <a:bodyPr wrap="square" rtlCol="0" anchor="ctr"/>
-          <a:lstStyle/>
-          <a:p>
-            <a:pPr indent="0" marL="0">
-              <a:buNone/>
-            </a:pPr>
-            <a:r>
-              <a:rPr lang="en-US" sz="1200" i="1" dirty="0">
-                <a:solidFill>
-                  <a:srgbClr val="E63946"/>
-                </a:solidFill>
-              </a:rPr>
-              <a:t>Expected: blind ≈ 0%; shared-memory codebook most usable → motivates a stronger (generative) encoding.</a:t>
-            </a:r>
-            <a:endParaRPr lang="en-US" sz="1200" dirty="0"/>
+          <a:bodyPr wrap="square" lIns="0" tIns="0" rIns="0" bIns="0" rtlCol="0" anchor="ctr"/>
+          <a:lstStyle/>
+          <a:p>
+            <a:pPr indent="0" marL="0">
+              <a:buNone/>
+            </a:pPr>
+            <a:r>
+              <a:rPr lang="en-US" sz="1350" b="1" dirty="0">
+                <a:solidFill>
+                  <a:srgbClr val="4A5568"/>
+                </a:solidFill>
+              </a:rPr>
+              <a:t>•  </a:t>
+            </a:r>
+            <a:pPr indent="0" marL="0">
+              <a:buNone/>
+            </a:pPr>
+            <a:r>
+              <a:rPr lang="en-US" sz="1350" dirty="0">
+                <a:solidFill>
+                  <a:srgbClr val="1C2230"/>
+                </a:solidFill>
+              </a:rPr>
+              <a:t>Running the image-version stego experiments</a:t>
+            </a:r>
+            <a:endParaRPr lang="en-US" sz="1350" dirty="0"/>
           </a:p>
         </p:txBody>
       </p:sp>
@@ -5695,9 +10943,9 @@
 </p:sld>
 </file>
 
-<file path=ppt/slides/slide12.xml><?xml version="1.0" encoding="utf-8"?>
+<file path=ppt/slides/slide15.xml><?xml version="1.0" encoding="utf-8"?>
 <p:sld xmlns:a="http://schemas.openxmlformats.org/drawingml/2006/main" xmlns:r="http://schemas.openxmlformats.org/officeDocument/2006/relationships" xmlns:p="http://schemas.openxmlformats.org/presentationml/2006/main">
-  <p:cSld name="Slide 12">
+  <p:cSld name="Slide 15">
     <p:bg>
       <p:bgPr>
         <a:solidFill>
@@ -5773,7 +11021,7 @@
             <a:avLst/>
           </a:prstGeom>
           <a:solidFill>
-            <a:srgbClr val="FF6B35"/>
+            <a:srgbClr val="1F9D55"/>
           </a:solidFill>
           <a:ln/>
         </p:spPr>
@@ -5823,7 +11071,7 @@
         <p:spPr>
           <a:xfrm>
             <a:off x="1463040" y="1554480"/>
-            <a:ext cx="10058400" cy="502920"/>
+            <a:ext cx="10058400" cy="640080"/>
           </a:xfrm>
           <a:prstGeom prst="rect">
             <a:avLst/>
@@ -5839,14 +11087,14 @@
               <a:buNone/>
             </a:pPr>
             <a:r>
-              <a:rPr lang="en-US" sz="1600" dirty="0">
+              <a:rPr lang="en-US" sz="1550" dirty="0">
                 <a:solidFill>
                   <a:srgbClr val="E6E9F0"/>
                 </a:solidFill>
               </a:rPr>
-              <a:t>Finish the agent-decode (stego) experiment</a:t>
-            </a:r>
-            <a:endParaRPr lang="en-US" sz="1600" dirty="0"/>
+              <a:t>Agent-decode stego experiment — DONE (only Acrostic+Hinted works)</a:t>
+            </a:r>
+            <a:endParaRPr lang="en-US" sz="1550" dirty="0"/>
           </a:p>
         </p:txBody>
       </p:sp>
@@ -5858,14 +11106,14 @@
         </p:nvSpPr>
         <p:spPr>
           <a:xfrm>
-            <a:off x="731520" y="2423160"/>
+            <a:off x="731520" y="2468880"/>
             <a:ext cx="502920" cy="502920"/>
           </a:xfrm>
           <a:prstGeom prst="ellipse">
             <a:avLst/>
           </a:prstGeom>
           <a:solidFill>
-            <a:srgbClr val="FF6B35"/>
+            <a:srgbClr val="1F9D55"/>
           </a:solidFill>
           <a:ln/>
         </p:spPr>
@@ -5878,7 +11126,7 @@
         </p:nvSpPr>
         <p:spPr>
           <a:xfrm>
-            <a:off x="731520" y="2423160"/>
+            <a:off x="731520" y="2468880"/>
             <a:ext cx="502920" cy="502920"/>
           </a:xfrm>
           <a:prstGeom prst="rect">
@@ -5914,8 +11162,8 @@
         </p:nvSpPr>
         <p:spPr>
           <a:xfrm>
-            <a:off x="1463040" y="2423160"/>
-            <a:ext cx="10058400" cy="502920"/>
+            <a:off x="1463040" y="2468880"/>
+            <a:ext cx="10058400" cy="640080"/>
           </a:xfrm>
           <a:prstGeom prst="rect">
             <a:avLst/>
@@ -5931,14 +11179,14 @@
               <a:buNone/>
             </a:pPr>
             <a:r>
-              <a:rPr lang="en-US" sz="1600" dirty="0">
+              <a:rPr lang="en-US" sz="1550" dirty="0">
                 <a:solidFill>
                   <a:srgbClr val="E6E9F0"/>
                 </a:solidFill>
               </a:rPr>
-              <a:t>Integrate the best stego input version into the pipeline</a:t>
-            </a:r>
-            <a:endParaRPr lang="en-US" sz="1600" dirty="0"/>
+              <a:t>Integrated acrostic+hint stego into the pipeline + full 88-task run — DONE (85/88 delivered)</a:t>
+            </a:r>
+            <a:endParaRPr lang="en-US" sz="1550" dirty="0"/>
           </a:p>
         </p:txBody>
       </p:sp>
@@ -5950,14 +11198,14 @@
         </p:nvSpPr>
         <p:spPr>
           <a:xfrm>
-            <a:off x="731520" y="3291840"/>
+            <a:off x="731520" y="3383280"/>
             <a:ext cx="502920" cy="502920"/>
           </a:xfrm>
           <a:prstGeom prst="ellipse">
             <a:avLst/>
           </a:prstGeom>
           <a:solidFill>
-            <a:srgbClr val="FF6B35"/>
+            <a:srgbClr val="1F9D55"/>
           </a:solidFill>
           <a:ln/>
         </p:spPr>
@@ -5970,7 +11218,7 @@
         </p:nvSpPr>
         <p:spPr>
           <a:xfrm>
-            <a:off x="731520" y="3291840"/>
+            <a:off x="731520" y="3383280"/>
             <a:ext cx="502920" cy="502920"/>
           </a:xfrm>
           <a:prstGeom prst="rect">
@@ -6006,8 +11254,8 @@
         </p:nvSpPr>
         <p:spPr>
           <a:xfrm>
-            <a:off x="1463040" y="3291840"/>
-            <a:ext cx="10058400" cy="502920"/>
+            <a:off x="1463040" y="3383280"/>
+            <a:ext cx="10058400" cy="640080"/>
           </a:xfrm>
           <a:prstGeom prst="rect">
             <a:avLst/>
@@ -6023,14 +11271,14 @@
               <a:buNone/>
             </a:pPr>
             <a:r>
-              <a:rPr lang="en-US" sz="1600" dirty="0">
+              <a:rPr lang="en-US" sz="1550" dirty="0">
                 <a:solidFill>
                   <a:srgbClr val="E6E9F0"/>
                 </a:solidFill>
               </a:rPr>
-              <a:t>Run the last 19 remaining tasks for full 88-task coverage</a:t>
-            </a:r>
-            <a:endParaRPr lang="en-US" sz="1600" dirty="0"/>
+              <a:t>Realistic in-message stego (no codebook) — DONE: delivers 8/10, but weaker (P-ASR 0.25); self-describing acrostic fails (0/3)</a:t>
+            </a:r>
+            <a:endParaRPr lang="en-US" sz="1550" dirty="0"/>
           </a:p>
         </p:txBody>
       </p:sp>
@@ -6042,14 +11290,14 @@
         </p:nvSpPr>
         <p:spPr>
           <a:xfrm>
-            <a:off x="731520" y="4160520"/>
+            <a:off x="731520" y="4297680"/>
             <a:ext cx="502920" cy="502920"/>
           </a:xfrm>
           <a:prstGeom prst="ellipse">
             <a:avLst/>
           </a:prstGeom>
           <a:solidFill>
-            <a:srgbClr val="FF6B35"/>
+            <a:srgbClr val="F7C59F"/>
           </a:solidFill>
           <a:ln/>
         </p:spPr>
@@ -6062,7 +11310,7 @@
         </p:nvSpPr>
         <p:spPr>
           <a:xfrm>
-            <a:off x="731520" y="4160520"/>
+            <a:off x="731520" y="4297680"/>
             <a:ext cx="502920" cy="502920"/>
           </a:xfrm>
           <a:prstGeom prst="rect">
@@ -6098,8 +11346,8 @@
         </p:nvSpPr>
         <p:spPr>
           <a:xfrm>
-            <a:off x="1463040" y="4160520"/>
-            <a:ext cx="10058400" cy="502920"/>
+            <a:off x="1463040" y="4297680"/>
+            <a:ext cx="10058400" cy="640080"/>
           </a:xfrm>
           <a:prstGeom prst="rect">
             <a:avLst/>
@@ -6115,14 +11363,14 @@
               <a:buNone/>
             </a:pPr>
             <a:r>
-              <a:rPr lang="en-US" sz="1600" dirty="0">
+              <a:rPr lang="en-US" sz="1550" dirty="0">
                 <a:solidFill>
                   <a:srgbClr val="E6E9F0"/>
                 </a:solidFill>
               </a:rPr>
-              <a:t>Calculate ERS from the saved transcripts (paper comparison)</a:t>
-            </a:r>
-            <a:endParaRPr lang="en-US" sz="1600" dirty="0"/>
+              <a:t>IMAGE-stego combination: hide the trigger in an image the agents process — to run</a:t>
+            </a:r>
+            <a:endParaRPr lang="en-US" sz="1550" dirty="0"/>
           </a:p>
         </p:txBody>
       </p:sp>
@@ -6134,14 +11382,14 @@
         </p:nvSpPr>
         <p:spPr>
           <a:xfrm>
-            <a:off x="731520" y="5029200"/>
+            <a:off x="731520" y="5212080"/>
             <a:ext cx="502920" cy="502920"/>
           </a:xfrm>
           <a:prstGeom prst="ellipse">
             <a:avLst/>
           </a:prstGeom>
           <a:solidFill>
-            <a:srgbClr val="FF6B35"/>
+            <a:srgbClr val="F7C59F"/>
           </a:solidFill>
           <a:ln/>
         </p:spPr>
@@ -6154,7 +11402,7 @@
         </p:nvSpPr>
         <p:spPr>
           <a:xfrm>
-            <a:off x="731520" y="5029200"/>
+            <a:off x="731520" y="5212080"/>
             <a:ext cx="502920" cy="502920"/>
           </a:xfrm>
           <a:prstGeom prst="rect">
@@ -6190,8 +11438,8 @@
         </p:nvSpPr>
         <p:spPr>
           <a:xfrm>
-            <a:off x="1463040" y="5029200"/>
-            <a:ext cx="10058400" cy="502920"/>
+            <a:off x="1463040" y="5212080"/>
+            <a:ext cx="10058400" cy="640080"/>
           </a:xfrm>
           <a:prstGeom prst="rect">
             <a:avLst/>
@@ -6207,14 +11455,14 @@
               <a:buNone/>
             </a:pPr>
             <a:r>
-              <a:rPr lang="en-US" sz="1600" dirty="0">
+              <a:rPr lang="en-US" sz="1550" dirty="0">
                 <a:solidFill>
                   <a:srgbClr val="E6E9F0"/>
                 </a:solidFill>
               </a:rPr>
-              <a:t>Branching-factor sweep (B = 2 / 3 / 4) for the difficulty–burn curve</a:t>
-            </a:r>
-            <a:endParaRPr lang="en-US" sz="1600" dirty="0"/>
+              <a:t>TAMAS ERS baseline comparison + branching-factor sweep (B = 2 / 3 / 4)</a:t>
+            </a:r>
+            <a:endParaRPr lang="en-US" sz="1550" dirty="0"/>
           </a:p>
         </p:txBody>
       </p:sp>
@@ -12192,7 +17440,7 @@
                   <a:srgbClr val="1C2230"/>
                 </a:solidFill>
               </a:rPr>
-              <a:t>Decode-success</a:t>
+              <a:t>TWS (ours)</a:t>
             </a:r>
             <a:endParaRPr lang="en-US" sz="1350" dirty="0"/>
           </a:p>
@@ -12228,7 +17476,7 @@
                   <a:srgbClr val="5A6475"/>
                 </a:solidFill>
               </a:rPr>
-              <a:t>can the hidden channel carry bits?</a:t>
+              <a:t>token waste score — tokens lost to busywork</a:t>
             </a:r>
             <a:endParaRPr lang="en-US" sz="1050" dirty="0"/>
           </a:p>
@@ -12356,7 +17604,7 @@
                   <a:srgbClr val="1C2230"/>
                 </a:solidFill>
               </a:rPr>
-              <a:t>ERS</a:t>
+              <a:t>ERS (TAMAS)</a:t>
             </a:r>
             <a:endParaRPr lang="en-US" sz="1350" dirty="0"/>
           </a:p>
@@ -12392,7 +17640,7 @@
                   <a:srgbClr val="5A6475"/>
                 </a:solidFill>
               </a:rPr>
-              <a:t>bandwidth lost to busywork (from transcript)</a:t>
+              <a:t>safety score — run their scorer as baseline</a:t>
             </a:r>
             <a:endParaRPr lang="en-US" sz="1050" dirty="0"/>
           </a:p>
@@ -12415,7 +17663,7 @@
             </a:avLst>
           </a:prstGeom>
           <a:solidFill>
-            <a:srgbClr val="2A9D8F"/>
+            <a:srgbClr val="FF6B35"/>
           </a:solidFill>
           <a:ln/>
         </p:spPr>
@@ -12450,7 +17698,7 @@
                   <a:srgbClr val="FFFFFF"/>
                 </a:solidFill>
               </a:rPr>
-              <a:t>applied</a:t>
+              <a:t>baseline</a:t>
             </a:r>
             <a:endParaRPr lang="en-US" sz="1000" dirty="0"/>
           </a:p>
